--- a/plots_files/plots_png/pptx/plots_png.pptx
+++ b/plots_files/plots_png/pptx/plots_png.pptx
@@ -255,7 +255,7 @@
           <a:p>
             <a:fld id="{83D14EEA-DE26-4810-8E05-A65F0010FADE}" type="datetimeFigureOut">
               <a:rPr lang="de-DE" smtClean="0"/>
-              <a:t>19.12.2025</a:t>
+              <a:t>04.02.2026</a:t>
             </a:fld>
             <a:endParaRPr lang="de-DE"/>
           </a:p>
@@ -425,7 +425,7 @@
           <a:p>
             <a:fld id="{83D14EEA-DE26-4810-8E05-A65F0010FADE}" type="datetimeFigureOut">
               <a:rPr lang="de-DE" smtClean="0"/>
-              <a:t>19.12.2025</a:t>
+              <a:t>04.02.2026</a:t>
             </a:fld>
             <a:endParaRPr lang="de-DE"/>
           </a:p>
@@ -605,7 +605,7 @@
           <a:p>
             <a:fld id="{83D14EEA-DE26-4810-8E05-A65F0010FADE}" type="datetimeFigureOut">
               <a:rPr lang="de-DE" smtClean="0"/>
-              <a:t>19.12.2025</a:t>
+              <a:t>04.02.2026</a:t>
             </a:fld>
             <a:endParaRPr lang="de-DE"/>
           </a:p>
@@ -775,7 +775,7 @@
           <a:p>
             <a:fld id="{83D14EEA-DE26-4810-8E05-A65F0010FADE}" type="datetimeFigureOut">
               <a:rPr lang="de-DE" smtClean="0"/>
-              <a:t>19.12.2025</a:t>
+              <a:t>04.02.2026</a:t>
             </a:fld>
             <a:endParaRPr lang="de-DE"/>
           </a:p>
@@ -1019,7 +1019,7 @@
           <a:p>
             <a:fld id="{83D14EEA-DE26-4810-8E05-A65F0010FADE}" type="datetimeFigureOut">
               <a:rPr lang="de-DE" smtClean="0"/>
-              <a:t>19.12.2025</a:t>
+              <a:t>04.02.2026</a:t>
             </a:fld>
             <a:endParaRPr lang="de-DE"/>
           </a:p>
@@ -1251,7 +1251,7 @@
           <a:p>
             <a:fld id="{83D14EEA-DE26-4810-8E05-A65F0010FADE}" type="datetimeFigureOut">
               <a:rPr lang="de-DE" smtClean="0"/>
-              <a:t>19.12.2025</a:t>
+              <a:t>04.02.2026</a:t>
             </a:fld>
             <a:endParaRPr lang="de-DE"/>
           </a:p>
@@ -1618,7 +1618,7 @@
           <a:p>
             <a:fld id="{83D14EEA-DE26-4810-8E05-A65F0010FADE}" type="datetimeFigureOut">
               <a:rPr lang="de-DE" smtClean="0"/>
-              <a:t>19.12.2025</a:t>
+              <a:t>04.02.2026</a:t>
             </a:fld>
             <a:endParaRPr lang="de-DE"/>
           </a:p>
@@ -1736,7 +1736,7 @@
           <a:p>
             <a:fld id="{83D14EEA-DE26-4810-8E05-A65F0010FADE}" type="datetimeFigureOut">
               <a:rPr lang="de-DE" smtClean="0"/>
-              <a:t>19.12.2025</a:t>
+              <a:t>04.02.2026</a:t>
             </a:fld>
             <a:endParaRPr lang="de-DE"/>
           </a:p>
@@ -1831,7 +1831,7 @@
           <a:p>
             <a:fld id="{83D14EEA-DE26-4810-8E05-A65F0010FADE}" type="datetimeFigureOut">
               <a:rPr lang="de-DE" smtClean="0"/>
-              <a:t>19.12.2025</a:t>
+              <a:t>04.02.2026</a:t>
             </a:fld>
             <a:endParaRPr lang="de-DE"/>
           </a:p>
@@ -2108,7 +2108,7 @@
           <a:p>
             <a:fld id="{83D14EEA-DE26-4810-8E05-A65F0010FADE}" type="datetimeFigureOut">
               <a:rPr lang="de-DE" smtClean="0"/>
-              <a:t>19.12.2025</a:t>
+              <a:t>04.02.2026</a:t>
             </a:fld>
             <a:endParaRPr lang="de-DE"/>
           </a:p>
@@ -2365,7 +2365,7 @@
           <a:p>
             <a:fld id="{83D14EEA-DE26-4810-8E05-A65F0010FADE}" type="datetimeFigureOut">
               <a:rPr lang="de-DE" smtClean="0"/>
-              <a:t>19.12.2025</a:t>
+              <a:t>04.02.2026</a:t>
             </a:fld>
             <a:endParaRPr lang="de-DE"/>
           </a:p>
@@ -2578,7 +2578,7 @@
           <a:p>
             <a:fld id="{83D14EEA-DE26-4810-8E05-A65F0010FADE}" type="datetimeFigureOut">
               <a:rPr lang="de-DE" smtClean="0"/>
-              <a:t>19.12.2025</a:t>
+              <a:t>04.02.2026</a:t>
             </a:fld>
             <a:endParaRPr lang="de-DE"/>
           </a:p>
@@ -5255,7 +5255,7 @@
                 <a:latin typeface="Arial" panose="020B0604020202020204" pitchFamily="34" charset="0"/>
                 <a:cs typeface="Arial" panose="020B0604020202020204" pitchFamily="34" charset="0"/>
               </a:rPr>
-              <a:t>(1,722 Citations Overall)</a:t>
+              <a:t>(1,728 Citations Overall)</a:t>
             </a:r>
           </a:p>
         </p:txBody>

--- a/plots_files/plots_png/pptx/plots_png.pptx
+++ b/plots_files/plots_png/pptx/plots_png.pptx
@@ -2,13 +2,13 @@
 <file path=ppt/presentation.xml><?xml version="1.0" encoding="utf-8"?>
 <p:presentation xmlns:a="http://schemas.openxmlformats.org/drawingml/2006/main" xmlns:r="http://schemas.openxmlformats.org/officeDocument/2006/relationships" xmlns:p="http://schemas.openxmlformats.org/presentationml/2006/main" saveSubsetFonts="1">
   <p:sldMasterIdLst>
-    <p:sldMasterId id="2147483672" r:id="rId1"/>
+    <p:sldMasterId id="2147483684" r:id="rId1"/>
   </p:sldMasterIdLst>
   <p:sldIdLst>
     <p:sldId id="260" r:id="rId2"/>
     <p:sldId id="256" r:id="rId3"/>
   </p:sldIdLst>
-  <p:sldSz cx="8047038" cy="12192000"/>
+  <p:sldSz cx="6400800" cy="9144000"/>
   <p:notesSz cx="6858000" cy="9144000"/>
   <p:defaultTextStyle>
     <a:defPPr>
@@ -108,12 +108,12 @@
   <p:extLst>
     <p:ext uri="{EFAFB233-063F-42B5-8137-9DF3F51BA10A}">
       <p15:sldGuideLst xmlns:p15="http://schemas.microsoft.com/office/powerpoint/2012/main">
-        <p15:guide id="1" orient="horz" pos="3840" userDrawn="1">
+        <p15:guide id="1" orient="horz" pos="2880" userDrawn="1">
           <p15:clr>
             <a:srgbClr val="A4A3A4"/>
           </p15:clr>
         </p15:guide>
-        <p15:guide id="2" pos="2534" userDrawn="1">
+        <p15:guide id="2" pos="2016" userDrawn="1">
           <p15:clr>
             <a:srgbClr val="A4A3A4"/>
           </p15:clr>
@@ -153,15 +153,15 @@
         </p:nvSpPr>
         <p:spPr>
           <a:xfrm>
-            <a:off x="603528" y="1995312"/>
-            <a:ext cx="6839982" cy="4244622"/>
+            <a:off x="480060" y="1496484"/>
+            <a:ext cx="5440680" cy="3183467"/>
           </a:xfrm>
         </p:spPr>
         <p:txBody>
           <a:bodyPr anchor="b"/>
           <a:lstStyle>
             <a:lvl1pPr algn="ctr">
-              <a:defRPr sz="5280"/>
+              <a:defRPr sz="4200"/>
             </a:lvl1pPr>
           </a:lstStyle>
           <a:p>
@@ -185,8 +185,8 @@
         </p:nvSpPr>
         <p:spPr>
           <a:xfrm>
-            <a:off x="1005881" y="6403625"/>
-            <a:ext cx="6035279" cy="2943577"/>
+            <a:off x="800100" y="4802717"/>
+            <a:ext cx="4800600" cy="2207683"/>
           </a:xfrm>
         </p:spPr>
         <p:txBody>
@@ -194,39 +194,39 @@
           <a:lstStyle>
             <a:lvl1pPr marL="0" indent="0" algn="ctr">
               <a:buNone/>
-              <a:defRPr sz="2112"/>
+              <a:defRPr sz="1680"/>
             </a:lvl1pPr>
-            <a:lvl2pPr marL="402360" indent="0" algn="ctr">
-              <a:buNone/>
-              <a:defRPr sz="1760"/>
+            <a:lvl2pPr marL="320040" indent="0" algn="ctr">
+              <a:buNone/>
+              <a:defRPr sz="1400"/>
             </a:lvl2pPr>
-            <a:lvl3pPr marL="804720" indent="0" algn="ctr">
-              <a:buNone/>
-              <a:defRPr sz="1584"/>
+            <a:lvl3pPr marL="640080" indent="0" algn="ctr">
+              <a:buNone/>
+              <a:defRPr sz="1260"/>
             </a:lvl3pPr>
-            <a:lvl4pPr marL="1207080" indent="0" algn="ctr">
-              <a:buNone/>
-              <a:defRPr sz="1408"/>
+            <a:lvl4pPr marL="960120" indent="0" algn="ctr">
+              <a:buNone/>
+              <a:defRPr sz="1120"/>
             </a:lvl4pPr>
-            <a:lvl5pPr marL="1609440" indent="0" algn="ctr">
-              <a:buNone/>
-              <a:defRPr sz="1408"/>
+            <a:lvl5pPr marL="1280160" indent="0" algn="ctr">
+              <a:buNone/>
+              <a:defRPr sz="1120"/>
             </a:lvl5pPr>
-            <a:lvl6pPr marL="2011800" indent="0" algn="ctr">
-              <a:buNone/>
-              <a:defRPr sz="1408"/>
+            <a:lvl6pPr marL="1600200" indent="0" algn="ctr">
+              <a:buNone/>
+              <a:defRPr sz="1120"/>
             </a:lvl6pPr>
-            <a:lvl7pPr marL="2414160" indent="0" algn="ctr">
-              <a:buNone/>
-              <a:defRPr sz="1408"/>
+            <a:lvl7pPr marL="1920240" indent="0" algn="ctr">
+              <a:buNone/>
+              <a:defRPr sz="1120"/>
             </a:lvl7pPr>
-            <a:lvl8pPr marL="2816519" indent="0" algn="ctr">
-              <a:buNone/>
-              <a:defRPr sz="1408"/>
+            <a:lvl8pPr marL="2240280" indent="0" algn="ctr">
+              <a:buNone/>
+              <a:defRPr sz="1120"/>
             </a:lvl8pPr>
-            <a:lvl9pPr marL="3218879" indent="0" algn="ctr">
-              <a:buNone/>
-              <a:defRPr sz="1408"/>
+            <a:lvl9pPr marL="2560320" indent="0" algn="ctr">
+              <a:buNone/>
+              <a:defRPr sz="1120"/>
             </a:lvl9pPr>
           </a:lstStyle>
           <a:p>
@@ -255,7 +255,7 @@
           <a:p>
             <a:fld id="{83D14EEA-DE26-4810-8E05-A65F0010FADE}" type="datetimeFigureOut">
               <a:rPr lang="de-DE" smtClean="0"/>
-              <a:t>04.02.2026</a:t>
+              <a:t>25.03.2026</a:t>
             </a:fld>
             <a:endParaRPr lang="de-DE"/>
           </a:p>
@@ -306,7 +306,7 @@
     </p:spTree>
     <p:extLst>
       <p:ext uri="{BB962C8B-B14F-4D97-AF65-F5344CB8AC3E}">
-        <p14:creationId xmlns:p14="http://schemas.microsoft.com/office/powerpoint/2010/main" val="35493441"/>
+        <p14:creationId xmlns:p14="http://schemas.microsoft.com/office/powerpoint/2010/main" val="3156227484"/>
       </p:ext>
     </p:extLst>
   </p:cSld>
@@ -374,7 +374,7 @@
             <a:pPr lvl="0"/>
             <a:r>
               <a:rPr lang="en-US"/>
-              <a:t>Edit Master text styles</a:t>
+              <a:t>Click to edit Master text styles</a:t>
             </a:r>
           </a:p>
           <a:p>
@@ -425,7 +425,7 @@
           <a:p>
             <a:fld id="{83D14EEA-DE26-4810-8E05-A65F0010FADE}" type="datetimeFigureOut">
               <a:rPr lang="de-DE" smtClean="0"/>
-              <a:t>04.02.2026</a:t>
+              <a:t>25.03.2026</a:t>
             </a:fld>
             <a:endParaRPr lang="de-DE"/>
           </a:p>
@@ -476,7 +476,7 @@
     </p:spTree>
     <p:extLst>
       <p:ext uri="{BB962C8B-B14F-4D97-AF65-F5344CB8AC3E}">
-        <p14:creationId xmlns:p14="http://schemas.microsoft.com/office/powerpoint/2010/main" val="4096226600"/>
+        <p14:creationId xmlns:p14="http://schemas.microsoft.com/office/powerpoint/2010/main" val="1650432801"/>
       </p:ext>
     </p:extLst>
   </p:cSld>
@@ -515,8 +515,8 @@
         </p:nvSpPr>
         <p:spPr>
           <a:xfrm>
-            <a:off x="5758663" y="649111"/>
-            <a:ext cx="1735143" cy="10332156"/>
+            <a:off x="4580573" y="486834"/>
+            <a:ext cx="1380173" cy="7749117"/>
           </a:xfrm>
         </p:spPr>
         <p:txBody>
@@ -543,8 +543,8 @@
         </p:nvSpPr>
         <p:spPr>
           <a:xfrm>
-            <a:off x="553234" y="649111"/>
-            <a:ext cx="5104840" cy="10332156"/>
+            <a:off x="440055" y="486834"/>
+            <a:ext cx="4060508" cy="7749117"/>
           </a:xfrm>
         </p:spPr>
         <p:txBody>
@@ -554,7 +554,7 @@
             <a:pPr lvl="0"/>
             <a:r>
               <a:rPr lang="en-US"/>
-              <a:t>Edit Master text styles</a:t>
+              <a:t>Click to edit Master text styles</a:t>
             </a:r>
           </a:p>
           <a:p>
@@ -605,7 +605,7 @@
           <a:p>
             <a:fld id="{83D14EEA-DE26-4810-8E05-A65F0010FADE}" type="datetimeFigureOut">
               <a:rPr lang="de-DE" smtClean="0"/>
-              <a:t>04.02.2026</a:t>
+              <a:t>25.03.2026</a:t>
             </a:fld>
             <a:endParaRPr lang="de-DE"/>
           </a:p>
@@ -656,7 +656,7 @@
     </p:spTree>
     <p:extLst>
       <p:ext uri="{BB962C8B-B14F-4D97-AF65-F5344CB8AC3E}">
-        <p14:creationId xmlns:p14="http://schemas.microsoft.com/office/powerpoint/2010/main" val="4058646796"/>
+        <p14:creationId xmlns:p14="http://schemas.microsoft.com/office/powerpoint/2010/main" val="3469669571"/>
       </p:ext>
     </p:extLst>
   </p:cSld>
@@ -724,7 +724,7 @@
             <a:pPr lvl="0"/>
             <a:r>
               <a:rPr lang="en-US"/>
-              <a:t>Edit Master text styles</a:t>
+              <a:t>Click to edit Master text styles</a:t>
             </a:r>
           </a:p>
           <a:p>
@@ -775,7 +775,7 @@
           <a:p>
             <a:fld id="{83D14EEA-DE26-4810-8E05-A65F0010FADE}" type="datetimeFigureOut">
               <a:rPr lang="de-DE" smtClean="0"/>
-              <a:t>04.02.2026</a:t>
+              <a:t>25.03.2026</a:t>
             </a:fld>
             <a:endParaRPr lang="de-DE"/>
           </a:p>
@@ -826,7 +826,7 @@
     </p:spTree>
     <p:extLst>
       <p:ext uri="{BB962C8B-B14F-4D97-AF65-F5344CB8AC3E}">
-        <p14:creationId xmlns:p14="http://schemas.microsoft.com/office/powerpoint/2010/main" val="3202912804"/>
+        <p14:creationId xmlns:p14="http://schemas.microsoft.com/office/powerpoint/2010/main" val="1295559828"/>
       </p:ext>
     </p:extLst>
   </p:cSld>
@@ -865,15 +865,15 @@
         </p:nvSpPr>
         <p:spPr>
           <a:xfrm>
-            <a:off x="549043" y="3039537"/>
-            <a:ext cx="6940570" cy="5071532"/>
+            <a:off x="436722" y="2279653"/>
+            <a:ext cx="5520690" cy="3803649"/>
           </a:xfrm>
         </p:spPr>
         <p:txBody>
           <a:bodyPr anchor="b"/>
           <a:lstStyle>
             <a:lvl1pPr>
-              <a:defRPr sz="5280"/>
+              <a:defRPr sz="4200"/>
             </a:lvl1pPr>
           </a:lstStyle>
           <a:p>
@@ -897,8 +897,8 @@
         </p:nvSpPr>
         <p:spPr>
           <a:xfrm>
-            <a:off x="549043" y="8159050"/>
-            <a:ext cx="6940570" cy="2666999"/>
+            <a:off x="436722" y="6119286"/>
+            <a:ext cx="5520690" cy="2000249"/>
           </a:xfrm>
         </p:spPr>
         <p:txBody>
@@ -906,15 +906,15 @@
           <a:lstStyle>
             <a:lvl1pPr marL="0" indent="0">
               <a:buNone/>
-              <a:defRPr sz="2112">
+              <a:defRPr sz="1680">
                 <a:solidFill>
                   <a:schemeClr val="tx1"/>
                 </a:solidFill>
               </a:defRPr>
             </a:lvl1pPr>
-            <a:lvl2pPr marL="402360" indent="0">
-              <a:buNone/>
-              <a:defRPr sz="1760">
+            <a:lvl2pPr marL="320040" indent="0">
+              <a:buNone/>
+              <a:defRPr sz="1400">
                 <a:solidFill>
                   <a:schemeClr val="tx1">
                     <a:tint val="75000"/>
@@ -922,9 +922,9 @@
                 </a:solidFill>
               </a:defRPr>
             </a:lvl2pPr>
-            <a:lvl3pPr marL="804720" indent="0">
-              <a:buNone/>
-              <a:defRPr sz="1584">
+            <a:lvl3pPr marL="640080" indent="0">
+              <a:buNone/>
+              <a:defRPr sz="1260">
                 <a:solidFill>
                   <a:schemeClr val="tx1">
                     <a:tint val="75000"/>
@@ -932,9 +932,9 @@
                 </a:solidFill>
               </a:defRPr>
             </a:lvl3pPr>
-            <a:lvl4pPr marL="1207080" indent="0">
-              <a:buNone/>
-              <a:defRPr sz="1408">
+            <a:lvl4pPr marL="960120" indent="0">
+              <a:buNone/>
+              <a:defRPr sz="1120">
                 <a:solidFill>
                   <a:schemeClr val="tx1">
                     <a:tint val="75000"/>
@@ -942,9 +942,9 @@
                 </a:solidFill>
               </a:defRPr>
             </a:lvl4pPr>
-            <a:lvl5pPr marL="1609440" indent="0">
-              <a:buNone/>
-              <a:defRPr sz="1408">
+            <a:lvl5pPr marL="1280160" indent="0">
+              <a:buNone/>
+              <a:defRPr sz="1120">
                 <a:solidFill>
                   <a:schemeClr val="tx1">
                     <a:tint val="75000"/>
@@ -952,9 +952,9 @@
                 </a:solidFill>
               </a:defRPr>
             </a:lvl5pPr>
-            <a:lvl6pPr marL="2011800" indent="0">
-              <a:buNone/>
-              <a:defRPr sz="1408">
+            <a:lvl6pPr marL="1600200" indent="0">
+              <a:buNone/>
+              <a:defRPr sz="1120">
                 <a:solidFill>
                   <a:schemeClr val="tx1">
                     <a:tint val="75000"/>
@@ -962,9 +962,9 @@
                 </a:solidFill>
               </a:defRPr>
             </a:lvl6pPr>
-            <a:lvl7pPr marL="2414160" indent="0">
-              <a:buNone/>
-              <a:defRPr sz="1408">
+            <a:lvl7pPr marL="1920240" indent="0">
+              <a:buNone/>
+              <a:defRPr sz="1120">
                 <a:solidFill>
                   <a:schemeClr val="tx1">
                     <a:tint val="75000"/>
@@ -972,9 +972,9 @@
                 </a:solidFill>
               </a:defRPr>
             </a:lvl7pPr>
-            <a:lvl8pPr marL="2816519" indent="0">
-              <a:buNone/>
-              <a:defRPr sz="1408">
+            <a:lvl8pPr marL="2240280" indent="0">
+              <a:buNone/>
+              <a:defRPr sz="1120">
                 <a:solidFill>
                   <a:schemeClr val="tx1">
                     <a:tint val="75000"/>
@@ -982,9 +982,9 @@
                 </a:solidFill>
               </a:defRPr>
             </a:lvl8pPr>
-            <a:lvl9pPr marL="3218879" indent="0">
-              <a:buNone/>
-              <a:defRPr sz="1408">
+            <a:lvl9pPr marL="2560320" indent="0">
+              <a:buNone/>
+              <a:defRPr sz="1120">
                 <a:solidFill>
                   <a:schemeClr val="tx1">
                     <a:tint val="75000"/>
@@ -997,7 +997,7 @@
             <a:pPr lvl="0"/>
             <a:r>
               <a:rPr lang="en-US"/>
-              <a:t>Edit Master text styles</a:t>
+              <a:t>Click to edit Master text styles</a:t>
             </a:r>
           </a:p>
         </p:txBody>
@@ -1019,7 +1019,7 @@
           <a:p>
             <a:fld id="{83D14EEA-DE26-4810-8E05-A65F0010FADE}" type="datetimeFigureOut">
               <a:rPr lang="de-DE" smtClean="0"/>
-              <a:t>04.02.2026</a:t>
+              <a:t>25.03.2026</a:t>
             </a:fld>
             <a:endParaRPr lang="de-DE"/>
           </a:p>
@@ -1070,7 +1070,7 @@
     </p:spTree>
     <p:extLst>
       <p:ext uri="{BB962C8B-B14F-4D97-AF65-F5344CB8AC3E}">
-        <p14:creationId xmlns:p14="http://schemas.microsoft.com/office/powerpoint/2010/main" val="641222210"/>
+        <p14:creationId xmlns:p14="http://schemas.microsoft.com/office/powerpoint/2010/main" val="3393474116"/>
       </p:ext>
     </p:extLst>
   </p:cSld>
@@ -1132,8 +1132,8 @@
         </p:nvSpPr>
         <p:spPr>
           <a:xfrm>
-            <a:off x="553235" y="3245556"/>
-            <a:ext cx="3419991" cy="7735712"/>
+            <a:off x="440055" y="2434167"/>
+            <a:ext cx="2720340" cy="5801784"/>
           </a:xfrm>
         </p:spPr>
         <p:txBody>
@@ -1143,7 +1143,7 @@
             <a:pPr lvl="0"/>
             <a:r>
               <a:rPr lang="en-US"/>
-              <a:t>Edit Master text styles</a:t>
+              <a:t>Click to edit Master text styles</a:t>
             </a:r>
           </a:p>
           <a:p>
@@ -1189,8 +1189,8 @@
         </p:nvSpPr>
         <p:spPr>
           <a:xfrm>
-            <a:off x="4073814" y="3245556"/>
-            <a:ext cx="3419991" cy="7735712"/>
+            <a:off x="3240405" y="2434167"/>
+            <a:ext cx="2720340" cy="5801784"/>
           </a:xfrm>
         </p:spPr>
         <p:txBody>
@@ -1200,7 +1200,7 @@
             <a:pPr lvl="0"/>
             <a:r>
               <a:rPr lang="en-US"/>
-              <a:t>Edit Master text styles</a:t>
+              <a:t>Click to edit Master text styles</a:t>
             </a:r>
           </a:p>
           <a:p>
@@ -1251,7 +1251,7 @@
           <a:p>
             <a:fld id="{83D14EEA-DE26-4810-8E05-A65F0010FADE}" type="datetimeFigureOut">
               <a:rPr lang="de-DE" smtClean="0"/>
-              <a:t>04.02.2026</a:t>
+              <a:t>25.03.2026</a:t>
             </a:fld>
             <a:endParaRPr lang="de-DE"/>
           </a:p>
@@ -1302,7 +1302,7 @@
     </p:spTree>
     <p:extLst>
       <p:ext uri="{BB962C8B-B14F-4D97-AF65-F5344CB8AC3E}">
-        <p14:creationId xmlns:p14="http://schemas.microsoft.com/office/powerpoint/2010/main" val="1304642626"/>
+        <p14:creationId xmlns:p14="http://schemas.microsoft.com/office/powerpoint/2010/main" val="2831349019"/>
       </p:ext>
     </p:extLst>
   </p:cSld>
@@ -1341,8 +1341,8 @@
         </p:nvSpPr>
         <p:spPr>
           <a:xfrm>
-            <a:off x="554282" y="649114"/>
-            <a:ext cx="6940570" cy="2356556"/>
+            <a:off x="440889" y="486836"/>
+            <a:ext cx="5520690" cy="1767417"/>
           </a:xfrm>
         </p:spPr>
         <p:txBody>
@@ -1369,8 +1369,8 @@
         </p:nvSpPr>
         <p:spPr>
           <a:xfrm>
-            <a:off x="554283" y="2988734"/>
-            <a:ext cx="3404274" cy="1464732"/>
+            <a:off x="440889" y="2241551"/>
+            <a:ext cx="2707838" cy="1098549"/>
           </a:xfrm>
         </p:spPr>
         <p:txBody>
@@ -1378,46 +1378,46 @@
           <a:lstStyle>
             <a:lvl1pPr marL="0" indent="0">
               <a:buNone/>
-              <a:defRPr sz="2112" b="1"/>
+              <a:defRPr sz="1680" b="1"/>
             </a:lvl1pPr>
-            <a:lvl2pPr marL="402360" indent="0">
-              <a:buNone/>
-              <a:defRPr sz="1760" b="1"/>
+            <a:lvl2pPr marL="320040" indent="0">
+              <a:buNone/>
+              <a:defRPr sz="1400" b="1"/>
             </a:lvl2pPr>
-            <a:lvl3pPr marL="804720" indent="0">
-              <a:buNone/>
-              <a:defRPr sz="1584" b="1"/>
+            <a:lvl3pPr marL="640080" indent="0">
+              <a:buNone/>
+              <a:defRPr sz="1260" b="1"/>
             </a:lvl3pPr>
-            <a:lvl4pPr marL="1207080" indent="0">
-              <a:buNone/>
-              <a:defRPr sz="1408" b="1"/>
+            <a:lvl4pPr marL="960120" indent="0">
+              <a:buNone/>
+              <a:defRPr sz="1120" b="1"/>
             </a:lvl4pPr>
-            <a:lvl5pPr marL="1609440" indent="0">
-              <a:buNone/>
-              <a:defRPr sz="1408" b="1"/>
+            <a:lvl5pPr marL="1280160" indent="0">
+              <a:buNone/>
+              <a:defRPr sz="1120" b="1"/>
             </a:lvl5pPr>
-            <a:lvl6pPr marL="2011800" indent="0">
-              <a:buNone/>
-              <a:defRPr sz="1408" b="1"/>
+            <a:lvl6pPr marL="1600200" indent="0">
+              <a:buNone/>
+              <a:defRPr sz="1120" b="1"/>
             </a:lvl6pPr>
-            <a:lvl7pPr marL="2414160" indent="0">
-              <a:buNone/>
-              <a:defRPr sz="1408" b="1"/>
+            <a:lvl7pPr marL="1920240" indent="0">
+              <a:buNone/>
+              <a:defRPr sz="1120" b="1"/>
             </a:lvl7pPr>
-            <a:lvl8pPr marL="2816519" indent="0">
-              <a:buNone/>
-              <a:defRPr sz="1408" b="1"/>
+            <a:lvl8pPr marL="2240280" indent="0">
+              <a:buNone/>
+              <a:defRPr sz="1120" b="1"/>
             </a:lvl8pPr>
-            <a:lvl9pPr marL="3218879" indent="0">
-              <a:buNone/>
-              <a:defRPr sz="1408" b="1"/>
+            <a:lvl9pPr marL="2560320" indent="0">
+              <a:buNone/>
+              <a:defRPr sz="1120" b="1"/>
             </a:lvl9pPr>
           </a:lstStyle>
           <a:p>
             <a:pPr lvl="0"/>
             <a:r>
               <a:rPr lang="en-US"/>
-              <a:t>Edit Master text styles</a:t>
+              <a:t>Click to edit Master text styles</a:t>
             </a:r>
           </a:p>
         </p:txBody>
@@ -1434,8 +1434,8 @@
         </p:nvSpPr>
         <p:spPr>
           <a:xfrm>
-            <a:off x="554283" y="4453469"/>
-            <a:ext cx="3404274" cy="6550379"/>
+            <a:off x="440889" y="3340100"/>
+            <a:ext cx="2707838" cy="4912784"/>
           </a:xfrm>
         </p:spPr>
         <p:txBody>
@@ -1445,7 +1445,7 @@
             <a:pPr lvl="0"/>
             <a:r>
               <a:rPr lang="en-US"/>
-              <a:t>Edit Master text styles</a:t>
+              <a:t>Click to edit Master text styles</a:t>
             </a:r>
           </a:p>
           <a:p>
@@ -1491,8 +1491,8 @@
         </p:nvSpPr>
         <p:spPr>
           <a:xfrm>
-            <a:off x="4073815" y="2988734"/>
-            <a:ext cx="3421039" cy="1464732"/>
+            <a:off x="3240405" y="2241551"/>
+            <a:ext cx="2721174" cy="1098549"/>
           </a:xfrm>
         </p:spPr>
         <p:txBody>
@@ -1500,46 +1500,46 @@
           <a:lstStyle>
             <a:lvl1pPr marL="0" indent="0">
               <a:buNone/>
-              <a:defRPr sz="2112" b="1"/>
+              <a:defRPr sz="1680" b="1"/>
             </a:lvl1pPr>
-            <a:lvl2pPr marL="402360" indent="0">
-              <a:buNone/>
-              <a:defRPr sz="1760" b="1"/>
+            <a:lvl2pPr marL="320040" indent="0">
+              <a:buNone/>
+              <a:defRPr sz="1400" b="1"/>
             </a:lvl2pPr>
-            <a:lvl3pPr marL="804720" indent="0">
-              <a:buNone/>
-              <a:defRPr sz="1584" b="1"/>
+            <a:lvl3pPr marL="640080" indent="0">
+              <a:buNone/>
+              <a:defRPr sz="1260" b="1"/>
             </a:lvl3pPr>
-            <a:lvl4pPr marL="1207080" indent="0">
-              <a:buNone/>
-              <a:defRPr sz="1408" b="1"/>
+            <a:lvl4pPr marL="960120" indent="0">
+              <a:buNone/>
+              <a:defRPr sz="1120" b="1"/>
             </a:lvl4pPr>
-            <a:lvl5pPr marL="1609440" indent="0">
-              <a:buNone/>
-              <a:defRPr sz="1408" b="1"/>
+            <a:lvl5pPr marL="1280160" indent="0">
+              <a:buNone/>
+              <a:defRPr sz="1120" b="1"/>
             </a:lvl5pPr>
-            <a:lvl6pPr marL="2011800" indent="0">
-              <a:buNone/>
-              <a:defRPr sz="1408" b="1"/>
+            <a:lvl6pPr marL="1600200" indent="0">
+              <a:buNone/>
+              <a:defRPr sz="1120" b="1"/>
             </a:lvl6pPr>
-            <a:lvl7pPr marL="2414160" indent="0">
-              <a:buNone/>
-              <a:defRPr sz="1408" b="1"/>
+            <a:lvl7pPr marL="1920240" indent="0">
+              <a:buNone/>
+              <a:defRPr sz="1120" b="1"/>
             </a:lvl7pPr>
-            <a:lvl8pPr marL="2816519" indent="0">
-              <a:buNone/>
-              <a:defRPr sz="1408" b="1"/>
+            <a:lvl8pPr marL="2240280" indent="0">
+              <a:buNone/>
+              <a:defRPr sz="1120" b="1"/>
             </a:lvl8pPr>
-            <a:lvl9pPr marL="3218879" indent="0">
-              <a:buNone/>
-              <a:defRPr sz="1408" b="1"/>
+            <a:lvl9pPr marL="2560320" indent="0">
+              <a:buNone/>
+              <a:defRPr sz="1120" b="1"/>
             </a:lvl9pPr>
           </a:lstStyle>
           <a:p>
             <a:pPr lvl="0"/>
             <a:r>
               <a:rPr lang="en-US"/>
-              <a:t>Edit Master text styles</a:t>
+              <a:t>Click to edit Master text styles</a:t>
             </a:r>
           </a:p>
         </p:txBody>
@@ -1556,8 +1556,8 @@
         </p:nvSpPr>
         <p:spPr>
           <a:xfrm>
-            <a:off x="4073815" y="4453469"/>
-            <a:ext cx="3421039" cy="6550379"/>
+            <a:off x="3240405" y="3340100"/>
+            <a:ext cx="2721174" cy="4912784"/>
           </a:xfrm>
         </p:spPr>
         <p:txBody>
@@ -1567,7 +1567,7 @@
             <a:pPr lvl="0"/>
             <a:r>
               <a:rPr lang="en-US"/>
-              <a:t>Edit Master text styles</a:t>
+              <a:t>Click to edit Master text styles</a:t>
             </a:r>
           </a:p>
           <a:p>
@@ -1618,7 +1618,7 @@
           <a:p>
             <a:fld id="{83D14EEA-DE26-4810-8E05-A65F0010FADE}" type="datetimeFigureOut">
               <a:rPr lang="de-DE" smtClean="0"/>
-              <a:t>04.02.2026</a:t>
+              <a:t>25.03.2026</a:t>
             </a:fld>
             <a:endParaRPr lang="de-DE"/>
           </a:p>
@@ -1669,7 +1669,7 @@
     </p:spTree>
     <p:extLst>
       <p:ext uri="{BB962C8B-B14F-4D97-AF65-F5344CB8AC3E}">
-        <p14:creationId xmlns:p14="http://schemas.microsoft.com/office/powerpoint/2010/main" val="4164898104"/>
+        <p14:creationId xmlns:p14="http://schemas.microsoft.com/office/powerpoint/2010/main" val="38945234"/>
       </p:ext>
     </p:extLst>
   </p:cSld>
@@ -1736,7 +1736,7 @@
           <a:p>
             <a:fld id="{83D14EEA-DE26-4810-8E05-A65F0010FADE}" type="datetimeFigureOut">
               <a:rPr lang="de-DE" smtClean="0"/>
-              <a:t>04.02.2026</a:t>
+              <a:t>25.03.2026</a:t>
             </a:fld>
             <a:endParaRPr lang="de-DE"/>
           </a:p>
@@ -1787,7 +1787,7 @@
     </p:spTree>
     <p:extLst>
       <p:ext uri="{BB962C8B-B14F-4D97-AF65-F5344CB8AC3E}">
-        <p14:creationId xmlns:p14="http://schemas.microsoft.com/office/powerpoint/2010/main" val="3069738833"/>
+        <p14:creationId xmlns:p14="http://schemas.microsoft.com/office/powerpoint/2010/main" val="2504000131"/>
       </p:ext>
     </p:extLst>
   </p:cSld>
@@ -1831,7 +1831,7 @@
           <a:p>
             <a:fld id="{83D14EEA-DE26-4810-8E05-A65F0010FADE}" type="datetimeFigureOut">
               <a:rPr lang="de-DE" smtClean="0"/>
-              <a:t>04.02.2026</a:t>
+              <a:t>25.03.2026</a:t>
             </a:fld>
             <a:endParaRPr lang="de-DE"/>
           </a:p>
@@ -1882,7 +1882,7 @@
     </p:spTree>
     <p:extLst>
       <p:ext uri="{BB962C8B-B14F-4D97-AF65-F5344CB8AC3E}">
-        <p14:creationId xmlns:p14="http://schemas.microsoft.com/office/powerpoint/2010/main" val="1351086057"/>
+        <p14:creationId xmlns:p14="http://schemas.microsoft.com/office/powerpoint/2010/main" val="3558965671"/>
       </p:ext>
     </p:extLst>
   </p:cSld>
@@ -1921,15 +1921,15 @@
         </p:nvSpPr>
         <p:spPr>
           <a:xfrm>
-            <a:off x="554283" y="812800"/>
-            <a:ext cx="2595379" cy="2844800"/>
+            <a:off x="440889" y="609600"/>
+            <a:ext cx="2064425" cy="2133600"/>
           </a:xfrm>
         </p:spPr>
         <p:txBody>
           <a:bodyPr anchor="b"/>
           <a:lstStyle>
             <a:lvl1pPr>
-              <a:defRPr sz="2816"/>
+              <a:defRPr sz="2240"/>
             </a:lvl1pPr>
           </a:lstStyle>
           <a:p>
@@ -1953,46 +1953,46 @@
         </p:nvSpPr>
         <p:spPr>
           <a:xfrm>
-            <a:off x="3421040" y="1755425"/>
-            <a:ext cx="4073813" cy="8664222"/>
+            <a:off x="2721174" y="1316569"/>
+            <a:ext cx="3240405" cy="6498167"/>
           </a:xfrm>
         </p:spPr>
         <p:txBody>
           <a:bodyPr/>
           <a:lstStyle>
             <a:lvl1pPr>
-              <a:defRPr sz="2816"/>
+              <a:defRPr sz="2240"/>
             </a:lvl1pPr>
             <a:lvl2pPr>
-              <a:defRPr sz="2464"/>
+              <a:defRPr sz="1960"/>
             </a:lvl2pPr>
             <a:lvl3pPr>
-              <a:defRPr sz="2112"/>
+              <a:defRPr sz="1680"/>
             </a:lvl3pPr>
             <a:lvl4pPr>
-              <a:defRPr sz="1760"/>
+              <a:defRPr sz="1400"/>
             </a:lvl4pPr>
             <a:lvl5pPr>
-              <a:defRPr sz="1760"/>
+              <a:defRPr sz="1400"/>
             </a:lvl5pPr>
             <a:lvl6pPr>
-              <a:defRPr sz="1760"/>
+              <a:defRPr sz="1400"/>
             </a:lvl6pPr>
             <a:lvl7pPr>
-              <a:defRPr sz="1760"/>
+              <a:defRPr sz="1400"/>
             </a:lvl7pPr>
             <a:lvl8pPr>
-              <a:defRPr sz="1760"/>
+              <a:defRPr sz="1400"/>
             </a:lvl8pPr>
             <a:lvl9pPr>
-              <a:defRPr sz="1760"/>
+              <a:defRPr sz="1400"/>
             </a:lvl9pPr>
           </a:lstStyle>
           <a:p>
             <a:pPr lvl="0"/>
             <a:r>
               <a:rPr lang="en-US"/>
-              <a:t>Edit Master text styles</a:t>
+              <a:t>Click to edit Master text styles</a:t>
             </a:r>
           </a:p>
           <a:p>
@@ -2038,8 +2038,8 @@
         </p:nvSpPr>
         <p:spPr>
           <a:xfrm>
-            <a:off x="554283" y="3657600"/>
-            <a:ext cx="2595379" cy="6776156"/>
+            <a:off x="440889" y="2743200"/>
+            <a:ext cx="2064425" cy="5082117"/>
           </a:xfrm>
         </p:spPr>
         <p:txBody>
@@ -2047,46 +2047,46 @@
           <a:lstStyle>
             <a:lvl1pPr marL="0" indent="0">
               <a:buNone/>
-              <a:defRPr sz="1408"/>
+              <a:defRPr sz="1120"/>
             </a:lvl1pPr>
-            <a:lvl2pPr marL="402360" indent="0">
-              <a:buNone/>
-              <a:defRPr sz="1232"/>
+            <a:lvl2pPr marL="320040" indent="0">
+              <a:buNone/>
+              <a:defRPr sz="980"/>
             </a:lvl2pPr>
-            <a:lvl3pPr marL="804720" indent="0">
-              <a:buNone/>
-              <a:defRPr sz="1056"/>
+            <a:lvl3pPr marL="640080" indent="0">
+              <a:buNone/>
+              <a:defRPr sz="840"/>
             </a:lvl3pPr>
-            <a:lvl4pPr marL="1207080" indent="0">
-              <a:buNone/>
-              <a:defRPr sz="880"/>
+            <a:lvl4pPr marL="960120" indent="0">
+              <a:buNone/>
+              <a:defRPr sz="700"/>
             </a:lvl4pPr>
-            <a:lvl5pPr marL="1609440" indent="0">
-              <a:buNone/>
-              <a:defRPr sz="880"/>
+            <a:lvl5pPr marL="1280160" indent="0">
+              <a:buNone/>
+              <a:defRPr sz="700"/>
             </a:lvl5pPr>
-            <a:lvl6pPr marL="2011800" indent="0">
-              <a:buNone/>
-              <a:defRPr sz="880"/>
+            <a:lvl6pPr marL="1600200" indent="0">
+              <a:buNone/>
+              <a:defRPr sz="700"/>
             </a:lvl6pPr>
-            <a:lvl7pPr marL="2414160" indent="0">
-              <a:buNone/>
-              <a:defRPr sz="880"/>
+            <a:lvl7pPr marL="1920240" indent="0">
+              <a:buNone/>
+              <a:defRPr sz="700"/>
             </a:lvl7pPr>
-            <a:lvl8pPr marL="2816519" indent="0">
-              <a:buNone/>
-              <a:defRPr sz="880"/>
+            <a:lvl8pPr marL="2240280" indent="0">
+              <a:buNone/>
+              <a:defRPr sz="700"/>
             </a:lvl8pPr>
-            <a:lvl9pPr marL="3218879" indent="0">
-              <a:buNone/>
-              <a:defRPr sz="880"/>
+            <a:lvl9pPr marL="2560320" indent="0">
+              <a:buNone/>
+              <a:defRPr sz="700"/>
             </a:lvl9pPr>
           </a:lstStyle>
           <a:p>
             <a:pPr lvl="0"/>
             <a:r>
               <a:rPr lang="en-US"/>
-              <a:t>Edit Master text styles</a:t>
+              <a:t>Click to edit Master text styles</a:t>
             </a:r>
           </a:p>
         </p:txBody>
@@ -2108,7 +2108,7 @@
           <a:p>
             <a:fld id="{83D14EEA-DE26-4810-8E05-A65F0010FADE}" type="datetimeFigureOut">
               <a:rPr lang="de-DE" smtClean="0"/>
-              <a:t>04.02.2026</a:t>
+              <a:t>25.03.2026</a:t>
             </a:fld>
             <a:endParaRPr lang="de-DE"/>
           </a:p>
@@ -2159,7 +2159,7 @@
     </p:spTree>
     <p:extLst>
       <p:ext uri="{BB962C8B-B14F-4D97-AF65-F5344CB8AC3E}">
-        <p14:creationId xmlns:p14="http://schemas.microsoft.com/office/powerpoint/2010/main" val="4218502842"/>
+        <p14:creationId xmlns:p14="http://schemas.microsoft.com/office/powerpoint/2010/main" val="2185992705"/>
       </p:ext>
     </p:extLst>
   </p:cSld>
@@ -2198,15 +2198,15 @@
         </p:nvSpPr>
         <p:spPr>
           <a:xfrm>
-            <a:off x="554283" y="812800"/>
-            <a:ext cx="2595379" cy="2844800"/>
+            <a:off x="440889" y="609600"/>
+            <a:ext cx="2064425" cy="2133600"/>
           </a:xfrm>
         </p:spPr>
         <p:txBody>
           <a:bodyPr anchor="b"/>
           <a:lstStyle>
             <a:lvl1pPr>
-              <a:defRPr sz="2816"/>
+              <a:defRPr sz="2240"/>
             </a:lvl1pPr>
           </a:lstStyle>
           <a:p>
@@ -2230,8 +2230,8 @@
         </p:nvSpPr>
         <p:spPr>
           <a:xfrm>
-            <a:off x="3421040" y="1755425"/>
-            <a:ext cx="4073813" cy="8664222"/>
+            <a:off x="2721174" y="1316569"/>
+            <a:ext cx="3240405" cy="6498167"/>
           </a:xfrm>
         </p:spPr>
         <p:txBody>
@@ -2239,39 +2239,39 @@
           <a:lstStyle>
             <a:lvl1pPr marL="0" indent="0">
               <a:buNone/>
-              <a:defRPr sz="2816"/>
+              <a:defRPr sz="2240"/>
             </a:lvl1pPr>
-            <a:lvl2pPr marL="402360" indent="0">
-              <a:buNone/>
-              <a:defRPr sz="2464"/>
+            <a:lvl2pPr marL="320040" indent="0">
+              <a:buNone/>
+              <a:defRPr sz="1960"/>
             </a:lvl2pPr>
-            <a:lvl3pPr marL="804720" indent="0">
-              <a:buNone/>
-              <a:defRPr sz="2112"/>
+            <a:lvl3pPr marL="640080" indent="0">
+              <a:buNone/>
+              <a:defRPr sz="1680"/>
             </a:lvl3pPr>
-            <a:lvl4pPr marL="1207080" indent="0">
-              <a:buNone/>
-              <a:defRPr sz="1760"/>
+            <a:lvl4pPr marL="960120" indent="0">
+              <a:buNone/>
+              <a:defRPr sz="1400"/>
             </a:lvl4pPr>
-            <a:lvl5pPr marL="1609440" indent="0">
-              <a:buNone/>
-              <a:defRPr sz="1760"/>
+            <a:lvl5pPr marL="1280160" indent="0">
+              <a:buNone/>
+              <a:defRPr sz="1400"/>
             </a:lvl5pPr>
-            <a:lvl6pPr marL="2011800" indent="0">
-              <a:buNone/>
-              <a:defRPr sz="1760"/>
+            <a:lvl6pPr marL="1600200" indent="0">
+              <a:buNone/>
+              <a:defRPr sz="1400"/>
             </a:lvl6pPr>
-            <a:lvl7pPr marL="2414160" indent="0">
-              <a:buNone/>
-              <a:defRPr sz="1760"/>
+            <a:lvl7pPr marL="1920240" indent="0">
+              <a:buNone/>
+              <a:defRPr sz="1400"/>
             </a:lvl7pPr>
-            <a:lvl8pPr marL="2816519" indent="0">
-              <a:buNone/>
-              <a:defRPr sz="1760"/>
+            <a:lvl8pPr marL="2240280" indent="0">
+              <a:buNone/>
+              <a:defRPr sz="1400"/>
             </a:lvl8pPr>
-            <a:lvl9pPr marL="3218879" indent="0">
-              <a:buNone/>
-              <a:defRPr sz="1760"/>
+            <a:lvl9pPr marL="2560320" indent="0">
+              <a:buNone/>
+              <a:defRPr sz="1400"/>
             </a:lvl9pPr>
           </a:lstStyle>
           <a:p>
@@ -2295,8 +2295,8 @@
         </p:nvSpPr>
         <p:spPr>
           <a:xfrm>
-            <a:off x="554283" y="3657600"/>
-            <a:ext cx="2595379" cy="6776156"/>
+            <a:off x="440889" y="2743200"/>
+            <a:ext cx="2064425" cy="5082117"/>
           </a:xfrm>
         </p:spPr>
         <p:txBody>
@@ -2304,46 +2304,46 @@
           <a:lstStyle>
             <a:lvl1pPr marL="0" indent="0">
               <a:buNone/>
-              <a:defRPr sz="1408"/>
+              <a:defRPr sz="1120"/>
             </a:lvl1pPr>
-            <a:lvl2pPr marL="402360" indent="0">
-              <a:buNone/>
-              <a:defRPr sz="1232"/>
+            <a:lvl2pPr marL="320040" indent="0">
+              <a:buNone/>
+              <a:defRPr sz="980"/>
             </a:lvl2pPr>
-            <a:lvl3pPr marL="804720" indent="0">
-              <a:buNone/>
-              <a:defRPr sz="1056"/>
+            <a:lvl3pPr marL="640080" indent="0">
+              <a:buNone/>
+              <a:defRPr sz="840"/>
             </a:lvl3pPr>
-            <a:lvl4pPr marL="1207080" indent="0">
-              <a:buNone/>
-              <a:defRPr sz="880"/>
+            <a:lvl4pPr marL="960120" indent="0">
+              <a:buNone/>
+              <a:defRPr sz="700"/>
             </a:lvl4pPr>
-            <a:lvl5pPr marL="1609440" indent="0">
-              <a:buNone/>
-              <a:defRPr sz="880"/>
+            <a:lvl5pPr marL="1280160" indent="0">
+              <a:buNone/>
+              <a:defRPr sz="700"/>
             </a:lvl5pPr>
-            <a:lvl6pPr marL="2011800" indent="0">
-              <a:buNone/>
-              <a:defRPr sz="880"/>
+            <a:lvl6pPr marL="1600200" indent="0">
+              <a:buNone/>
+              <a:defRPr sz="700"/>
             </a:lvl6pPr>
-            <a:lvl7pPr marL="2414160" indent="0">
-              <a:buNone/>
-              <a:defRPr sz="880"/>
+            <a:lvl7pPr marL="1920240" indent="0">
+              <a:buNone/>
+              <a:defRPr sz="700"/>
             </a:lvl7pPr>
-            <a:lvl8pPr marL="2816519" indent="0">
-              <a:buNone/>
-              <a:defRPr sz="880"/>
+            <a:lvl8pPr marL="2240280" indent="0">
+              <a:buNone/>
+              <a:defRPr sz="700"/>
             </a:lvl8pPr>
-            <a:lvl9pPr marL="3218879" indent="0">
-              <a:buNone/>
-              <a:defRPr sz="880"/>
+            <a:lvl9pPr marL="2560320" indent="0">
+              <a:buNone/>
+              <a:defRPr sz="700"/>
             </a:lvl9pPr>
           </a:lstStyle>
           <a:p>
             <a:pPr lvl="0"/>
             <a:r>
               <a:rPr lang="en-US"/>
-              <a:t>Edit Master text styles</a:t>
+              <a:t>Click to edit Master text styles</a:t>
             </a:r>
           </a:p>
         </p:txBody>
@@ -2365,7 +2365,7 @@
           <a:p>
             <a:fld id="{83D14EEA-DE26-4810-8E05-A65F0010FADE}" type="datetimeFigureOut">
               <a:rPr lang="de-DE" smtClean="0"/>
-              <a:t>04.02.2026</a:t>
+              <a:t>25.03.2026</a:t>
             </a:fld>
             <a:endParaRPr lang="de-DE"/>
           </a:p>
@@ -2416,7 +2416,7 @@
     </p:spTree>
     <p:extLst>
       <p:ext uri="{BB962C8B-B14F-4D97-AF65-F5344CB8AC3E}">
-        <p14:creationId xmlns:p14="http://schemas.microsoft.com/office/powerpoint/2010/main" val="1584432041"/>
+        <p14:creationId xmlns:p14="http://schemas.microsoft.com/office/powerpoint/2010/main" val="1817438264"/>
       </p:ext>
     </p:extLst>
   </p:cSld>
@@ -2460,8 +2460,8 @@
         </p:nvSpPr>
         <p:spPr>
           <a:xfrm>
-            <a:off x="553234" y="649114"/>
-            <a:ext cx="6940570" cy="2356556"/>
+            <a:off x="440055" y="486836"/>
+            <a:ext cx="5520690" cy="1767417"/>
           </a:xfrm>
           <a:prstGeom prst="rect">
             <a:avLst/>
@@ -2493,8 +2493,8 @@
         </p:nvSpPr>
         <p:spPr>
           <a:xfrm>
-            <a:off x="553234" y="3245556"/>
-            <a:ext cx="6940570" cy="7735712"/>
+            <a:off x="440055" y="2434167"/>
+            <a:ext cx="5520690" cy="5801784"/>
           </a:xfrm>
           <a:prstGeom prst="rect">
             <a:avLst/>
@@ -2509,7 +2509,7 @@
             <a:pPr lvl="0"/>
             <a:r>
               <a:rPr lang="en-US"/>
-              <a:t>Edit Master text styles</a:t>
+              <a:t>Click to edit Master text styles</a:t>
             </a:r>
           </a:p>
           <a:p>
@@ -2555,8 +2555,8 @@
         </p:nvSpPr>
         <p:spPr>
           <a:xfrm>
-            <a:off x="553234" y="11300183"/>
-            <a:ext cx="1810584" cy="649111"/>
+            <a:off x="440055" y="8475136"/>
+            <a:ext cx="1440180" cy="486833"/>
           </a:xfrm>
           <a:prstGeom prst="rect">
             <a:avLst/>
@@ -2566,7 +2566,7 @@
           <a:bodyPr vert="horz" lIns="91440" tIns="45720" rIns="91440" bIns="45720" rtlCol="0" anchor="ctr"/>
           <a:lstStyle>
             <a:lvl1pPr algn="l">
-              <a:defRPr sz="1056">
+              <a:defRPr sz="840">
                 <a:solidFill>
                   <a:schemeClr val="tx1">
                     <a:tint val="75000"/>
@@ -2578,7 +2578,7 @@
           <a:p>
             <a:fld id="{83D14EEA-DE26-4810-8E05-A65F0010FADE}" type="datetimeFigureOut">
               <a:rPr lang="de-DE" smtClean="0"/>
-              <a:t>04.02.2026</a:t>
+              <a:t>25.03.2026</a:t>
             </a:fld>
             <a:endParaRPr lang="de-DE"/>
           </a:p>
@@ -2596,8 +2596,8 @@
         </p:nvSpPr>
         <p:spPr>
           <a:xfrm>
-            <a:off x="2665583" y="11300183"/>
-            <a:ext cx="2715875" cy="649111"/>
+            <a:off x="2120265" y="8475136"/>
+            <a:ext cx="2160270" cy="486833"/>
           </a:xfrm>
           <a:prstGeom prst="rect">
             <a:avLst/>
@@ -2607,7 +2607,7 @@
           <a:bodyPr vert="horz" lIns="91440" tIns="45720" rIns="91440" bIns="45720" rtlCol="0" anchor="ctr"/>
           <a:lstStyle>
             <a:lvl1pPr algn="ctr">
-              <a:defRPr sz="1056">
+              <a:defRPr sz="840">
                 <a:solidFill>
                   <a:schemeClr val="tx1">
                     <a:tint val="75000"/>
@@ -2633,8 +2633,8 @@
         </p:nvSpPr>
         <p:spPr>
           <a:xfrm>
-            <a:off x="5683220" y="11300183"/>
-            <a:ext cx="1810584" cy="649111"/>
+            <a:off x="4520565" y="8475136"/>
+            <a:ext cx="1440180" cy="486833"/>
           </a:xfrm>
           <a:prstGeom prst="rect">
             <a:avLst/>
@@ -2644,7 +2644,7 @@
           <a:bodyPr vert="horz" lIns="91440" tIns="45720" rIns="91440" bIns="45720" rtlCol="0" anchor="ctr"/>
           <a:lstStyle>
             <a:lvl1pPr algn="r">
-              <a:defRPr sz="1056">
+              <a:defRPr sz="840">
                 <a:solidFill>
                   <a:schemeClr val="tx1">
                     <a:tint val="75000"/>
@@ -2665,27 +2665,27 @@
     </p:spTree>
     <p:extLst>
       <p:ext uri="{BB962C8B-B14F-4D97-AF65-F5344CB8AC3E}">
-        <p14:creationId xmlns:p14="http://schemas.microsoft.com/office/powerpoint/2010/main" val="788964536"/>
+        <p14:creationId xmlns:p14="http://schemas.microsoft.com/office/powerpoint/2010/main" val="1802223053"/>
       </p:ext>
     </p:extLst>
   </p:cSld>
   <p:clrMap bg1="lt1" tx1="dk1" bg2="lt2" tx2="dk2" accent1="accent1" accent2="accent2" accent3="accent3" accent4="accent4" accent5="accent5" accent6="accent6" hlink="hlink" folHlink="folHlink"/>
   <p:sldLayoutIdLst>
-    <p:sldLayoutId id="2147483673" r:id="rId1"/>
-    <p:sldLayoutId id="2147483674" r:id="rId2"/>
-    <p:sldLayoutId id="2147483675" r:id="rId3"/>
-    <p:sldLayoutId id="2147483676" r:id="rId4"/>
-    <p:sldLayoutId id="2147483677" r:id="rId5"/>
-    <p:sldLayoutId id="2147483678" r:id="rId6"/>
-    <p:sldLayoutId id="2147483679" r:id="rId7"/>
-    <p:sldLayoutId id="2147483680" r:id="rId8"/>
-    <p:sldLayoutId id="2147483681" r:id="rId9"/>
-    <p:sldLayoutId id="2147483682" r:id="rId10"/>
-    <p:sldLayoutId id="2147483683" r:id="rId11"/>
+    <p:sldLayoutId id="2147483685" r:id="rId1"/>
+    <p:sldLayoutId id="2147483686" r:id="rId2"/>
+    <p:sldLayoutId id="2147483687" r:id="rId3"/>
+    <p:sldLayoutId id="2147483688" r:id="rId4"/>
+    <p:sldLayoutId id="2147483689" r:id="rId5"/>
+    <p:sldLayoutId id="2147483690" r:id="rId6"/>
+    <p:sldLayoutId id="2147483691" r:id="rId7"/>
+    <p:sldLayoutId id="2147483692" r:id="rId8"/>
+    <p:sldLayoutId id="2147483693" r:id="rId9"/>
+    <p:sldLayoutId id="2147483694" r:id="rId10"/>
+    <p:sldLayoutId id="2147483695" r:id="rId11"/>
   </p:sldLayoutIdLst>
   <p:txStyles>
     <p:titleStyle>
-      <a:lvl1pPr algn="l" defTabSz="804720" rtl="0" eaLnBrk="1" latinLnBrk="0" hangingPunct="1">
+      <a:lvl1pPr algn="l" defTabSz="640080" rtl="0" eaLnBrk="1" latinLnBrk="0" hangingPunct="1">
         <a:lnSpc>
           <a:spcPct val="90000"/>
         </a:lnSpc>
@@ -2693,7 +2693,7 @@
           <a:spcPct val="0"/>
         </a:spcBef>
         <a:buNone/>
-        <a:defRPr sz="3872" kern="1200">
+        <a:defRPr sz="3080" kern="1200">
           <a:solidFill>
             <a:schemeClr val="tx1"/>
           </a:solidFill>
@@ -2704,16 +2704,16 @@
       </a:lvl1pPr>
     </p:titleStyle>
     <p:bodyStyle>
-      <a:lvl1pPr marL="201180" indent="-201180" algn="l" defTabSz="804720" rtl="0" eaLnBrk="1" latinLnBrk="0" hangingPunct="1">
+      <a:lvl1pPr marL="160020" indent="-160020" algn="l" defTabSz="640080" rtl="0" eaLnBrk="1" latinLnBrk="0" hangingPunct="1">
         <a:lnSpc>
           <a:spcPct val="90000"/>
         </a:lnSpc>
         <a:spcBef>
-          <a:spcPts val="880"/>
+          <a:spcPts val="700"/>
         </a:spcBef>
         <a:buFont typeface="Arial" panose="020B0604020202020204" pitchFamily="34" charset="0"/>
         <a:buChar char="•"/>
-        <a:defRPr sz="2464" kern="1200">
+        <a:defRPr sz="1960" kern="1200">
           <a:solidFill>
             <a:schemeClr val="tx1"/>
           </a:solidFill>
@@ -2722,16 +2722,16 @@
           <a:cs typeface="+mn-cs"/>
         </a:defRPr>
       </a:lvl1pPr>
-      <a:lvl2pPr marL="603540" indent="-201180" algn="l" defTabSz="804720" rtl="0" eaLnBrk="1" latinLnBrk="0" hangingPunct="1">
+      <a:lvl2pPr marL="480060" indent="-160020" algn="l" defTabSz="640080" rtl="0" eaLnBrk="1" latinLnBrk="0" hangingPunct="1">
         <a:lnSpc>
           <a:spcPct val="90000"/>
         </a:lnSpc>
         <a:spcBef>
-          <a:spcPts val="440"/>
+          <a:spcPts val="350"/>
         </a:spcBef>
         <a:buFont typeface="Arial" panose="020B0604020202020204" pitchFamily="34" charset="0"/>
         <a:buChar char="•"/>
-        <a:defRPr sz="2112" kern="1200">
+        <a:defRPr sz="1680" kern="1200">
           <a:solidFill>
             <a:schemeClr val="tx1"/>
           </a:solidFill>
@@ -2740,16 +2740,16 @@
           <a:cs typeface="+mn-cs"/>
         </a:defRPr>
       </a:lvl2pPr>
-      <a:lvl3pPr marL="1005900" indent="-201180" algn="l" defTabSz="804720" rtl="0" eaLnBrk="1" latinLnBrk="0" hangingPunct="1">
+      <a:lvl3pPr marL="800100" indent="-160020" algn="l" defTabSz="640080" rtl="0" eaLnBrk="1" latinLnBrk="0" hangingPunct="1">
         <a:lnSpc>
           <a:spcPct val="90000"/>
         </a:lnSpc>
         <a:spcBef>
-          <a:spcPts val="440"/>
+          <a:spcPts val="350"/>
         </a:spcBef>
         <a:buFont typeface="Arial" panose="020B0604020202020204" pitchFamily="34" charset="0"/>
         <a:buChar char="•"/>
-        <a:defRPr sz="1760" kern="1200">
+        <a:defRPr sz="1400" kern="1200">
           <a:solidFill>
             <a:schemeClr val="tx1"/>
           </a:solidFill>
@@ -2758,16 +2758,16 @@
           <a:cs typeface="+mn-cs"/>
         </a:defRPr>
       </a:lvl3pPr>
-      <a:lvl4pPr marL="1408260" indent="-201180" algn="l" defTabSz="804720" rtl="0" eaLnBrk="1" latinLnBrk="0" hangingPunct="1">
+      <a:lvl4pPr marL="1120140" indent="-160020" algn="l" defTabSz="640080" rtl="0" eaLnBrk="1" latinLnBrk="0" hangingPunct="1">
         <a:lnSpc>
           <a:spcPct val="90000"/>
         </a:lnSpc>
         <a:spcBef>
-          <a:spcPts val="440"/>
+          <a:spcPts val="350"/>
         </a:spcBef>
         <a:buFont typeface="Arial" panose="020B0604020202020204" pitchFamily="34" charset="0"/>
         <a:buChar char="•"/>
-        <a:defRPr sz="1584" kern="1200">
+        <a:defRPr sz="1260" kern="1200">
           <a:solidFill>
             <a:schemeClr val="tx1"/>
           </a:solidFill>
@@ -2776,16 +2776,16 @@
           <a:cs typeface="+mn-cs"/>
         </a:defRPr>
       </a:lvl4pPr>
-      <a:lvl5pPr marL="1810620" indent="-201180" algn="l" defTabSz="804720" rtl="0" eaLnBrk="1" latinLnBrk="0" hangingPunct="1">
+      <a:lvl5pPr marL="1440180" indent="-160020" algn="l" defTabSz="640080" rtl="0" eaLnBrk="1" latinLnBrk="0" hangingPunct="1">
         <a:lnSpc>
           <a:spcPct val="90000"/>
         </a:lnSpc>
         <a:spcBef>
-          <a:spcPts val="440"/>
+          <a:spcPts val="350"/>
         </a:spcBef>
         <a:buFont typeface="Arial" panose="020B0604020202020204" pitchFamily="34" charset="0"/>
         <a:buChar char="•"/>
-        <a:defRPr sz="1584" kern="1200">
+        <a:defRPr sz="1260" kern="1200">
           <a:solidFill>
             <a:schemeClr val="tx1"/>
           </a:solidFill>
@@ -2794,16 +2794,16 @@
           <a:cs typeface="+mn-cs"/>
         </a:defRPr>
       </a:lvl5pPr>
-      <a:lvl6pPr marL="2212980" indent="-201180" algn="l" defTabSz="804720" rtl="0" eaLnBrk="1" latinLnBrk="0" hangingPunct="1">
+      <a:lvl6pPr marL="1760220" indent="-160020" algn="l" defTabSz="640080" rtl="0" eaLnBrk="1" latinLnBrk="0" hangingPunct="1">
         <a:lnSpc>
           <a:spcPct val="90000"/>
         </a:lnSpc>
         <a:spcBef>
-          <a:spcPts val="440"/>
+          <a:spcPts val="350"/>
         </a:spcBef>
         <a:buFont typeface="Arial" panose="020B0604020202020204" pitchFamily="34" charset="0"/>
         <a:buChar char="•"/>
-        <a:defRPr sz="1584" kern="1200">
+        <a:defRPr sz="1260" kern="1200">
           <a:solidFill>
             <a:schemeClr val="tx1"/>
           </a:solidFill>
@@ -2812,16 +2812,16 @@
           <a:cs typeface="+mn-cs"/>
         </a:defRPr>
       </a:lvl6pPr>
-      <a:lvl7pPr marL="2615340" indent="-201180" algn="l" defTabSz="804720" rtl="0" eaLnBrk="1" latinLnBrk="0" hangingPunct="1">
+      <a:lvl7pPr marL="2080260" indent="-160020" algn="l" defTabSz="640080" rtl="0" eaLnBrk="1" latinLnBrk="0" hangingPunct="1">
         <a:lnSpc>
           <a:spcPct val="90000"/>
         </a:lnSpc>
         <a:spcBef>
-          <a:spcPts val="440"/>
+          <a:spcPts val="350"/>
         </a:spcBef>
         <a:buFont typeface="Arial" panose="020B0604020202020204" pitchFamily="34" charset="0"/>
         <a:buChar char="•"/>
-        <a:defRPr sz="1584" kern="1200">
+        <a:defRPr sz="1260" kern="1200">
           <a:solidFill>
             <a:schemeClr val="tx1"/>
           </a:solidFill>
@@ -2830,16 +2830,16 @@
           <a:cs typeface="+mn-cs"/>
         </a:defRPr>
       </a:lvl7pPr>
-      <a:lvl8pPr marL="3017699" indent="-201180" algn="l" defTabSz="804720" rtl="0" eaLnBrk="1" latinLnBrk="0" hangingPunct="1">
+      <a:lvl8pPr marL="2400300" indent="-160020" algn="l" defTabSz="640080" rtl="0" eaLnBrk="1" latinLnBrk="0" hangingPunct="1">
         <a:lnSpc>
           <a:spcPct val="90000"/>
         </a:lnSpc>
         <a:spcBef>
-          <a:spcPts val="440"/>
+          <a:spcPts val="350"/>
         </a:spcBef>
         <a:buFont typeface="Arial" panose="020B0604020202020204" pitchFamily="34" charset="0"/>
         <a:buChar char="•"/>
-        <a:defRPr sz="1584" kern="1200">
+        <a:defRPr sz="1260" kern="1200">
           <a:solidFill>
             <a:schemeClr val="tx1"/>
           </a:solidFill>
@@ -2848,16 +2848,16 @@
           <a:cs typeface="+mn-cs"/>
         </a:defRPr>
       </a:lvl8pPr>
-      <a:lvl9pPr marL="3420059" indent="-201180" algn="l" defTabSz="804720" rtl="0" eaLnBrk="1" latinLnBrk="0" hangingPunct="1">
+      <a:lvl9pPr marL="2720340" indent="-160020" algn="l" defTabSz="640080" rtl="0" eaLnBrk="1" latinLnBrk="0" hangingPunct="1">
         <a:lnSpc>
           <a:spcPct val="90000"/>
         </a:lnSpc>
         <a:spcBef>
-          <a:spcPts val="440"/>
+          <a:spcPts val="350"/>
         </a:spcBef>
         <a:buFont typeface="Arial" panose="020B0604020202020204" pitchFamily="34" charset="0"/>
         <a:buChar char="•"/>
-        <a:defRPr sz="1584" kern="1200">
+        <a:defRPr sz="1260" kern="1200">
           <a:solidFill>
             <a:schemeClr val="tx1"/>
           </a:solidFill>
@@ -2871,8 +2871,8 @@
       <a:defPPr>
         <a:defRPr lang="en-US"/>
       </a:defPPr>
-      <a:lvl1pPr marL="0" algn="l" defTabSz="804720" rtl="0" eaLnBrk="1" latinLnBrk="0" hangingPunct="1">
-        <a:defRPr sz="1584" kern="1200">
+      <a:lvl1pPr marL="0" algn="l" defTabSz="640080" rtl="0" eaLnBrk="1" latinLnBrk="0" hangingPunct="1">
+        <a:defRPr sz="1260" kern="1200">
           <a:solidFill>
             <a:schemeClr val="tx1"/>
           </a:solidFill>
@@ -2881,8 +2881,8 @@
           <a:cs typeface="+mn-cs"/>
         </a:defRPr>
       </a:lvl1pPr>
-      <a:lvl2pPr marL="402360" algn="l" defTabSz="804720" rtl="0" eaLnBrk="1" latinLnBrk="0" hangingPunct="1">
-        <a:defRPr sz="1584" kern="1200">
+      <a:lvl2pPr marL="320040" algn="l" defTabSz="640080" rtl="0" eaLnBrk="1" latinLnBrk="0" hangingPunct="1">
+        <a:defRPr sz="1260" kern="1200">
           <a:solidFill>
             <a:schemeClr val="tx1"/>
           </a:solidFill>
@@ -2891,8 +2891,8 @@
           <a:cs typeface="+mn-cs"/>
         </a:defRPr>
       </a:lvl2pPr>
-      <a:lvl3pPr marL="804720" algn="l" defTabSz="804720" rtl="0" eaLnBrk="1" latinLnBrk="0" hangingPunct="1">
-        <a:defRPr sz="1584" kern="1200">
+      <a:lvl3pPr marL="640080" algn="l" defTabSz="640080" rtl="0" eaLnBrk="1" latinLnBrk="0" hangingPunct="1">
+        <a:defRPr sz="1260" kern="1200">
           <a:solidFill>
             <a:schemeClr val="tx1"/>
           </a:solidFill>
@@ -2901,8 +2901,8 @@
           <a:cs typeface="+mn-cs"/>
         </a:defRPr>
       </a:lvl3pPr>
-      <a:lvl4pPr marL="1207080" algn="l" defTabSz="804720" rtl="0" eaLnBrk="1" latinLnBrk="0" hangingPunct="1">
-        <a:defRPr sz="1584" kern="1200">
+      <a:lvl4pPr marL="960120" algn="l" defTabSz="640080" rtl="0" eaLnBrk="1" latinLnBrk="0" hangingPunct="1">
+        <a:defRPr sz="1260" kern="1200">
           <a:solidFill>
             <a:schemeClr val="tx1"/>
           </a:solidFill>
@@ -2911,8 +2911,8 @@
           <a:cs typeface="+mn-cs"/>
         </a:defRPr>
       </a:lvl4pPr>
-      <a:lvl5pPr marL="1609440" algn="l" defTabSz="804720" rtl="0" eaLnBrk="1" latinLnBrk="0" hangingPunct="1">
-        <a:defRPr sz="1584" kern="1200">
+      <a:lvl5pPr marL="1280160" algn="l" defTabSz="640080" rtl="0" eaLnBrk="1" latinLnBrk="0" hangingPunct="1">
+        <a:defRPr sz="1260" kern="1200">
           <a:solidFill>
             <a:schemeClr val="tx1"/>
           </a:solidFill>
@@ -2921,8 +2921,8 @@
           <a:cs typeface="+mn-cs"/>
         </a:defRPr>
       </a:lvl5pPr>
-      <a:lvl6pPr marL="2011800" algn="l" defTabSz="804720" rtl="0" eaLnBrk="1" latinLnBrk="0" hangingPunct="1">
-        <a:defRPr sz="1584" kern="1200">
+      <a:lvl6pPr marL="1600200" algn="l" defTabSz="640080" rtl="0" eaLnBrk="1" latinLnBrk="0" hangingPunct="1">
+        <a:defRPr sz="1260" kern="1200">
           <a:solidFill>
             <a:schemeClr val="tx1"/>
           </a:solidFill>
@@ -2931,8 +2931,8 @@
           <a:cs typeface="+mn-cs"/>
         </a:defRPr>
       </a:lvl6pPr>
-      <a:lvl7pPr marL="2414160" algn="l" defTabSz="804720" rtl="0" eaLnBrk="1" latinLnBrk="0" hangingPunct="1">
-        <a:defRPr sz="1584" kern="1200">
+      <a:lvl7pPr marL="1920240" algn="l" defTabSz="640080" rtl="0" eaLnBrk="1" latinLnBrk="0" hangingPunct="1">
+        <a:defRPr sz="1260" kern="1200">
           <a:solidFill>
             <a:schemeClr val="tx1"/>
           </a:solidFill>
@@ -2941,8 +2941,8 @@
           <a:cs typeface="+mn-cs"/>
         </a:defRPr>
       </a:lvl7pPr>
-      <a:lvl8pPr marL="2816519" algn="l" defTabSz="804720" rtl="0" eaLnBrk="1" latinLnBrk="0" hangingPunct="1">
-        <a:defRPr sz="1584" kern="1200">
+      <a:lvl8pPr marL="2240280" algn="l" defTabSz="640080" rtl="0" eaLnBrk="1" latinLnBrk="0" hangingPunct="1">
+        <a:defRPr sz="1260" kern="1200">
           <a:solidFill>
             <a:schemeClr val="tx1"/>
           </a:solidFill>
@@ -2951,8 +2951,8 @@
           <a:cs typeface="+mn-cs"/>
         </a:defRPr>
       </a:lvl8pPr>
-      <a:lvl9pPr marL="3218879" algn="l" defTabSz="804720" rtl="0" eaLnBrk="1" latinLnBrk="0" hangingPunct="1">
-        <a:defRPr sz="1584" kern="1200">
+      <a:lvl9pPr marL="2560320" algn="l" defTabSz="640080" rtl="0" eaLnBrk="1" latinLnBrk="0" hangingPunct="1">
+        <a:defRPr sz="1260" kern="1200">
           <a:solidFill>
             <a:schemeClr val="tx1"/>
           </a:solidFill>
@@ -2983,1088 +2983,1119 @@
           <a:chExt cx="0" cy="0"/>
         </a:xfrm>
       </p:grpSpPr>
-      <p:sp>
-        <p:nvSpPr>
-          <p:cNvPr id="9" name="Rectangle: Rounded Corners 8">
+      <p:grpSp>
+        <p:nvGrpSpPr>
+          <p:cNvPr id="3" name="Group 2">
             <a:extLst>
               <a:ext uri="{FF2B5EF4-FFF2-40B4-BE49-F238E27FC236}">
-                <a16:creationId xmlns:a16="http://schemas.microsoft.com/office/drawing/2014/main" id="{8F1A589E-DD35-441D-ABDA-37D4F20F0379}"/>
+                <a16:creationId xmlns:a16="http://schemas.microsoft.com/office/drawing/2014/main" id="{05FFAA89-345F-BDB3-C480-4B54FF8AFF5D}"/>
               </a:ext>
             </a:extLst>
           </p:cNvPr>
-          <p:cNvSpPr/>
+          <p:cNvGrpSpPr/>
           <p:nvPr/>
-        </p:nvSpPr>
-        <p:spPr>
+        </p:nvGrpSpPr>
+        <p:grpSpPr>
           <a:xfrm>
-            <a:off x="4065153" y="4009166"/>
-            <a:ext cx="994383" cy="412615"/>
+            <a:off x="74747" y="219456"/>
+            <a:ext cx="6326053" cy="8705088"/>
+            <a:chOff x="683797" y="835071"/>
+            <a:chExt cx="6326053" cy="8705088"/>
           </a:xfrm>
-          <a:prstGeom prst="roundRect">
-            <a:avLst/>
-          </a:prstGeom>
-          <a:gradFill flip="none" rotWithShape="1">
-            <a:gsLst>
-              <a:gs pos="84000">
-                <a:srgbClr val="FCE5D6"/>
-              </a:gs>
-              <a:gs pos="68000">
-                <a:schemeClr val="accent2">
-                  <a:lumMod val="40000"/>
-                  <a:lumOff val="60000"/>
-                </a:schemeClr>
-              </a:gs>
-              <a:gs pos="100000">
-                <a:schemeClr val="bg1">
-                  <a:lumMod val="95000"/>
-                </a:schemeClr>
-              </a:gs>
-            </a:gsLst>
-            <a:lin ang="18900000" scaled="1"/>
-            <a:tileRect/>
-          </a:gradFill>
-          <a:ln>
-            <a:noFill/>
-          </a:ln>
-          <a:effectLst>
-            <a:outerShdw blurRad="50800" dist="38100" dir="8100000" algn="tr" rotWithShape="0">
-              <a:prstClr val="black">
-                <a:alpha val="40000"/>
-              </a:prstClr>
-            </a:outerShdw>
-          </a:effectLst>
-        </p:spPr>
-        <p:style>
-          <a:lnRef idx="2">
-            <a:schemeClr val="accent1">
-              <a:shade val="50000"/>
-            </a:schemeClr>
-          </a:lnRef>
-          <a:fillRef idx="1">
-            <a:schemeClr val="accent1"/>
-          </a:fillRef>
-          <a:effectRef idx="0">
-            <a:schemeClr val="accent1"/>
-          </a:effectRef>
-          <a:fontRef idx="minor">
-            <a:schemeClr val="lt1"/>
-          </a:fontRef>
-        </p:style>
-        <p:txBody>
-          <a:bodyPr rtlCol="0" anchor="ctr"/>
-          <a:lstStyle/>
-          <a:p>
-            <a:pPr algn="ctr"/>
-            <a:r>
-              <a:rPr lang="en-US" sz="1408" dirty="0">
+        </p:grpSpPr>
+        <p:sp>
+          <p:nvSpPr>
+            <p:cNvPr id="9" name="Rectangle: Rounded Corners 8">
+              <a:extLst>
+                <a:ext uri="{FF2B5EF4-FFF2-40B4-BE49-F238E27FC236}">
+                  <a16:creationId xmlns:a16="http://schemas.microsoft.com/office/drawing/2014/main" id="{8F1A589E-DD35-441D-ABDA-37D4F20F0379}"/>
+                </a:ext>
+              </a:extLst>
+            </p:cNvPr>
+            <p:cNvSpPr/>
+            <p:nvPr/>
+          </p:nvSpPr>
+          <p:spPr>
+            <a:xfrm>
+              <a:off x="4065153" y="4009166"/>
+              <a:ext cx="994383" cy="412615"/>
+            </a:xfrm>
+            <a:prstGeom prst="roundRect">
+              <a:avLst/>
+            </a:prstGeom>
+            <a:gradFill flip="none" rotWithShape="1">
+              <a:gsLst>
+                <a:gs pos="84000">
+                  <a:srgbClr val="FCE5D6"/>
+                </a:gs>
+                <a:gs pos="68000">
+                  <a:schemeClr val="accent2">
+                    <a:lumMod val="40000"/>
+                    <a:lumOff val="60000"/>
+                  </a:schemeClr>
+                </a:gs>
+                <a:gs pos="100000">
+                  <a:schemeClr val="bg1">
+                    <a:lumMod val="95000"/>
+                  </a:schemeClr>
+                </a:gs>
+              </a:gsLst>
+              <a:lin ang="18900000" scaled="1"/>
+              <a:tileRect/>
+            </a:gradFill>
+            <a:ln>
+              <a:noFill/>
+            </a:ln>
+            <a:effectLst>
+              <a:outerShdw blurRad="50800" dist="38100" dir="8100000" algn="tr" rotWithShape="0">
+                <a:prstClr val="black">
+                  <a:alpha val="40000"/>
+                </a:prstClr>
+              </a:outerShdw>
+            </a:effectLst>
+          </p:spPr>
+          <p:style>
+            <a:lnRef idx="2">
+              <a:schemeClr val="accent1">
+                <a:shade val="50000"/>
+              </a:schemeClr>
+            </a:lnRef>
+            <a:fillRef idx="1">
+              <a:schemeClr val="accent1"/>
+            </a:fillRef>
+            <a:effectRef idx="0">
+              <a:schemeClr val="accent1"/>
+            </a:effectRef>
+            <a:fontRef idx="minor">
+              <a:schemeClr val="lt1"/>
+            </a:fontRef>
+          </p:style>
+          <p:txBody>
+            <a:bodyPr rtlCol="0" anchor="ctr"/>
+            <a:lstStyle/>
+            <a:p>
+              <a:pPr algn="ctr"/>
+              <a:r>
+                <a:rPr lang="en-US" sz="1408" dirty="0">
+                  <a:solidFill>
+                    <a:schemeClr val="tx1"/>
+                  </a:solidFill>
+                  <a:latin typeface="Arial" panose="020B0604020202020204" pitchFamily="34" charset="0"/>
+                  <a:cs typeface="Arial" panose="020B0604020202020204" pitchFamily="34" charset="0"/>
+                </a:rPr>
+                <a:t>2,385</a:t>
+              </a:r>
+              <a:endParaRPr lang="de-DE" sz="1408" dirty="0">
                 <a:solidFill>
                   <a:schemeClr val="tx1"/>
                 </a:solidFill>
                 <a:latin typeface="Arial" panose="020B0604020202020204" pitchFamily="34" charset="0"/>
                 <a:cs typeface="Arial" panose="020B0604020202020204" pitchFamily="34" charset="0"/>
-              </a:rPr>
-              <a:t>2,385</a:t>
-            </a:r>
-            <a:endParaRPr lang="de-DE" sz="1408" dirty="0">
-              <a:solidFill>
-                <a:schemeClr val="tx1"/>
-              </a:solidFill>
-              <a:latin typeface="Arial" panose="020B0604020202020204" pitchFamily="34" charset="0"/>
-              <a:cs typeface="Arial" panose="020B0604020202020204" pitchFamily="34" charset="0"/>
-            </a:endParaRPr>
-          </a:p>
-        </p:txBody>
-      </p:sp>
-      <p:sp>
-        <p:nvSpPr>
-          <p:cNvPr id="11" name="Rectangle: Rounded Corners 10">
-            <a:extLst>
-              <a:ext uri="{FF2B5EF4-FFF2-40B4-BE49-F238E27FC236}">
-                <a16:creationId xmlns:a16="http://schemas.microsoft.com/office/drawing/2014/main" id="{015322F6-77E8-48C4-B056-50F80F699609}"/>
-              </a:ext>
-            </a:extLst>
-          </p:cNvPr>
-          <p:cNvSpPr/>
-          <p:nvPr/>
-        </p:nvSpPr>
-        <p:spPr>
-          <a:xfrm>
-            <a:off x="4065153" y="5088945"/>
-            <a:ext cx="994383" cy="412615"/>
-          </a:xfrm>
-          <a:prstGeom prst="roundRect">
-            <a:avLst/>
-          </a:prstGeom>
-          <a:gradFill flip="none" rotWithShape="1">
-            <a:gsLst>
-              <a:gs pos="84000">
-                <a:srgbClr val="FCE5D6"/>
-              </a:gs>
-              <a:gs pos="68000">
-                <a:schemeClr val="accent2">
-                  <a:lumMod val="40000"/>
-                  <a:lumOff val="60000"/>
-                </a:schemeClr>
-              </a:gs>
-              <a:gs pos="100000">
-                <a:schemeClr val="bg1">
-                  <a:lumMod val="95000"/>
-                </a:schemeClr>
-              </a:gs>
-            </a:gsLst>
-            <a:lin ang="18900000" scaled="1"/>
-            <a:tileRect/>
-          </a:gradFill>
-          <a:ln>
-            <a:noFill/>
-          </a:ln>
-          <a:effectLst>
-            <a:outerShdw blurRad="50800" dist="38100" dir="8100000" algn="tr" rotWithShape="0">
-              <a:prstClr val="black">
-                <a:alpha val="40000"/>
-              </a:prstClr>
-            </a:outerShdw>
-          </a:effectLst>
-        </p:spPr>
-        <p:style>
-          <a:lnRef idx="2">
-            <a:schemeClr val="accent1">
-              <a:shade val="50000"/>
-            </a:schemeClr>
-          </a:lnRef>
-          <a:fillRef idx="1">
-            <a:schemeClr val="accent1"/>
-          </a:fillRef>
-          <a:effectRef idx="0">
-            <a:schemeClr val="accent1"/>
-          </a:effectRef>
-          <a:fontRef idx="minor">
-            <a:schemeClr val="lt1"/>
-          </a:fontRef>
-        </p:style>
-        <p:txBody>
-          <a:bodyPr rtlCol="0" anchor="ctr"/>
-          <a:lstStyle/>
-          <a:p>
-            <a:pPr algn="ctr"/>
-            <a:r>
-              <a:rPr lang="en-US" sz="1408" dirty="0">
+              </a:endParaRPr>
+            </a:p>
+          </p:txBody>
+        </p:sp>
+        <p:sp>
+          <p:nvSpPr>
+            <p:cNvPr id="11" name="Rectangle: Rounded Corners 10">
+              <a:extLst>
+                <a:ext uri="{FF2B5EF4-FFF2-40B4-BE49-F238E27FC236}">
+                  <a16:creationId xmlns:a16="http://schemas.microsoft.com/office/drawing/2014/main" id="{015322F6-77E8-48C4-B056-50F80F699609}"/>
+                </a:ext>
+              </a:extLst>
+            </p:cNvPr>
+            <p:cNvSpPr/>
+            <p:nvPr/>
+          </p:nvSpPr>
+          <p:spPr>
+            <a:xfrm>
+              <a:off x="4065153" y="5088945"/>
+              <a:ext cx="994383" cy="412615"/>
+            </a:xfrm>
+            <a:prstGeom prst="roundRect">
+              <a:avLst/>
+            </a:prstGeom>
+            <a:gradFill flip="none" rotWithShape="1">
+              <a:gsLst>
+                <a:gs pos="84000">
+                  <a:srgbClr val="FCE5D6"/>
+                </a:gs>
+                <a:gs pos="68000">
+                  <a:schemeClr val="accent2">
+                    <a:lumMod val="40000"/>
+                    <a:lumOff val="60000"/>
+                  </a:schemeClr>
+                </a:gs>
+                <a:gs pos="100000">
+                  <a:schemeClr val="bg1">
+                    <a:lumMod val="95000"/>
+                  </a:schemeClr>
+                </a:gs>
+              </a:gsLst>
+              <a:lin ang="18900000" scaled="1"/>
+              <a:tileRect/>
+            </a:gradFill>
+            <a:ln>
+              <a:noFill/>
+            </a:ln>
+            <a:effectLst>
+              <a:outerShdw blurRad="50800" dist="38100" dir="8100000" algn="tr" rotWithShape="0">
+                <a:prstClr val="black">
+                  <a:alpha val="40000"/>
+                </a:prstClr>
+              </a:outerShdw>
+            </a:effectLst>
+          </p:spPr>
+          <p:style>
+            <a:lnRef idx="2">
+              <a:schemeClr val="accent1">
+                <a:shade val="50000"/>
+              </a:schemeClr>
+            </a:lnRef>
+            <a:fillRef idx="1">
+              <a:schemeClr val="accent1"/>
+            </a:fillRef>
+            <a:effectRef idx="0">
+              <a:schemeClr val="accent1"/>
+            </a:effectRef>
+            <a:fontRef idx="minor">
+              <a:schemeClr val="lt1"/>
+            </a:fontRef>
+          </p:style>
+          <p:txBody>
+            <a:bodyPr rtlCol="0" anchor="ctr"/>
+            <a:lstStyle/>
+            <a:p>
+              <a:pPr algn="ctr"/>
+              <a:r>
+                <a:rPr lang="en-US" sz="1408" dirty="0">
+                  <a:solidFill>
+                    <a:schemeClr val="tx1"/>
+                  </a:solidFill>
+                  <a:latin typeface="Arial" panose="020B0604020202020204" pitchFamily="34" charset="0"/>
+                  <a:cs typeface="Arial" panose="020B0604020202020204" pitchFamily="34" charset="0"/>
+                </a:rPr>
+                <a:t>118</a:t>
+              </a:r>
+              <a:endParaRPr lang="de-DE" sz="1408" dirty="0">
                 <a:solidFill>
                   <a:schemeClr val="tx1"/>
                 </a:solidFill>
                 <a:latin typeface="Arial" panose="020B0604020202020204" pitchFamily="34" charset="0"/>
                 <a:cs typeface="Arial" panose="020B0604020202020204" pitchFamily="34" charset="0"/>
-              </a:rPr>
-              <a:t>118</a:t>
-            </a:r>
-            <a:endParaRPr lang="de-DE" sz="1408" dirty="0">
-              <a:solidFill>
-                <a:schemeClr val="tx1"/>
-              </a:solidFill>
-              <a:latin typeface="Arial" panose="020B0604020202020204" pitchFamily="34" charset="0"/>
-              <a:cs typeface="Arial" panose="020B0604020202020204" pitchFamily="34" charset="0"/>
-            </a:endParaRPr>
-          </a:p>
-        </p:txBody>
-      </p:sp>
-      <p:sp>
-        <p:nvSpPr>
-          <p:cNvPr id="13" name="Rectangle: Rounded Corners 12">
-            <a:extLst>
-              <a:ext uri="{FF2B5EF4-FFF2-40B4-BE49-F238E27FC236}">
-                <a16:creationId xmlns:a16="http://schemas.microsoft.com/office/drawing/2014/main" id="{A5F9B437-0D9F-43EC-AE11-4D38AB16DEF0}"/>
-              </a:ext>
-            </a:extLst>
-          </p:cNvPr>
-          <p:cNvSpPr/>
-          <p:nvPr/>
-        </p:nvSpPr>
-        <p:spPr>
-          <a:xfrm>
-            <a:off x="4065173" y="7103997"/>
-            <a:ext cx="994383" cy="412615"/>
-          </a:xfrm>
-          <a:prstGeom prst="roundRect">
-            <a:avLst/>
-          </a:prstGeom>
-          <a:gradFill flip="none" rotWithShape="1">
-            <a:gsLst>
-              <a:gs pos="84000">
-                <a:srgbClr val="FCE5D6"/>
-              </a:gs>
-              <a:gs pos="68000">
-                <a:schemeClr val="accent2">
-                  <a:lumMod val="40000"/>
-                  <a:lumOff val="60000"/>
-                </a:schemeClr>
-              </a:gs>
-              <a:gs pos="100000">
-                <a:schemeClr val="bg1">
-                  <a:lumMod val="95000"/>
-                </a:schemeClr>
-              </a:gs>
-            </a:gsLst>
-            <a:lin ang="18900000" scaled="1"/>
-            <a:tileRect/>
-          </a:gradFill>
-          <a:ln>
-            <a:noFill/>
-          </a:ln>
-          <a:effectLst>
-            <a:outerShdw blurRad="50800" dist="38100" dir="8100000" algn="tr" rotWithShape="0">
-              <a:prstClr val="black">
-                <a:alpha val="40000"/>
-              </a:prstClr>
-            </a:outerShdw>
-          </a:effectLst>
-        </p:spPr>
-        <p:style>
-          <a:lnRef idx="2">
-            <a:schemeClr val="accent1">
-              <a:shade val="50000"/>
-            </a:schemeClr>
-          </a:lnRef>
-          <a:fillRef idx="1">
-            <a:schemeClr val="accent1"/>
-          </a:fillRef>
-          <a:effectRef idx="0">
-            <a:schemeClr val="accent1"/>
-          </a:effectRef>
-          <a:fontRef idx="minor">
-            <a:schemeClr val="lt1"/>
-          </a:fontRef>
-        </p:style>
-        <p:txBody>
-          <a:bodyPr rtlCol="0" anchor="ctr"/>
-          <a:lstStyle/>
-          <a:p>
-            <a:pPr algn="ctr"/>
-            <a:r>
-              <a:rPr lang="en-US" sz="1408" dirty="0">
+              </a:endParaRPr>
+            </a:p>
+          </p:txBody>
+        </p:sp>
+        <p:sp>
+          <p:nvSpPr>
+            <p:cNvPr id="13" name="Rectangle: Rounded Corners 12">
+              <a:extLst>
+                <a:ext uri="{FF2B5EF4-FFF2-40B4-BE49-F238E27FC236}">
+                  <a16:creationId xmlns:a16="http://schemas.microsoft.com/office/drawing/2014/main" id="{A5F9B437-0D9F-43EC-AE11-4D38AB16DEF0}"/>
+                </a:ext>
+              </a:extLst>
+            </p:cNvPr>
+            <p:cNvSpPr/>
+            <p:nvPr/>
+          </p:nvSpPr>
+          <p:spPr>
+            <a:xfrm>
+              <a:off x="4065173" y="7103997"/>
+              <a:ext cx="994383" cy="412615"/>
+            </a:xfrm>
+            <a:prstGeom prst="roundRect">
+              <a:avLst/>
+            </a:prstGeom>
+            <a:gradFill flip="none" rotWithShape="1">
+              <a:gsLst>
+                <a:gs pos="84000">
+                  <a:srgbClr val="FCE5D6"/>
+                </a:gs>
+                <a:gs pos="68000">
+                  <a:schemeClr val="accent2">
+                    <a:lumMod val="40000"/>
+                    <a:lumOff val="60000"/>
+                  </a:schemeClr>
+                </a:gs>
+                <a:gs pos="100000">
+                  <a:schemeClr val="bg1">
+                    <a:lumMod val="95000"/>
+                  </a:schemeClr>
+                </a:gs>
+              </a:gsLst>
+              <a:lin ang="18900000" scaled="1"/>
+              <a:tileRect/>
+            </a:gradFill>
+            <a:ln>
+              <a:noFill/>
+            </a:ln>
+            <a:effectLst>
+              <a:outerShdw blurRad="50800" dist="38100" dir="8100000" algn="tr" rotWithShape="0">
+                <a:prstClr val="black">
+                  <a:alpha val="40000"/>
+                </a:prstClr>
+              </a:outerShdw>
+            </a:effectLst>
+          </p:spPr>
+          <p:style>
+            <a:lnRef idx="2">
+              <a:schemeClr val="accent1">
+                <a:shade val="50000"/>
+              </a:schemeClr>
+            </a:lnRef>
+            <a:fillRef idx="1">
+              <a:schemeClr val="accent1"/>
+            </a:fillRef>
+            <a:effectRef idx="0">
+              <a:schemeClr val="accent1"/>
+            </a:effectRef>
+            <a:fontRef idx="minor">
+              <a:schemeClr val="lt1"/>
+            </a:fontRef>
+          </p:style>
+          <p:txBody>
+            <a:bodyPr rtlCol="0" anchor="ctr"/>
+            <a:lstStyle/>
+            <a:p>
+              <a:pPr algn="ctr"/>
+              <a:r>
+                <a:rPr lang="en-US" sz="1408" dirty="0">
+                  <a:solidFill>
+                    <a:schemeClr val="tx1"/>
+                  </a:solidFill>
+                  <a:latin typeface="Arial" panose="020B0604020202020204" pitchFamily="34" charset="0"/>
+                  <a:cs typeface="Arial" panose="020B0604020202020204" pitchFamily="34" charset="0"/>
+                </a:rPr>
+                <a:t>1,032</a:t>
+              </a:r>
+              <a:endParaRPr lang="de-DE" sz="1408" dirty="0">
                 <a:solidFill>
                   <a:schemeClr val="tx1"/>
                 </a:solidFill>
                 <a:latin typeface="Arial" panose="020B0604020202020204" pitchFamily="34" charset="0"/>
                 <a:cs typeface="Arial" panose="020B0604020202020204" pitchFamily="34" charset="0"/>
-              </a:rPr>
-              <a:t>1,032</a:t>
-            </a:r>
-            <a:endParaRPr lang="de-DE" sz="1408" dirty="0">
+              </a:endParaRPr>
+            </a:p>
+          </p:txBody>
+        </p:sp>
+        <p:cxnSp>
+          <p:nvCxnSpPr>
+            <p:cNvPr id="16" name="Straight Arrow Connector 15">
+              <a:extLst>
+                <a:ext uri="{FF2B5EF4-FFF2-40B4-BE49-F238E27FC236}">
+                  <a16:creationId xmlns:a16="http://schemas.microsoft.com/office/drawing/2014/main" id="{C2C13C7B-2E0E-4FF4-AB33-135574BA2A77}"/>
+                </a:ext>
+              </a:extLst>
+            </p:cNvPr>
+            <p:cNvCxnSpPr>
+              <a:cxnSpLocks/>
+              <a:stCxn id="9" idx="2"/>
+              <a:endCxn id="11" idx="0"/>
+            </p:cNvCxnSpPr>
+            <p:nvPr/>
+          </p:nvCxnSpPr>
+          <p:spPr>
+            <a:xfrm>
+              <a:off x="4562344" y="4421780"/>
+              <a:ext cx="0" cy="667166"/>
+            </a:xfrm>
+            <a:prstGeom prst="straightConnector1">
+              <a:avLst/>
+            </a:prstGeom>
+            <a:ln>
               <a:solidFill>
-                <a:schemeClr val="tx1"/>
+                <a:schemeClr val="bg1">
+                  <a:lumMod val="65000"/>
+                </a:schemeClr>
               </a:solidFill>
-              <a:latin typeface="Arial" panose="020B0604020202020204" pitchFamily="34" charset="0"/>
-              <a:cs typeface="Arial" panose="020B0604020202020204" pitchFamily="34" charset="0"/>
-            </a:endParaRPr>
-          </a:p>
-        </p:txBody>
-      </p:sp>
-      <p:cxnSp>
-        <p:nvCxnSpPr>
-          <p:cNvPr id="16" name="Straight Arrow Connector 15">
-            <a:extLst>
-              <a:ext uri="{FF2B5EF4-FFF2-40B4-BE49-F238E27FC236}">
-                <a16:creationId xmlns:a16="http://schemas.microsoft.com/office/drawing/2014/main" id="{C2C13C7B-2E0E-4FF4-AB33-135574BA2A77}"/>
-              </a:ext>
-            </a:extLst>
-          </p:cNvPr>
-          <p:cNvCxnSpPr>
-            <a:cxnSpLocks/>
-            <a:stCxn id="9" idx="2"/>
-            <a:endCxn id="11" idx="0"/>
-          </p:cNvCxnSpPr>
-          <p:nvPr/>
-        </p:nvCxnSpPr>
-        <p:spPr>
-          <a:xfrm>
-            <a:off x="4562344" y="4421780"/>
-            <a:ext cx="0" cy="667166"/>
-          </a:xfrm>
-          <a:prstGeom prst="straightConnector1">
-            <a:avLst/>
-          </a:prstGeom>
-          <a:ln>
-            <a:solidFill>
-              <a:schemeClr val="bg1">
-                <a:lumMod val="65000"/>
-              </a:schemeClr>
-            </a:solidFill>
-            <a:tailEnd type="triangle"/>
-          </a:ln>
-        </p:spPr>
-        <p:style>
-          <a:lnRef idx="1">
-            <a:schemeClr val="accent1"/>
-          </a:lnRef>
-          <a:fillRef idx="0">
-            <a:schemeClr val="accent1"/>
-          </a:fillRef>
-          <a:effectRef idx="0">
-            <a:schemeClr val="accent1"/>
-          </a:effectRef>
-          <a:fontRef idx="minor">
-            <a:schemeClr val="tx1"/>
-          </a:fontRef>
-        </p:style>
-      </p:cxnSp>
-      <p:cxnSp>
-        <p:nvCxnSpPr>
-          <p:cNvPr id="17" name="Straight Arrow Connector 16">
-            <a:extLst>
-              <a:ext uri="{FF2B5EF4-FFF2-40B4-BE49-F238E27FC236}">
-                <a16:creationId xmlns:a16="http://schemas.microsoft.com/office/drawing/2014/main" id="{A518AA32-5E69-499A-A2CB-589D567F8FD8}"/>
-              </a:ext>
-            </a:extLst>
-          </p:cNvPr>
-          <p:cNvCxnSpPr>
-            <a:cxnSpLocks/>
-            <a:stCxn id="11" idx="2"/>
-            <a:endCxn id="13" idx="0"/>
-          </p:cNvCxnSpPr>
-          <p:nvPr/>
-        </p:nvCxnSpPr>
-        <p:spPr>
-          <a:xfrm>
-            <a:off x="4562345" y="5501561"/>
-            <a:ext cx="20" cy="1602437"/>
-          </a:xfrm>
-          <a:prstGeom prst="straightConnector1">
-            <a:avLst/>
-          </a:prstGeom>
-          <a:ln>
-            <a:solidFill>
-              <a:schemeClr val="bg1">
-                <a:lumMod val="65000"/>
-              </a:schemeClr>
-            </a:solidFill>
-            <a:tailEnd type="triangle"/>
-          </a:ln>
-        </p:spPr>
-        <p:style>
-          <a:lnRef idx="1">
-            <a:schemeClr val="accent1"/>
-          </a:lnRef>
-          <a:fillRef idx="0">
-            <a:schemeClr val="accent1"/>
-          </a:fillRef>
-          <a:effectRef idx="0">
-            <a:schemeClr val="accent1"/>
-          </a:effectRef>
-          <a:fontRef idx="minor">
-            <a:schemeClr val="tx1"/>
-          </a:fontRef>
-        </p:style>
-      </p:cxnSp>
-      <p:sp>
-        <p:nvSpPr>
-          <p:cNvPr id="26" name="Rectangle 25">
-            <a:extLst>
-              <a:ext uri="{FF2B5EF4-FFF2-40B4-BE49-F238E27FC236}">
-                <a16:creationId xmlns:a16="http://schemas.microsoft.com/office/drawing/2014/main" id="{395B561F-3DB8-42CB-9CBC-038948D310CA}"/>
-              </a:ext>
-            </a:extLst>
-          </p:cNvPr>
-          <p:cNvSpPr/>
-          <p:nvPr/>
-        </p:nvSpPr>
-        <p:spPr>
-          <a:xfrm>
-            <a:off x="5040651" y="3976290"/>
-            <a:ext cx="1841042" cy="489621"/>
-          </a:xfrm>
-          <a:prstGeom prst="rect">
-            <a:avLst/>
-          </a:prstGeom>
-        </p:spPr>
-        <p:txBody>
-          <a:bodyPr wrap="square">
-            <a:spAutoFit/>
-          </a:bodyPr>
-          <a:lstStyle/>
-          <a:p>
-            <a:r>
-              <a:rPr lang="en-US" sz="1291" dirty="0">
+              <a:tailEnd type="triangle"/>
+            </a:ln>
+          </p:spPr>
+          <p:style>
+            <a:lnRef idx="1">
+              <a:schemeClr val="accent1"/>
+            </a:lnRef>
+            <a:fillRef idx="0">
+              <a:schemeClr val="accent1"/>
+            </a:fillRef>
+            <a:effectRef idx="0">
+              <a:schemeClr val="accent1"/>
+            </a:effectRef>
+            <a:fontRef idx="minor">
+              <a:schemeClr val="tx1"/>
+            </a:fontRef>
+          </p:style>
+        </p:cxnSp>
+        <p:cxnSp>
+          <p:nvCxnSpPr>
+            <p:cNvPr id="17" name="Straight Arrow Connector 16">
+              <a:extLst>
+                <a:ext uri="{FF2B5EF4-FFF2-40B4-BE49-F238E27FC236}">
+                  <a16:creationId xmlns:a16="http://schemas.microsoft.com/office/drawing/2014/main" id="{A518AA32-5E69-499A-A2CB-589D567F8FD8}"/>
+                </a:ext>
+              </a:extLst>
+            </p:cNvPr>
+            <p:cNvCxnSpPr>
+              <a:cxnSpLocks/>
+              <a:stCxn id="11" idx="2"/>
+              <a:endCxn id="13" idx="0"/>
+            </p:cNvCxnSpPr>
+            <p:nvPr/>
+          </p:nvCxnSpPr>
+          <p:spPr>
+            <a:xfrm>
+              <a:off x="4562345" y="5501561"/>
+              <a:ext cx="20" cy="1602437"/>
+            </a:xfrm>
+            <a:prstGeom prst="straightConnector1">
+              <a:avLst/>
+            </a:prstGeom>
+            <a:ln>
+              <a:solidFill>
+                <a:schemeClr val="bg1">
+                  <a:lumMod val="65000"/>
+                </a:schemeClr>
+              </a:solidFill>
+              <a:tailEnd type="triangle"/>
+            </a:ln>
+          </p:spPr>
+          <p:style>
+            <a:lnRef idx="1">
+              <a:schemeClr val="accent1"/>
+            </a:lnRef>
+            <a:fillRef idx="0">
+              <a:schemeClr val="accent1"/>
+            </a:fillRef>
+            <a:effectRef idx="0">
+              <a:schemeClr val="accent1"/>
+            </a:effectRef>
+            <a:fontRef idx="minor">
+              <a:schemeClr val="tx1"/>
+            </a:fontRef>
+          </p:style>
+        </p:cxnSp>
+        <p:sp>
+          <p:nvSpPr>
+            <p:cNvPr id="26" name="Rectangle 25">
+              <a:extLst>
+                <a:ext uri="{FF2B5EF4-FFF2-40B4-BE49-F238E27FC236}">
+                  <a16:creationId xmlns:a16="http://schemas.microsoft.com/office/drawing/2014/main" id="{395B561F-3DB8-42CB-9CBC-038948D310CA}"/>
+                </a:ext>
+              </a:extLst>
+            </p:cNvPr>
+            <p:cNvSpPr/>
+            <p:nvPr/>
+          </p:nvSpPr>
+          <p:spPr>
+            <a:xfrm>
+              <a:off x="5040651" y="3976289"/>
+              <a:ext cx="1841043" cy="489621"/>
+            </a:xfrm>
+            <a:prstGeom prst="rect">
+              <a:avLst/>
+            </a:prstGeom>
+          </p:spPr>
+          <p:txBody>
+            <a:bodyPr wrap="square">
+              <a:spAutoFit/>
+            </a:bodyPr>
+            <a:lstStyle/>
+            <a:p>
+              <a:r>
+                <a:rPr lang="en-US" sz="1291" dirty="0">
+                  <a:latin typeface="Arial" panose="020B0604020202020204" pitchFamily="34" charset="0"/>
+                  <a:cs typeface="Arial" panose="020B0604020202020204" pitchFamily="34" charset="0"/>
+                </a:rPr>
+                <a:t>Restricted-Access</a:t>
+              </a:r>
+            </a:p>
+            <a:p>
+              <a:r>
+                <a:rPr lang="en-US" sz="1291" dirty="0">
+                  <a:latin typeface="Arial" panose="020B0604020202020204" pitchFamily="34" charset="0"/>
+                  <a:cs typeface="Arial" panose="020B0604020202020204" pitchFamily="34" charset="0"/>
+                </a:rPr>
+                <a:t>and Open Datasets</a:t>
+              </a:r>
+              <a:endParaRPr lang="de-DE" sz="1291" dirty="0">
                 <a:latin typeface="Arial" panose="020B0604020202020204" pitchFamily="34" charset="0"/>
                 <a:cs typeface="Arial" panose="020B0604020202020204" pitchFamily="34" charset="0"/>
-              </a:rPr>
-              <a:t>Restricted-Access</a:t>
-            </a:r>
-          </a:p>
-          <a:p>
-            <a:r>
-              <a:rPr lang="en-US" sz="1291" dirty="0">
-                <a:latin typeface="Arial" panose="020B0604020202020204" pitchFamily="34" charset="0"/>
-                <a:cs typeface="Arial" panose="020B0604020202020204" pitchFamily="34" charset="0"/>
-              </a:rPr>
-              <a:t>and Open Datasets</a:t>
-            </a:r>
-            <a:endParaRPr lang="de-DE" sz="1291" dirty="0">
-              <a:latin typeface="Arial" panose="020B0604020202020204" pitchFamily="34" charset="0"/>
-              <a:cs typeface="Arial" panose="020B0604020202020204" pitchFamily="34" charset="0"/>
-            </a:endParaRPr>
-          </a:p>
-        </p:txBody>
-      </p:sp>
-      <p:sp>
-        <p:nvSpPr>
-          <p:cNvPr id="33" name="Rectangle 32">
-            <a:extLst>
-              <a:ext uri="{FF2B5EF4-FFF2-40B4-BE49-F238E27FC236}">
-                <a16:creationId xmlns:a16="http://schemas.microsoft.com/office/drawing/2014/main" id="{A272B207-7A8B-4402-9F52-285DC1B0BBA2}"/>
-              </a:ext>
-            </a:extLst>
-          </p:cNvPr>
-          <p:cNvSpPr/>
-          <p:nvPr/>
-        </p:nvSpPr>
-        <p:spPr>
-          <a:xfrm>
-            <a:off x="5063715" y="5042446"/>
-            <a:ext cx="994363" cy="489621"/>
-          </a:xfrm>
-          <a:prstGeom prst="rect">
-            <a:avLst/>
-          </a:prstGeom>
-        </p:spPr>
-        <p:txBody>
-          <a:bodyPr wrap="square">
-            <a:spAutoFit/>
-          </a:bodyPr>
-          <a:lstStyle/>
-          <a:p>
-            <a:r>
-              <a:rPr lang="en-US" sz="1291" dirty="0">
-                <a:latin typeface="Arial" panose="020B0604020202020204" pitchFamily="34" charset="0"/>
-                <a:cs typeface="Arial" panose="020B0604020202020204" pitchFamily="34" charset="0"/>
-              </a:rPr>
-              <a:t>Mentioned</a:t>
-            </a:r>
-          </a:p>
-          <a:p>
-            <a:r>
-              <a:rPr lang="en-US" sz="1291" dirty="0">
-                <a:latin typeface="Arial" panose="020B0604020202020204" pitchFamily="34" charset="0"/>
-                <a:cs typeface="Arial" panose="020B0604020202020204" pitchFamily="34" charset="0"/>
-              </a:rPr>
-              <a:t>Datasets</a:t>
-            </a:r>
-          </a:p>
-        </p:txBody>
-      </p:sp>
-      <p:sp>
-        <p:nvSpPr>
-          <p:cNvPr id="35" name="Rectangle 34">
-            <a:extLst>
-              <a:ext uri="{FF2B5EF4-FFF2-40B4-BE49-F238E27FC236}">
-                <a16:creationId xmlns:a16="http://schemas.microsoft.com/office/drawing/2014/main" id="{3419C2CA-81E4-44C0-8AA4-173BAF7F34BD}"/>
-              </a:ext>
-            </a:extLst>
-          </p:cNvPr>
-          <p:cNvSpPr/>
-          <p:nvPr/>
-        </p:nvSpPr>
-        <p:spPr>
-          <a:xfrm>
-            <a:off x="5063715" y="7051395"/>
-            <a:ext cx="1105044" cy="489621"/>
-          </a:xfrm>
-          <a:prstGeom prst="rect">
-            <a:avLst/>
-          </a:prstGeom>
-        </p:spPr>
-        <p:txBody>
-          <a:bodyPr wrap="square">
-            <a:spAutoFit/>
-          </a:bodyPr>
-          <a:lstStyle/>
-          <a:p>
-            <a:r>
-              <a:rPr lang="en-US" sz="1291" dirty="0">
-                <a:latin typeface="Arial" panose="020B0604020202020204" pitchFamily="34" charset="0"/>
-                <a:cs typeface="Arial" panose="020B0604020202020204" pitchFamily="34" charset="0"/>
-              </a:rPr>
-              <a:t>Mentions</a:t>
-            </a:r>
-          </a:p>
-          <a:p>
-            <a:r>
-              <a:rPr lang="en-US" sz="1291" dirty="0">
-                <a:latin typeface="Arial" panose="020B0604020202020204" pitchFamily="34" charset="0"/>
-                <a:cs typeface="Arial" panose="020B0604020202020204" pitchFamily="34" charset="0"/>
-              </a:rPr>
-              <a:t>of Datasets</a:t>
-            </a:r>
-          </a:p>
-        </p:txBody>
-      </p:sp>
-      <p:sp>
-        <p:nvSpPr>
-          <p:cNvPr id="37" name="Rectangle: Rounded Corners 36">
-            <a:extLst>
-              <a:ext uri="{FF2B5EF4-FFF2-40B4-BE49-F238E27FC236}">
-                <a16:creationId xmlns:a16="http://schemas.microsoft.com/office/drawing/2014/main" id="{37BA3527-87EC-4319-9AE6-9AF455FE0676}"/>
-              </a:ext>
-            </a:extLst>
-          </p:cNvPr>
-          <p:cNvSpPr/>
-          <p:nvPr/>
-        </p:nvSpPr>
-        <p:spPr>
-          <a:xfrm>
-            <a:off x="1793604" y="5088945"/>
-            <a:ext cx="956613" cy="412615"/>
-          </a:xfrm>
-          <a:prstGeom prst="roundRect">
-            <a:avLst/>
-          </a:prstGeom>
-          <a:gradFill flip="none" rotWithShape="1">
-            <a:gsLst>
-              <a:gs pos="84000">
-                <a:schemeClr val="accent1">
-                  <a:lumMod val="20000"/>
-                  <a:lumOff val="80000"/>
-                </a:schemeClr>
-              </a:gs>
-              <a:gs pos="68000">
-                <a:schemeClr val="accent1">
-                  <a:lumMod val="40000"/>
-                  <a:lumOff val="60000"/>
-                </a:schemeClr>
-              </a:gs>
-              <a:gs pos="100000">
-                <a:schemeClr val="bg1">
-                  <a:lumMod val="95000"/>
-                </a:schemeClr>
-              </a:gs>
-            </a:gsLst>
-            <a:lin ang="18900000" scaled="1"/>
-            <a:tileRect/>
-          </a:gradFill>
-          <a:ln>
-            <a:noFill/>
-          </a:ln>
-          <a:effectLst>
-            <a:outerShdw blurRad="50800" dist="38100" dir="8100000" algn="tr" rotWithShape="0">
-              <a:prstClr val="black">
-                <a:alpha val="40000"/>
-              </a:prstClr>
-            </a:outerShdw>
-          </a:effectLst>
-        </p:spPr>
-        <p:style>
-          <a:lnRef idx="2">
-            <a:schemeClr val="accent1">
-              <a:shade val="50000"/>
-            </a:schemeClr>
-          </a:lnRef>
-          <a:fillRef idx="1">
-            <a:schemeClr val="accent1"/>
-          </a:fillRef>
-          <a:effectRef idx="0">
-            <a:schemeClr val="accent1"/>
-          </a:effectRef>
-          <a:fontRef idx="minor">
-            <a:schemeClr val="lt1"/>
-          </a:fontRef>
-        </p:style>
-        <p:txBody>
-          <a:bodyPr rtlCol="0" anchor="ctr"/>
-          <a:lstStyle/>
-          <a:p>
-            <a:pPr algn="ctr"/>
-            <a:r>
-              <a:rPr lang="en-US" sz="1408" dirty="0">
+              </a:endParaRPr>
+            </a:p>
+          </p:txBody>
+        </p:sp>
+        <p:sp>
+          <p:nvSpPr>
+            <p:cNvPr id="33" name="Rectangle 32">
+              <a:extLst>
+                <a:ext uri="{FF2B5EF4-FFF2-40B4-BE49-F238E27FC236}">
+                  <a16:creationId xmlns:a16="http://schemas.microsoft.com/office/drawing/2014/main" id="{A272B207-7A8B-4402-9F52-285DC1B0BBA2}"/>
+                </a:ext>
+              </a:extLst>
+            </p:cNvPr>
+            <p:cNvSpPr/>
+            <p:nvPr/>
+          </p:nvSpPr>
+          <p:spPr>
+            <a:xfrm>
+              <a:off x="5063715" y="5042445"/>
+              <a:ext cx="994363" cy="489621"/>
+            </a:xfrm>
+            <a:prstGeom prst="rect">
+              <a:avLst/>
+            </a:prstGeom>
+          </p:spPr>
+          <p:txBody>
+            <a:bodyPr wrap="square">
+              <a:spAutoFit/>
+            </a:bodyPr>
+            <a:lstStyle/>
+            <a:p>
+              <a:r>
+                <a:rPr lang="en-US" sz="1291" dirty="0">
+                  <a:latin typeface="Arial" panose="020B0604020202020204" pitchFamily="34" charset="0"/>
+                  <a:cs typeface="Arial" panose="020B0604020202020204" pitchFamily="34" charset="0"/>
+                </a:rPr>
+                <a:t>Mentioned</a:t>
+              </a:r>
+            </a:p>
+            <a:p>
+              <a:r>
+                <a:rPr lang="en-US" sz="1291" dirty="0">
+                  <a:latin typeface="Arial" panose="020B0604020202020204" pitchFamily="34" charset="0"/>
+                  <a:cs typeface="Arial" panose="020B0604020202020204" pitchFamily="34" charset="0"/>
+                </a:rPr>
+                <a:t>Datasets</a:t>
+              </a:r>
+            </a:p>
+          </p:txBody>
+        </p:sp>
+        <p:sp>
+          <p:nvSpPr>
+            <p:cNvPr id="35" name="Rectangle 34">
+              <a:extLst>
+                <a:ext uri="{FF2B5EF4-FFF2-40B4-BE49-F238E27FC236}">
+                  <a16:creationId xmlns:a16="http://schemas.microsoft.com/office/drawing/2014/main" id="{3419C2CA-81E4-44C0-8AA4-173BAF7F34BD}"/>
+                </a:ext>
+              </a:extLst>
+            </p:cNvPr>
+            <p:cNvSpPr/>
+            <p:nvPr/>
+          </p:nvSpPr>
+          <p:spPr>
+            <a:xfrm>
+              <a:off x="5063715" y="7051395"/>
+              <a:ext cx="1105043" cy="489621"/>
+            </a:xfrm>
+            <a:prstGeom prst="rect">
+              <a:avLst/>
+            </a:prstGeom>
+          </p:spPr>
+          <p:txBody>
+            <a:bodyPr wrap="square">
+              <a:spAutoFit/>
+            </a:bodyPr>
+            <a:lstStyle/>
+            <a:p>
+              <a:r>
+                <a:rPr lang="en-US" sz="1291" dirty="0">
+                  <a:latin typeface="Arial" panose="020B0604020202020204" pitchFamily="34" charset="0"/>
+                  <a:cs typeface="Arial" panose="020B0604020202020204" pitchFamily="34" charset="0"/>
+                </a:rPr>
+                <a:t>Mentions</a:t>
+              </a:r>
+            </a:p>
+            <a:p>
+              <a:r>
+                <a:rPr lang="en-US" sz="1291" dirty="0">
+                  <a:latin typeface="Arial" panose="020B0604020202020204" pitchFamily="34" charset="0"/>
+                  <a:cs typeface="Arial" panose="020B0604020202020204" pitchFamily="34" charset="0"/>
+                </a:rPr>
+                <a:t>of Datasets</a:t>
+              </a:r>
+            </a:p>
+          </p:txBody>
+        </p:sp>
+        <p:sp>
+          <p:nvSpPr>
+            <p:cNvPr id="37" name="Rectangle: Rounded Corners 36">
+              <a:extLst>
+                <a:ext uri="{FF2B5EF4-FFF2-40B4-BE49-F238E27FC236}">
+                  <a16:creationId xmlns:a16="http://schemas.microsoft.com/office/drawing/2014/main" id="{37BA3527-87EC-4319-9AE6-9AF455FE0676}"/>
+                </a:ext>
+              </a:extLst>
+            </p:cNvPr>
+            <p:cNvSpPr/>
+            <p:nvPr/>
+          </p:nvSpPr>
+          <p:spPr>
+            <a:xfrm>
+              <a:off x="1793604" y="5088945"/>
+              <a:ext cx="956613" cy="412615"/>
+            </a:xfrm>
+            <a:prstGeom prst="roundRect">
+              <a:avLst/>
+            </a:prstGeom>
+            <a:gradFill flip="none" rotWithShape="1">
+              <a:gsLst>
+                <a:gs pos="84000">
+                  <a:schemeClr val="accent1">
+                    <a:lumMod val="20000"/>
+                    <a:lumOff val="80000"/>
+                  </a:schemeClr>
+                </a:gs>
+                <a:gs pos="68000">
+                  <a:schemeClr val="accent1">
+                    <a:lumMod val="40000"/>
+                    <a:lumOff val="60000"/>
+                  </a:schemeClr>
+                </a:gs>
+                <a:gs pos="100000">
+                  <a:schemeClr val="bg1">
+                    <a:lumMod val="95000"/>
+                  </a:schemeClr>
+                </a:gs>
+              </a:gsLst>
+              <a:lin ang="18900000" scaled="1"/>
+              <a:tileRect/>
+            </a:gradFill>
+            <a:ln>
+              <a:noFill/>
+            </a:ln>
+            <a:effectLst>
+              <a:outerShdw blurRad="50800" dist="38100" dir="8100000" algn="tr" rotWithShape="0">
+                <a:prstClr val="black">
+                  <a:alpha val="40000"/>
+                </a:prstClr>
+              </a:outerShdw>
+            </a:effectLst>
+          </p:spPr>
+          <p:style>
+            <a:lnRef idx="2">
+              <a:schemeClr val="accent1">
+                <a:shade val="50000"/>
+              </a:schemeClr>
+            </a:lnRef>
+            <a:fillRef idx="1">
+              <a:schemeClr val="accent1"/>
+            </a:fillRef>
+            <a:effectRef idx="0">
+              <a:schemeClr val="accent1"/>
+            </a:effectRef>
+            <a:fontRef idx="minor">
+              <a:schemeClr val="lt1"/>
+            </a:fontRef>
+          </p:style>
+          <p:txBody>
+            <a:bodyPr rtlCol="0" anchor="ctr"/>
+            <a:lstStyle/>
+            <a:p>
+              <a:pPr algn="ctr"/>
+              <a:r>
+                <a:rPr lang="en-US" sz="1408" dirty="0">
+                  <a:solidFill>
+                    <a:schemeClr val="tx1"/>
+                  </a:solidFill>
+                  <a:latin typeface="Arial" panose="020B0604020202020204" pitchFamily="34" charset="0"/>
+                  <a:cs typeface="Arial" panose="020B0604020202020204" pitchFamily="34" charset="0"/>
+                </a:rPr>
+                <a:t>119</a:t>
+              </a:r>
+              <a:endParaRPr lang="de-DE" sz="1408" dirty="0">
                 <a:solidFill>
                   <a:schemeClr val="tx1"/>
                 </a:solidFill>
                 <a:latin typeface="Arial" panose="020B0604020202020204" pitchFamily="34" charset="0"/>
                 <a:cs typeface="Arial" panose="020B0604020202020204" pitchFamily="34" charset="0"/>
-              </a:rPr>
-              <a:t>119</a:t>
-            </a:r>
-            <a:endParaRPr lang="de-DE" sz="1408" dirty="0">
-              <a:solidFill>
-                <a:schemeClr val="tx1"/>
-              </a:solidFill>
-              <a:latin typeface="Arial" panose="020B0604020202020204" pitchFamily="34" charset="0"/>
-              <a:cs typeface="Arial" panose="020B0604020202020204" pitchFamily="34" charset="0"/>
-            </a:endParaRPr>
-          </a:p>
-        </p:txBody>
-      </p:sp>
-      <p:sp>
-        <p:nvSpPr>
-          <p:cNvPr id="38" name="Rectangle: Rounded Corners 37">
-            <a:extLst>
-              <a:ext uri="{FF2B5EF4-FFF2-40B4-BE49-F238E27FC236}">
-                <a16:creationId xmlns:a16="http://schemas.microsoft.com/office/drawing/2014/main" id="{8B34D7AD-5FA7-4F4B-A347-F882B053B048}"/>
-              </a:ext>
-            </a:extLst>
-          </p:cNvPr>
-          <p:cNvSpPr/>
-          <p:nvPr/>
-        </p:nvSpPr>
-        <p:spPr>
-          <a:xfrm>
-            <a:off x="1793623" y="7103997"/>
-            <a:ext cx="964092" cy="412615"/>
-          </a:xfrm>
-          <a:prstGeom prst="roundRect">
-            <a:avLst/>
-          </a:prstGeom>
-          <a:gradFill flip="none" rotWithShape="1">
-            <a:gsLst>
-              <a:gs pos="84000">
-                <a:schemeClr val="accent1">
-                  <a:lumMod val="20000"/>
-                  <a:lumOff val="80000"/>
-                </a:schemeClr>
-              </a:gs>
-              <a:gs pos="68000">
-                <a:schemeClr val="accent1">
-                  <a:lumMod val="40000"/>
-                  <a:lumOff val="60000"/>
-                </a:schemeClr>
-              </a:gs>
-              <a:gs pos="100000">
-                <a:schemeClr val="bg1">
-                  <a:lumMod val="95000"/>
-                </a:schemeClr>
-              </a:gs>
-            </a:gsLst>
-            <a:lin ang="18900000" scaled="1"/>
-            <a:tileRect/>
-          </a:gradFill>
-          <a:ln>
-            <a:noFill/>
-          </a:ln>
-          <a:effectLst>
-            <a:outerShdw blurRad="50800" dist="38100" dir="8100000" algn="tr" rotWithShape="0">
-              <a:prstClr val="black">
-                <a:alpha val="40000"/>
-              </a:prstClr>
-            </a:outerShdw>
-          </a:effectLst>
-        </p:spPr>
-        <p:style>
-          <a:lnRef idx="2">
-            <a:schemeClr val="accent1">
-              <a:shade val="50000"/>
-            </a:schemeClr>
-          </a:lnRef>
-          <a:fillRef idx="1">
-            <a:schemeClr val="accent1"/>
-          </a:fillRef>
-          <a:effectRef idx="0">
-            <a:schemeClr val="accent1"/>
-          </a:effectRef>
-          <a:fontRef idx="minor">
-            <a:schemeClr val="lt1"/>
-          </a:fontRef>
-        </p:style>
-        <p:txBody>
-          <a:bodyPr rtlCol="0" anchor="ctr"/>
-          <a:lstStyle/>
-          <a:p>
-            <a:pPr algn="ctr"/>
-            <a:r>
-              <a:rPr lang="en-US" sz="1408" dirty="0">
+              </a:endParaRPr>
+            </a:p>
+          </p:txBody>
+        </p:sp>
+        <p:sp>
+          <p:nvSpPr>
+            <p:cNvPr id="38" name="Rectangle: Rounded Corners 37">
+              <a:extLst>
+                <a:ext uri="{FF2B5EF4-FFF2-40B4-BE49-F238E27FC236}">
+                  <a16:creationId xmlns:a16="http://schemas.microsoft.com/office/drawing/2014/main" id="{8B34D7AD-5FA7-4F4B-A347-F882B053B048}"/>
+                </a:ext>
+              </a:extLst>
+            </p:cNvPr>
+            <p:cNvSpPr/>
+            <p:nvPr/>
+          </p:nvSpPr>
+          <p:spPr>
+            <a:xfrm>
+              <a:off x="1793623" y="7103997"/>
+              <a:ext cx="964092" cy="412615"/>
+            </a:xfrm>
+            <a:prstGeom prst="roundRect">
+              <a:avLst/>
+            </a:prstGeom>
+            <a:gradFill flip="none" rotWithShape="1">
+              <a:gsLst>
+                <a:gs pos="84000">
+                  <a:schemeClr val="accent1">
+                    <a:lumMod val="20000"/>
+                    <a:lumOff val="80000"/>
+                  </a:schemeClr>
+                </a:gs>
+                <a:gs pos="68000">
+                  <a:schemeClr val="accent1">
+                    <a:lumMod val="40000"/>
+                    <a:lumOff val="60000"/>
+                  </a:schemeClr>
+                </a:gs>
+                <a:gs pos="100000">
+                  <a:schemeClr val="bg1">
+                    <a:lumMod val="95000"/>
+                  </a:schemeClr>
+                </a:gs>
+              </a:gsLst>
+              <a:lin ang="18900000" scaled="1"/>
+              <a:tileRect/>
+            </a:gradFill>
+            <a:ln>
+              <a:noFill/>
+            </a:ln>
+            <a:effectLst>
+              <a:outerShdw blurRad="50800" dist="38100" dir="8100000" algn="tr" rotWithShape="0">
+                <a:prstClr val="black">
+                  <a:alpha val="40000"/>
+                </a:prstClr>
+              </a:outerShdw>
+            </a:effectLst>
+          </p:spPr>
+          <p:style>
+            <a:lnRef idx="2">
+              <a:schemeClr val="accent1">
+                <a:shade val="50000"/>
+              </a:schemeClr>
+            </a:lnRef>
+            <a:fillRef idx="1">
+              <a:schemeClr val="accent1"/>
+            </a:fillRef>
+            <a:effectRef idx="0">
+              <a:schemeClr val="accent1"/>
+            </a:effectRef>
+            <a:fontRef idx="minor">
+              <a:schemeClr val="lt1"/>
+            </a:fontRef>
+          </p:style>
+          <p:txBody>
+            <a:bodyPr rtlCol="0" anchor="ctr"/>
+            <a:lstStyle/>
+            <a:p>
+              <a:pPr algn="ctr"/>
+              <a:r>
+                <a:rPr lang="en-US" sz="1408" dirty="0">
+                  <a:solidFill>
+                    <a:schemeClr val="tx1"/>
+                  </a:solidFill>
+                  <a:latin typeface="Arial" panose="020B0604020202020204" pitchFamily="34" charset="0"/>
+                  <a:cs typeface="Arial" panose="020B0604020202020204" pitchFamily="34" charset="0"/>
+                </a:rPr>
+                <a:t>790</a:t>
+              </a:r>
+              <a:endParaRPr lang="de-DE" sz="1408" dirty="0">
                 <a:solidFill>
                   <a:schemeClr val="tx1"/>
                 </a:solidFill>
                 <a:latin typeface="Arial" panose="020B0604020202020204" pitchFamily="34" charset="0"/>
                 <a:cs typeface="Arial" panose="020B0604020202020204" pitchFamily="34" charset="0"/>
-              </a:rPr>
-              <a:t>790</a:t>
-            </a:r>
-            <a:endParaRPr lang="de-DE" sz="1408" dirty="0">
-              <a:solidFill>
-                <a:schemeClr val="tx1"/>
-              </a:solidFill>
-              <a:latin typeface="Arial" panose="020B0604020202020204" pitchFamily="34" charset="0"/>
-              <a:cs typeface="Arial" panose="020B0604020202020204" pitchFamily="34" charset="0"/>
-            </a:endParaRPr>
-          </a:p>
-        </p:txBody>
-      </p:sp>
-      <p:sp>
-        <p:nvSpPr>
-          <p:cNvPr id="39" name="Rectangle: Rounded Corners 38">
-            <a:extLst>
-              <a:ext uri="{FF2B5EF4-FFF2-40B4-BE49-F238E27FC236}">
-                <a16:creationId xmlns:a16="http://schemas.microsoft.com/office/drawing/2014/main" id="{6692EBCE-E7C8-498F-9B66-D28428C38FE7}"/>
-              </a:ext>
-            </a:extLst>
-          </p:cNvPr>
-          <p:cNvSpPr/>
-          <p:nvPr/>
-        </p:nvSpPr>
-        <p:spPr>
-          <a:xfrm>
-            <a:off x="2933200" y="8137041"/>
-            <a:ext cx="956613" cy="412615"/>
-          </a:xfrm>
-          <a:prstGeom prst="roundRect">
-            <a:avLst/>
-          </a:prstGeom>
-          <a:gradFill flip="none" rotWithShape="1">
-            <a:gsLst>
-              <a:gs pos="84000">
-                <a:srgbClr val="D8F6E3"/>
-              </a:gs>
-              <a:gs pos="65000">
-                <a:srgbClr val="93FF81"/>
-              </a:gs>
-              <a:gs pos="100000">
-                <a:srgbClr val="D9FFDD"/>
-              </a:gs>
-            </a:gsLst>
-            <a:lin ang="18900000" scaled="1"/>
-            <a:tileRect/>
-          </a:gradFill>
-          <a:ln>
-            <a:noFill/>
-          </a:ln>
-          <a:effectLst>
-            <a:outerShdw blurRad="50800" dist="38100" dir="8100000" algn="tr" rotWithShape="0">
-              <a:prstClr val="black">
-                <a:alpha val="40000"/>
-              </a:prstClr>
-            </a:outerShdw>
-          </a:effectLst>
-        </p:spPr>
-        <p:style>
-          <a:lnRef idx="2">
-            <a:schemeClr val="accent1">
-              <a:shade val="50000"/>
-            </a:schemeClr>
-          </a:lnRef>
-          <a:fillRef idx="1">
-            <a:schemeClr val="accent1"/>
-          </a:fillRef>
-          <a:effectRef idx="0">
-            <a:schemeClr val="accent1"/>
-          </a:effectRef>
-          <a:fontRef idx="minor">
-            <a:schemeClr val="lt1"/>
-          </a:fontRef>
-        </p:style>
-        <p:txBody>
-          <a:bodyPr rtlCol="0" anchor="ctr"/>
-          <a:lstStyle/>
-          <a:p>
-            <a:pPr algn="ctr"/>
-            <a:r>
-              <a:rPr lang="en-US" sz="1408" dirty="0">
+              </a:endParaRPr>
+            </a:p>
+          </p:txBody>
+        </p:sp>
+        <p:sp>
+          <p:nvSpPr>
+            <p:cNvPr id="39" name="Rectangle: Rounded Corners 38">
+              <a:extLst>
+                <a:ext uri="{FF2B5EF4-FFF2-40B4-BE49-F238E27FC236}">
+                  <a16:creationId xmlns:a16="http://schemas.microsoft.com/office/drawing/2014/main" id="{6692EBCE-E7C8-498F-9B66-D28428C38FE7}"/>
+                </a:ext>
+              </a:extLst>
+            </p:cNvPr>
+            <p:cNvSpPr/>
+            <p:nvPr/>
+          </p:nvSpPr>
+          <p:spPr>
+            <a:xfrm>
+              <a:off x="2933200" y="8137041"/>
+              <a:ext cx="956613" cy="412615"/>
+            </a:xfrm>
+            <a:prstGeom prst="roundRect">
+              <a:avLst/>
+            </a:prstGeom>
+            <a:gradFill flip="none" rotWithShape="1">
+              <a:gsLst>
+                <a:gs pos="84000">
+                  <a:srgbClr val="D8F6E3"/>
+                </a:gs>
+                <a:gs pos="65000">
+                  <a:srgbClr val="93FF81"/>
+                </a:gs>
+                <a:gs pos="100000">
+                  <a:srgbClr val="D9FFDD"/>
+                </a:gs>
+              </a:gsLst>
+              <a:lin ang="18900000" scaled="1"/>
+              <a:tileRect/>
+            </a:gradFill>
+            <a:ln>
+              <a:noFill/>
+            </a:ln>
+            <a:effectLst>
+              <a:outerShdw blurRad="50800" dist="38100" dir="8100000" algn="tr" rotWithShape="0">
+                <a:prstClr val="black">
+                  <a:alpha val="40000"/>
+                </a:prstClr>
+              </a:outerShdw>
+            </a:effectLst>
+          </p:spPr>
+          <p:style>
+            <a:lnRef idx="2">
+              <a:schemeClr val="accent1">
+                <a:shade val="50000"/>
+              </a:schemeClr>
+            </a:lnRef>
+            <a:fillRef idx="1">
+              <a:schemeClr val="accent1"/>
+            </a:fillRef>
+            <a:effectRef idx="0">
+              <a:schemeClr val="accent1"/>
+            </a:effectRef>
+            <a:fontRef idx="minor">
+              <a:schemeClr val="lt1"/>
+            </a:fontRef>
+          </p:style>
+          <p:txBody>
+            <a:bodyPr rtlCol="0" anchor="ctr"/>
+            <a:lstStyle/>
+            <a:p>
+              <a:pPr algn="ctr"/>
+              <a:r>
+                <a:rPr lang="en-US" sz="1408" dirty="0">
+                  <a:solidFill>
+                    <a:schemeClr val="tx1"/>
+                  </a:solidFill>
+                  <a:latin typeface="Arial" panose="020B0604020202020204" pitchFamily="34" charset="0"/>
+                  <a:cs typeface="Arial" panose="020B0604020202020204" pitchFamily="34" charset="0"/>
+                </a:rPr>
+                <a:t>1,497</a:t>
+              </a:r>
+              <a:endParaRPr lang="de-DE" sz="1408" dirty="0">
                 <a:solidFill>
                   <a:schemeClr val="tx1"/>
                 </a:solidFill>
                 <a:latin typeface="Arial" panose="020B0604020202020204" pitchFamily="34" charset="0"/>
                 <a:cs typeface="Arial" panose="020B0604020202020204" pitchFamily="34" charset="0"/>
-              </a:rPr>
-              <a:t>1,497</a:t>
-            </a:r>
-            <a:endParaRPr lang="de-DE" sz="1408" dirty="0">
+              </a:endParaRPr>
+            </a:p>
+          </p:txBody>
+        </p:sp>
+        <p:cxnSp>
+          <p:nvCxnSpPr>
+            <p:cNvPr id="41" name="Straight Arrow Connector 40">
+              <a:extLst>
+                <a:ext uri="{FF2B5EF4-FFF2-40B4-BE49-F238E27FC236}">
+                  <a16:creationId xmlns:a16="http://schemas.microsoft.com/office/drawing/2014/main" id="{44A59E55-1123-41CF-9FF3-F2082F8B3C5D}"/>
+                </a:ext>
+              </a:extLst>
+            </p:cNvPr>
+            <p:cNvCxnSpPr>
+              <a:cxnSpLocks/>
+              <a:endCxn id="38" idx="0"/>
+            </p:cNvCxnSpPr>
+            <p:nvPr/>
+          </p:nvCxnSpPr>
+          <p:spPr>
+            <a:xfrm>
+              <a:off x="2271909" y="5501561"/>
+              <a:ext cx="3760" cy="1602437"/>
+            </a:xfrm>
+            <a:prstGeom prst="straightConnector1">
+              <a:avLst/>
+            </a:prstGeom>
+            <a:ln>
               <a:solidFill>
-                <a:schemeClr val="tx1"/>
+                <a:schemeClr val="bg1">
+                  <a:lumMod val="65000"/>
+                </a:schemeClr>
               </a:solidFill>
-              <a:latin typeface="Arial" panose="020B0604020202020204" pitchFamily="34" charset="0"/>
-              <a:cs typeface="Arial" panose="020B0604020202020204" pitchFamily="34" charset="0"/>
-            </a:endParaRPr>
-          </a:p>
-        </p:txBody>
-      </p:sp>
-      <p:cxnSp>
-        <p:nvCxnSpPr>
-          <p:cNvPr id="41" name="Straight Arrow Connector 40">
-            <a:extLst>
-              <a:ext uri="{FF2B5EF4-FFF2-40B4-BE49-F238E27FC236}">
-                <a16:creationId xmlns:a16="http://schemas.microsoft.com/office/drawing/2014/main" id="{44A59E55-1123-41CF-9FF3-F2082F8B3C5D}"/>
-              </a:ext>
-            </a:extLst>
-          </p:cNvPr>
-          <p:cNvCxnSpPr>
-            <a:cxnSpLocks/>
-            <a:endCxn id="38" idx="0"/>
-          </p:cNvCxnSpPr>
-          <p:nvPr/>
-        </p:nvCxnSpPr>
-        <p:spPr>
-          <a:xfrm>
-            <a:off x="2271909" y="5501561"/>
-            <a:ext cx="3760" cy="1602437"/>
-          </a:xfrm>
-          <a:prstGeom prst="straightConnector1">
-            <a:avLst/>
-          </a:prstGeom>
-          <a:ln>
-            <a:solidFill>
-              <a:schemeClr val="bg1">
-                <a:lumMod val="65000"/>
-              </a:schemeClr>
-            </a:solidFill>
-            <a:tailEnd type="triangle"/>
-          </a:ln>
-        </p:spPr>
-        <p:style>
-          <a:lnRef idx="1">
-            <a:schemeClr val="accent1"/>
-          </a:lnRef>
-          <a:fillRef idx="0">
-            <a:schemeClr val="accent1"/>
-          </a:fillRef>
-          <a:effectRef idx="0">
-            <a:schemeClr val="accent1"/>
-          </a:effectRef>
-          <a:fontRef idx="minor">
-            <a:schemeClr val="tx1"/>
-          </a:fontRef>
-        </p:style>
-      </p:cxnSp>
-      <p:cxnSp>
-        <p:nvCxnSpPr>
-          <p:cNvPr id="42" name="Straight Arrow Connector 41">
-            <a:extLst>
-              <a:ext uri="{FF2B5EF4-FFF2-40B4-BE49-F238E27FC236}">
-                <a16:creationId xmlns:a16="http://schemas.microsoft.com/office/drawing/2014/main" id="{7C8CB980-D4CC-4B64-97C7-0DACD7E52C16}"/>
-              </a:ext>
-            </a:extLst>
-          </p:cNvPr>
-          <p:cNvCxnSpPr>
-            <a:cxnSpLocks/>
-            <a:stCxn id="38" idx="2"/>
-            <a:endCxn id="39" idx="0"/>
-          </p:cNvCxnSpPr>
-          <p:nvPr/>
-        </p:nvCxnSpPr>
-        <p:spPr>
-          <a:xfrm>
-            <a:off x="2275670" y="7516612"/>
-            <a:ext cx="1135837" cy="620428"/>
-          </a:xfrm>
-          <a:prstGeom prst="straightConnector1">
-            <a:avLst/>
-          </a:prstGeom>
-          <a:ln>
-            <a:solidFill>
-              <a:schemeClr val="bg1">
-                <a:lumMod val="65000"/>
-              </a:schemeClr>
-            </a:solidFill>
-            <a:tailEnd type="triangle"/>
-          </a:ln>
-        </p:spPr>
-        <p:style>
-          <a:lnRef idx="1">
-            <a:schemeClr val="accent1"/>
-          </a:lnRef>
-          <a:fillRef idx="0">
-            <a:schemeClr val="accent1"/>
-          </a:fillRef>
-          <a:effectRef idx="0">
-            <a:schemeClr val="accent1"/>
-          </a:effectRef>
-          <a:fontRef idx="minor">
-            <a:schemeClr val="tx1"/>
-          </a:fontRef>
-        </p:style>
-      </p:cxnSp>
-      <p:sp>
-        <p:nvSpPr>
-          <p:cNvPr id="50" name="Rectangle 49">
-            <a:extLst>
-              <a:ext uri="{FF2B5EF4-FFF2-40B4-BE49-F238E27FC236}">
-                <a16:creationId xmlns:a16="http://schemas.microsoft.com/office/drawing/2014/main" id="{26500A19-34AF-481D-90E9-7A15CD95C98D}"/>
-              </a:ext>
-            </a:extLst>
-          </p:cNvPr>
-          <p:cNvSpPr/>
-          <p:nvPr/>
-        </p:nvSpPr>
-        <p:spPr>
-          <a:xfrm>
-            <a:off x="683797" y="5042446"/>
-            <a:ext cx="1066474" cy="489621"/>
-          </a:xfrm>
-          <a:prstGeom prst="rect">
-            <a:avLst/>
-          </a:prstGeom>
-        </p:spPr>
-        <p:txBody>
-          <a:bodyPr wrap="square">
-            <a:spAutoFit/>
-          </a:bodyPr>
-          <a:lstStyle/>
-          <a:p>
-            <a:pPr algn="r"/>
-            <a:r>
-              <a:rPr lang="en-US" sz="1291" dirty="0">
+              <a:tailEnd type="triangle"/>
+            </a:ln>
+          </p:spPr>
+          <p:style>
+            <a:lnRef idx="1">
+              <a:schemeClr val="accent1"/>
+            </a:lnRef>
+            <a:fillRef idx="0">
+              <a:schemeClr val="accent1"/>
+            </a:fillRef>
+            <a:effectRef idx="0">
+              <a:schemeClr val="accent1"/>
+            </a:effectRef>
+            <a:fontRef idx="minor">
+              <a:schemeClr val="tx1"/>
+            </a:fontRef>
+          </p:style>
+        </p:cxnSp>
+        <p:cxnSp>
+          <p:nvCxnSpPr>
+            <p:cNvPr id="42" name="Straight Arrow Connector 41">
+              <a:extLst>
+                <a:ext uri="{FF2B5EF4-FFF2-40B4-BE49-F238E27FC236}">
+                  <a16:creationId xmlns:a16="http://schemas.microsoft.com/office/drawing/2014/main" id="{7C8CB980-D4CC-4B64-97C7-0DACD7E52C16}"/>
+                </a:ext>
+              </a:extLst>
+            </p:cNvPr>
+            <p:cNvCxnSpPr>
+              <a:cxnSpLocks/>
+              <a:stCxn id="38" idx="2"/>
+              <a:endCxn id="39" idx="0"/>
+            </p:cNvCxnSpPr>
+            <p:nvPr/>
+          </p:nvCxnSpPr>
+          <p:spPr>
+            <a:xfrm>
+              <a:off x="2275670" y="7516612"/>
+              <a:ext cx="1135837" cy="620428"/>
+            </a:xfrm>
+            <a:prstGeom prst="straightConnector1">
+              <a:avLst/>
+            </a:prstGeom>
+            <a:ln>
+              <a:solidFill>
+                <a:schemeClr val="bg1">
+                  <a:lumMod val="65000"/>
+                </a:schemeClr>
+              </a:solidFill>
+              <a:tailEnd type="triangle"/>
+            </a:ln>
+          </p:spPr>
+          <p:style>
+            <a:lnRef idx="1">
+              <a:schemeClr val="accent1"/>
+            </a:lnRef>
+            <a:fillRef idx="0">
+              <a:schemeClr val="accent1"/>
+            </a:fillRef>
+            <a:effectRef idx="0">
+              <a:schemeClr val="accent1"/>
+            </a:effectRef>
+            <a:fontRef idx="minor">
+              <a:schemeClr val="tx1"/>
+            </a:fontRef>
+          </p:style>
+        </p:cxnSp>
+        <p:sp>
+          <p:nvSpPr>
+            <p:cNvPr id="50" name="Rectangle 49">
+              <a:extLst>
+                <a:ext uri="{FF2B5EF4-FFF2-40B4-BE49-F238E27FC236}">
+                  <a16:creationId xmlns:a16="http://schemas.microsoft.com/office/drawing/2014/main" id="{26500A19-34AF-481D-90E9-7A15CD95C98D}"/>
+                </a:ext>
+              </a:extLst>
+            </p:cNvPr>
+            <p:cNvSpPr/>
+            <p:nvPr/>
+          </p:nvSpPr>
+          <p:spPr>
+            <a:xfrm>
+              <a:off x="683797" y="5042445"/>
+              <a:ext cx="1066474" cy="489621"/>
+            </a:xfrm>
+            <a:prstGeom prst="rect">
+              <a:avLst/>
+            </a:prstGeom>
+          </p:spPr>
+          <p:txBody>
+            <a:bodyPr wrap="square">
+              <a:spAutoFit/>
+            </a:bodyPr>
+            <a:lstStyle/>
+            <a:p>
+              <a:pPr algn="r"/>
+              <a:r>
+                <a:rPr lang="en-US" sz="1291" dirty="0">
+                  <a:latin typeface="Arial" panose="020B0604020202020204" pitchFamily="34" charset="0"/>
+                  <a:cs typeface="Arial" panose="020B0604020202020204" pitchFamily="34" charset="0"/>
+                </a:rPr>
+                <a:t>Mentioned</a:t>
+              </a:r>
+            </a:p>
+            <a:p>
+              <a:pPr algn="r"/>
+              <a:r>
+                <a:rPr lang="en-US" sz="1291" dirty="0">
+                  <a:latin typeface="Arial" panose="020B0604020202020204" pitchFamily="34" charset="0"/>
+                  <a:cs typeface="Arial" panose="020B0604020202020204" pitchFamily="34" charset="0"/>
+                </a:rPr>
+                <a:t>Datasets</a:t>
+              </a:r>
+            </a:p>
+          </p:txBody>
+        </p:sp>
+        <p:sp>
+          <p:nvSpPr>
+            <p:cNvPr id="58" name="Rectangle 57">
+              <a:extLst>
+                <a:ext uri="{FF2B5EF4-FFF2-40B4-BE49-F238E27FC236}">
+                  <a16:creationId xmlns:a16="http://schemas.microsoft.com/office/drawing/2014/main" id="{ED7A0D1F-7F9E-42B5-9084-1E0CD2E1F859}"/>
+                </a:ext>
+              </a:extLst>
+            </p:cNvPr>
+            <p:cNvSpPr/>
+            <p:nvPr/>
+          </p:nvSpPr>
+          <p:spPr>
+            <a:xfrm>
+              <a:off x="685202" y="7051392"/>
+              <a:ext cx="1066474" cy="489621"/>
+            </a:xfrm>
+            <a:prstGeom prst="rect">
+              <a:avLst/>
+            </a:prstGeom>
+          </p:spPr>
+          <p:txBody>
+            <a:bodyPr wrap="square">
+              <a:spAutoFit/>
+            </a:bodyPr>
+            <a:lstStyle/>
+            <a:p>
+              <a:pPr algn="r"/>
+              <a:r>
+                <a:rPr lang="en-US" sz="1291" dirty="0">
+                  <a:latin typeface="Arial" panose="020B0604020202020204" pitchFamily="34" charset="0"/>
+                  <a:cs typeface="Arial" panose="020B0604020202020204" pitchFamily="34" charset="0"/>
+                </a:rPr>
+                <a:t>Mentions</a:t>
+              </a:r>
+            </a:p>
+            <a:p>
+              <a:pPr algn="r"/>
+              <a:r>
+                <a:rPr lang="en-US" sz="1291" dirty="0">
+                  <a:latin typeface="Arial" panose="020B0604020202020204" pitchFamily="34" charset="0"/>
+                  <a:cs typeface="Arial" panose="020B0604020202020204" pitchFamily="34" charset="0"/>
+                </a:rPr>
+                <a:t>of Datasets</a:t>
+              </a:r>
+              <a:endParaRPr lang="de-DE" sz="1291" dirty="0">
                 <a:latin typeface="Arial" panose="020B0604020202020204" pitchFamily="34" charset="0"/>
                 <a:cs typeface="Arial" panose="020B0604020202020204" pitchFamily="34" charset="0"/>
-              </a:rPr>
-              <a:t>Mentioned</a:t>
-            </a:r>
-          </a:p>
-          <a:p>
-            <a:pPr algn="r"/>
-            <a:r>
-              <a:rPr lang="en-US" sz="1291" dirty="0">
-                <a:latin typeface="Arial" panose="020B0604020202020204" pitchFamily="34" charset="0"/>
-                <a:cs typeface="Arial" panose="020B0604020202020204" pitchFamily="34" charset="0"/>
-              </a:rPr>
-              <a:t>Datasets</a:t>
-            </a:r>
-          </a:p>
-        </p:txBody>
-      </p:sp>
-      <p:sp>
-        <p:nvSpPr>
-          <p:cNvPr id="58" name="Rectangle 57">
-            <a:extLst>
-              <a:ext uri="{FF2B5EF4-FFF2-40B4-BE49-F238E27FC236}">
-                <a16:creationId xmlns:a16="http://schemas.microsoft.com/office/drawing/2014/main" id="{ED7A0D1F-7F9E-42B5-9084-1E0CD2E1F859}"/>
-              </a:ext>
-            </a:extLst>
-          </p:cNvPr>
-          <p:cNvSpPr/>
-          <p:nvPr/>
-        </p:nvSpPr>
-        <p:spPr>
-          <a:xfrm>
-            <a:off x="685201" y="7051393"/>
-            <a:ext cx="1066474" cy="489621"/>
-          </a:xfrm>
-          <a:prstGeom prst="rect">
-            <a:avLst/>
-          </a:prstGeom>
-        </p:spPr>
-        <p:txBody>
-          <a:bodyPr wrap="square">
-            <a:spAutoFit/>
-          </a:bodyPr>
-          <a:lstStyle/>
-          <a:p>
-            <a:pPr algn="r"/>
-            <a:r>
-              <a:rPr lang="en-US" sz="1291" dirty="0">
-                <a:latin typeface="Arial" panose="020B0604020202020204" pitchFamily="34" charset="0"/>
-                <a:cs typeface="Arial" panose="020B0604020202020204" pitchFamily="34" charset="0"/>
-              </a:rPr>
-              <a:t>Mentions</a:t>
-            </a:r>
-          </a:p>
-          <a:p>
-            <a:pPr algn="r"/>
-            <a:r>
-              <a:rPr lang="en-US" sz="1291" dirty="0">
-                <a:latin typeface="Arial" panose="020B0604020202020204" pitchFamily="34" charset="0"/>
-                <a:cs typeface="Arial" panose="020B0604020202020204" pitchFamily="34" charset="0"/>
-              </a:rPr>
-              <a:t>of Datasets</a:t>
-            </a:r>
-            <a:endParaRPr lang="de-DE" sz="1291" dirty="0">
-              <a:latin typeface="Arial" panose="020B0604020202020204" pitchFamily="34" charset="0"/>
-              <a:cs typeface="Arial" panose="020B0604020202020204" pitchFamily="34" charset="0"/>
-            </a:endParaRPr>
-          </a:p>
-        </p:txBody>
-      </p:sp>
-      <p:cxnSp>
-        <p:nvCxnSpPr>
-          <p:cNvPr id="59" name="Straight Arrow Connector 58">
-            <a:extLst>
-              <a:ext uri="{FF2B5EF4-FFF2-40B4-BE49-F238E27FC236}">
-                <a16:creationId xmlns:a16="http://schemas.microsoft.com/office/drawing/2014/main" id="{1FBE4FCF-8599-453D-ACF1-7A4330EE1F2C}"/>
-              </a:ext>
-            </a:extLst>
-          </p:cNvPr>
-          <p:cNvCxnSpPr>
-            <a:cxnSpLocks/>
-            <a:stCxn id="13" idx="2"/>
-            <a:endCxn id="39" idx="0"/>
-          </p:cNvCxnSpPr>
-          <p:nvPr/>
-        </p:nvCxnSpPr>
-        <p:spPr>
-          <a:xfrm flipH="1">
-            <a:off x="3411507" y="7516612"/>
-            <a:ext cx="1150859" cy="620428"/>
-          </a:xfrm>
-          <a:prstGeom prst="straightConnector1">
-            <a:avLst/>
-          </a:prstGeom>
-          <a:ln>
-            <a:solidFill>
-              <a:schemeClr val="bg1">
-                <a:lumMod val="65000"/>
-              </a:schemeClr>
-            </a:solidFill>
-            <a:tailEnd type="triangle"/>
-          </a:ln>
-        </p:spPr>
-        <p:style>
-          <a:lnRef idx="1">
-            <a:schemeClr val="accent1"/>
-          </a:lnRef>
-          <a:fillRef idx="0">
-            <a:schemeClr val="accent1"/>
-          </a:fillRef>
-          <a:effectRef idx="0">
-            <a:schemeClr val="accent1"/>
-          </a:effectRef>
-          <a:fontRef idx="minor">
-            <a:schemeClr val="tx1"/>
-          </a:fontRef>
-        </p:style>
-      </p:cxnSp>
-      <p:sp>
-        <p:nvSpPr>
-          <p:cNvPr id="65" name="Rectangle 64">
-            <a:extLst>
-              <a:ext uri="{FF2B5EF4-FFF2-40B4-BE49-F238E27FC236}">
-                <a16:creationId xmlns:a16="http://schemas.microsoft.com/office/drawing/2014/main" id="{668D4145-09E9-49E0-ADC6-0FAF2836A917}"/>
-              </a:ext>
-            </a:extLst>
-          </p:cNvPr>
-          <p:cNvSpPr/>
-          <p:nvPr/>
-        </p:nvSpPr>
-        <p:spPr>
-          <a:xfrm>
-            <a:off x="2117258" y="8590668"/>
-            <a:ext cx="2634960" cy="949491"/>
-          </a:xfrm>
-          <a:prstGeom prst="rect">
-            <a:avLst/>
-          </a:prstGeom>
-        </p:spPr>
-        <p:txBody>
-          <a:bodyPr wrap="square">
-            <a:spAutoFit/>
-          </a:bodyPr>
-          <a:lstStyle/>
-          <a:p>
-            <a:pPr algn="ctr">
-              <a:lnSpc>
-                <a:spcPct val="150000"/>
-              </a:lnSpc>
-            </a:pPr>
-            <a:r>
-              <a:rPr lang="en-US" sz="1291" dirty="0">
-                <a:latin typeface="Arial" panose="020B0604020202020204" pitchFamily="34" charset="0"/>
-                <a:cs typeface="Arial" panose="020B0604020202020204" pitchFamily="34" charset="0"/>
-              </a:rPr>
-              <a:t>Mentions of Datasets</a:t>
-            </a:r>
-          </a:p>
-          <a:p>
-            <a:pPr algn="ctr">
-              <a:lnSpc>
-                <a:spcPct val="150000"/>
-              </a:lnSpc>
-            </a:pPr>
-            <a:r>
-              <a:rPr lang="en-US" sz="1291" dirty="0">
+              </a:endParaRPr>
+            </a:p>
+          </p:txBody>
+        </p:sp>
+        <p:cxnSp>
+          <p:nvCxnSpPr>
+            <p:cNvPr id="59" name="Straight Arrow Connector 58">
+              <a:extLst>
+                <a:ext uri="{FF2B5EF4-FFF2-40B4-BE49-F238E27FC236}">
+                  <a16:creationId xmlns:a16="http://schemas.microsoft.com/office/drawing/2014/main" id="{1FBE4FCF-8599-453D-ACF1-7A4330EE1F2C}"/>
+                </a:ext>
+              </a:extLst>
+            </p:cNvPr>
+            <p:cNvCxnSpPr>
+              <a:cxnSpLocks/>
+              <a:stCxn id="13" idx="2"/>
+              <a:endCxn id="39" idx="0"/>
+            </p:cNvCxnSpPr>
+            <p:nvPr/>
+          </p:nvCxnSpPr>
+          <p:spPr>
+            <a:xfrm flipH="1">
+              <a:off x="3411507" y="7516612"/>
+              <a:ext cx="1150859" cy="620428"/>
+            </a:xfrm>
+            <a:prstGeom prst="straightConnector1">
+              <a:avLst/>
+            </a:prstGeom>
+            <a:ln>
+              <a:solidFill>
+                <a:schemeClr val="bg1">
+                  <a:lumMod val="65000"/>
+                </a:schemeClr>
+              </a:solidFill>
+              <a:tailEnd type="triangle"/>
+            </a:ln>
+          </p:spPr>
+          <p:style>
+            <a:lnRef idx="1">
+              <a:schemeClr val="accent1"/>
+            </a:lnRef>
+            <a:fillRef idx="0">
+              <a:schemeClr val="accent1"/>
+            </a:fillRef>
+            <a:effectRef idx="0">
+              <a:schemeClr val="accent1"/>
+            </a:effectRef>
+            <a:fontRef idx="minor">
+              <a:schemeClr val="tx1"/>
+            </a:fontRef>
+          </p:style>
+        </p:cxnSp>
+        <p:sp>
+          <p:nvSpPr>
+            <p:cNvPr id="65" name="Rectangle 64">
+              <a:extLst>
+                <a:ext uri="{FF2B5EF4-FFF2-40B4-BE49-F238E27FC236}">
+                  <a16:creationId xmlns:a16="http://schemas.microsoft.com/office/drawing/2014/main" id="{668D4145-09E9-49E0-ADC6-0FAF2836A917}"/>
+                </a:ext>
+              </a:extLst>
+            </p:cNvPr>
+            <p:cNvSpPr/>
+            <p:nvPr/>
+          </p:nvSpPr>
+          <p:spPr>
+            <a:xfrm>
+              <a:off x="2117257" y="8590668"/>
+              <a:ext cx="2634961" cy="949491"/>
+            </a:xfrm>
+            <a:prstGeom prst="rect">
+              <a:avLst/>
+            </a:prstGeom>
+          </p:spPr>
+          <p:txBody>
+            <a:bodyPr wrap="square">
+              <a:spAutoFit/>
+            </a:bodyPr>
+            <a:lstStyle/>
+            <a:p>
+              <a:pPr algn="ctr">
+                <a:lnSpc>
+                  <a:spcPct val="150000"/>
+                </a:lnSpc>
+              </a:pPr>
+              <a:r>
+                <a:rPr lang="en-US" sz="1291" dirty="0">
+                  <a:latin typeface="Arial" panose="020B0604020202020204" pitchFamily="34" charset="0"/>
+                  <a:cs typeface="Arial" panose="020B0604020202020204" pitchFamily="34" charset="0"/>
+                </a:rPr>
+                <a:t>Mentions of Datasets</a:t>
+              </a:r>
+            </a:p>
+            <a:p>
+              <a:pPr algn="ctr">
+                <a:lnSpc>
+                  <a:spcPct val="150000"/>
+                </a:lnSpc>
+              </a:pPr>
+              <a:r>
+                <a:rPr lang="en-US" sz="1291" dirty="0">
+                  <a:solidFill>
+                    <a:schemeClr val="bg1">
+                      <a:lumMod val="50000"/>
+                    </a:schemeClr>
+                  </a:solidFill>
+                  <a:latin typeface="Arial" panose="020B0604020202020204" pitchFamily="34" charset="0"/>
+                  <a:cs typeface="Arial" panose="020B0604020202020204" pitchFamily="34" charset="0"/>
+                </a:rPr>
+                <a:t>Published in 134 Charité Papers</a:t>
+              </a:r>
+              <a:endParaRPr lang="de-DE" sz="1291" dirty="0">
                 <a:solidFill>
                   <a:schemeClr val="bg1">
                     <a:lumMod val="50000"/>
@@ -4072,27 +4103,705 @@
                 </a:solidFill>
                 <a:latin typeface="Arial" panose="020B0604020202020204" pitchFamily="34" charset="0"/>
                 <a:cs typeface="Arial" panose="020B0604020202020204" pitchFamily="34" charset="0"/>
-              </a:rPr>
-              <a:t>Published in 134 Charité Papers</a:t>
-            </a:r>
-            <a:endParaRPr lang="de-DE" sz="1291" dirty="0">
+              </a:endParaRPr>
+            </a:p>
+            <a:p>
+              <a:pPr algn="ctr">
+                <a:lnSpc>
+                  <a:spcPct val="150000"/>
+                </a:lnSpc>
+              </a:pPr>
+              <a:r>
+                <a:rPr lang="de-DE" sz="1291" dirty="0">
+                  <a:solidFill>
+                    <a:schemeClr val="bg1">
+                      <a:lumMod val="50000"/>
+                    </a:schemeClr>
+                  </a:solidFill>
+                  <a:latin typeface="Arial" panose="020B0604020202020204" pitchFamily="34" charset="0"/>
+                  <a:cs typeface="Arial" panose="020B0604020202020204" pitchFamily="34" charset="0"/>
+                </a:rPr>
+                <a:t>Reused by 1,390 Papers</a:t>
+              </a:r>
+            </a:p>
+          </p:txBody>
+        </p:sp>
+        <p:cxnSp>
+          <p:nvCxnSpPr>
+            <p:cNvPr id="67" name="Straight Arrow Connector 66">
+              <a:extLst>
+                <a:ext uri="{FF2B5EF4-FFF2-40B4-BE49-F238E27FC236}">
+                  <a16:creationId xmlns:a16="http://schemas.microsoft.com/office/drawing/2014/main" id="{546E5E13-378B-484F-A381-094CCFBA2949}"/>
+                </a:ext>
+              </a:extLst>
+            </p:cNvPr>
+            <p:cNvCxnSpPr>
+              <a:cxnSpLocks/>
+              <a:stCxn id="89" idx="2"/>
+              <a:endCxn id="9" idx="0"/>
+            </p:cNvCxnSpPr>
+            <p:nvPr/>
+          </p:nvCxnSpPr>
+          <p:spPr>
+            <a:xfrm>
+              <a:off x="4557867" y="3268850"/>
+              <a:ext cx="4478" cy="740315"/>
+            </a:xfrm>
+            <a:prstGeom prst="straightConnector1">
+              <a:avLst/>
+            </a:prstGeom>
+            <a:ln>
               <a:solidFill>
                 <a:schemeClr val="bg1">
-                  <a:lumMod val="50000"/>
+                  <a:lumMod val="65000"/>
                 </a:schemeClr>
               </a:solidFill>
-              <a:latin typeface="Arial" panose="020B0604020202020204" pitchFamily="34" charset="0"/>
-              <a:cs typeface="Arial" panose="020B0604020202020204" pitchFamily="34" charset="0"/>
-            </a:endParaRPr>
-          </a:p>
-          <a:p>
-            <a:pPr algn="ctr">
-              <a:lnSpc>
-                <a:spcPct val="150000"/>
-              </a:lnSpc>
-            </a:pPr>
-            <a:r>
-              <a:rPr lang="de-DE" sz="1291" dirty="0">
+              <a:tailEnd type="triangle"/>
+            </a:ln>
+          </p:spPr>
+          <p:style>
+            <a:lnRef idx="1">
+              <a:schemeClr val="accent1"/>
+            </a:lnRef>
+            <a:fillRef idx="0">
+              <a:schemeClr val="accent1"/>
+            </a:fillRef>
+            <a:effectRef idx="0">
+              <a:schemeClr val="accent1"/>
+            </a:effectRef>
+            <a:fontRef idx="minor">
+              <a:schemeClr val="tx1"/>
+            </a:fontRef>
+          </p:style>
+        </p:cxnSp>
+        <p:sp>
+          <p:nvSpPr>
+            <p:cNvPr id="80" name="Rectangle: Rounded Corners 79">
+              <a:extLst>
+                <a:ext uri="{FF2B5EF4-FFF2-40B4-BE49-F238E27FC236}">
+                  <a16:creationId xmlns:a16="http://schemas.microsoft.com/office/drawing/2014/main" id="{D114DA72-2DDC-49FF-88D2-5DA57C7BF46C}"/>
+                </a:ext>
+              </a:extLst>
+            </p:cNvPr>
+            <p:cNvSpPr/>
+            <p:nvPr/>
+          </p:nvSpPr>
+          <p:spPr>
+            <a:xfrm>
+              <a:off x="2963761" y="6027801"/>
+              <a:ext cx="956613" cy="412615"/>
+            </a:xfrm>
+            <a:prstGeom prst="roundRect">
+              <a:avLst/>
+            </a:prstGeom>
+            <a:gradFill flip="none" rotWithShape="1">
+              <a:gsLst>
+                <a:gs pos="84000">
+                  <a:srgbClr val="D8F6E3"/>
+                </a:gs>
+                <a:gs pos="65000">
+                  <a:srgbClr val="93FF81"/>
+                </a:gs>
+                <a:gs pos="100000">
+                  <a:srgbClr val="D9FFDD"/>
+                </a:gs>
+              </a:gsLst>
+              <a:lin ang="18900000" scaled="1"/>
+              <a:tileRect/>
+            </a:gradFill>
+            <a:ln>
+              <a:noFill/>
+            </a:ln>
+            <a:effectLst>
+              <a:outerShdw blurRad="50800" dist="38100" dir="8100000" algn="tr" rotWithShape="0">
+                <a:prstClr val="black">
+                  <a:alpha val="40000"/>
+                </a:prstClr>
+              </a:outerShdw>
+            </a:effectLst>
+          </p:spPr>
+          <p:style>
+            <a:lnRef idx="2">
+              <a:schemeClr val="accent1">
+                <a:shade val="50000"/>
+              </a:schemeClr>
+            </a:lnRef>
+            <a:fillRef idx="1">
+              <a:schemeClr val="accent1"/>
+            </a:fillRef>
+            <a:effectRef idx="0">
+              <a:schemeClr val="accent1"/>
+            </a:effectRef>
+            <a:fontRef idx="minor">
+              <a:schemeClr val="lt1"/>
+            </a:fontRef>
+          </p:style>
+          <p:txBody>
+            <a:bodyPr rtlCol="0" anchor="ctr"/>
+            <a:lstStyle/>
+            <a:p>
+              <a:pPr algn="ctr"/>
+              <a:r>
+                <a:rPr lang="en-US" sz="1408" dirty="0">
+                  <a:solidFill>
+                    <a:schemeClr val="tx1"/>
+                  </a:solidFill>
+                  <a:latin typeface="Arial" panose="020B0604020202020204" pitchFamily="34" charset="0"/>
+                  <a:cs typeface="Arial" panose="020B0604020202020204" pitchFamily="34" charset="0"/>
+                </a:rPr>
+                <a:t>175</a:t>
+              </a:r>
+              <a:endParaRPr lang="de-DE" sz="1408" dirty="0">
+                <a:solidFill>
+                  <a:schemeClr val="tx1"/>
+                </a:solidFill>
+                <a:latin typeface="Arial" panose="020B0604020202020204" pitchFamily="34" charset="0"/>
+                <a:cs typeface="Arial" panose="020B0604020202020204" pitchFamily="34" charset="0"/>
+              </a:endParaRPr>
+            </a:p>
+          </p:txBody>
+        </p:sp>
+        <p:cxnSp>
+          <p:nvCxnSpPr>
+            <p:cNvPr id="81" name="Straight Arrow Connector 80">
+              <a:extLst>
+                <a:ext uri="{FF2B5EF4-FFF2-40B4-BE49-F238E27FC236}">
+                  <a16:creationId xmlns:a16="http://schemas.microsoft.com/office/drawing/2014/main" id="{DEBAAEA7-28FC-4C4C-85C6-F295E82C619C}"/>
+                </a:ext>
+              </a:extLst>
+            </p:cNvPr>
+            <p:cNvCxnSpPr>
+              <a:cxnSpLocks/>
+              <a:endCxn id="80" idx="0"/>
+            </p:cNvCxnSpPr>
+            <p:nvPr/>
+          </p:nvCxnSpPr>
+          <p:spPr>
+            <a:xfrm>
+              <a:off x="2424329" y="5515238"/>
+              <a:ext cx="1017738" cy="512563"/>
+            </a:xfrm>
+            <a:prstGeom prst="straightConnector1">
+              <a:avLst/>
+            </a:prstGeom>
+            <a:ln>
+              <a:solidFill>
+                <a:schemeClr val="bg1">
+                  <a:lumMod val="65000"/>
+                </a:schemeClr>
+              </a:solidFill>
+              <a:tailEnd type="triangle"/>
+            </a:ln>
+          </p:spPr>
+          <p:style>
+            <a:lnRef idx="1">
+              <a:schemeClr val="accent1"/>
+            </a:lnRef>
+            <a:fillRef idx="0">
+              <a:schemeClr val="accent1"/>
+            </a:fillRef>
+            <a:effectRef idx="0">
+              <a:schemeClr val="accent1"/>
+            </a:effectRef>
+            <a:fontRef idx="minor">
+              <a:schemeClr val="tx1"/>
+            </a:fontRef>
+          </p:style>
+        </p:cxnSp>
+        <p:cxnSp>
+          <p:nvCxnSpPr>
+            <p:cNvPr id="82" name="Straight Arrow Connector 81">
+              <a:extLst>
+                <a:ext uri="{FF2B5EF4-FFF2-40B4-BE49-F238E27FC236}">
+                  <a16:creationId xmlns:a16="http://schemas.microsoft.com/office/drawing/2014/main" id="{BFAE4691-A331-4DBF-B116-0C1888F2171E}"/>
+                </a:ext>
+              </a:extLst>
+            </p:cNvPr>
+            <p:cNvCxnSpPr>
+              <a:cxnSpLocks/>
+              <a:endCxn id="80" idx="0"/>
+            </p:cNvCxnSpPr>
+            <p:nvPr/>
+          </p:nvCxnSpPr>
+          <p:spPr>
+            <a:xfrm flipH="1">
+              <a:off x="3442068" y="5515238"/>
+              <a:ext cx="975517" cy="512563"/>
+            </a:xfrm>
+            <a:prstGeom prst="straightConnector1">
+              <a:avLst/>
+            </a:prstGeom>
+            <a:ln>
+              <a:solidFill>
+                <a:schemeClr val="bg1">
+                  <a:lumMod val="65000"/>
+                </a:schemeClr>
+              </a:solidFill>
+              <a:tailEnd type="triangle"/>
+            </a:ln>
+          </p:spPr>
+          <p:style>
+            <a:lnRef idx="1">
+              <a:schemeClr val="accent1"/>
+            </a:lnRef>
+            <a:fillRef idx="0">
+              <a:schemeClr val="accent1"/>
+            </a:fillRef>
+            <a:effectRef idx="0">
+              <a:schemeClr val="accent1"/>
+            </a:effectRef>
+            <a:fontRef idx="minor">
+              <a:schemeClr val="tx1"/>
+            </a:fontRef>
+          </p:style>
+        </p:cxnSp>
+        <p:sp>
+          <p:nvSpPr>
+            <p:cNvPr id="83" name="Rectangle 82">
+              <a:extLst>
+                <a:ext uri="{FF2B5EF4-FFF2-40B4-BE49-F238E27FC236}">
+                  <a16:creationId xmlns:a16="http://schemas.microsoft.com/office/drawing/2014/main" id="{B2BD9BD0-063F-41F0-AF7A-83DA5949A806}"/>
+                </a:ext>
+              </a:extLst>
+            </p:cNvPr>
+            <p:cNvSpPr/>
+            <p:nvPr/>
+          </p:nvSpPr>
+          <p:spPr>
+            <a:xfrm>
+              <a:off x="2436224" y="6474051"/>
+              <a:ext cx="1965543" cy="290977"/>
+            </a:xfrm>
+            <a:prstGeom prst="rect">
+              <a:avLst/>
+            </a:prstGeom>
+          </p:spPr>
+          <p:txBody>
+            <a:bodyPr wrap="square">
+              <a:spAutoFit/>
+            </a:bodyPr>
+            <a:lstStyle/>
+            <a:p>
+              <a:pPr algn="ctr"/>
+              <a:r>
+                <a:rPr lang="en-US" sz="1291" dirty="0">
+                  <a:latin typeface="Arial" panose="020B0604020202020204" pitchFamily="34" charset="0"/>
+                  <a:cs typeface="Arial" panose="020B0604020202020204" pitchFamily="34" charset="0"/>
+                </a:rPr>
+                <a:t>Mentioned Datasets</a:t>
+              </a:r>
+              <a:endParaRPr lang="de-DE" sz="1291" dirty="0">
+                <a:latin typeface="Arial" panose="020B0604020202020204" pitchFamily="34" charset="0"/>
+                <a:cs typeface="Arial" panose="020B0604020202020204" pitchFamily="34" charset="0"/>
+              </a:endParaRPr>
+            </a:p>
+          </p:txBody>
+        </p:sp>
+        <p:sp>
+          <p:nvSpPr>
+            <p:cNvPr id="89" name="Rectangle: Rounded Corners 88">
+              <a:extLst>
+                <a:ext uri="{FF2B5EF4-FFF2-40B4-BE49-F238E27FC236}">
+                  <a16:creationId xmlns:a16="http://schemas.microsoft.com/office/drawing/2014/main" id="{E036A8D5-381A-49F8-A9E1-4091609F5EF9}"/>
+                </a:ext>
+              </a:extLst>
+            </p:cNvPr>
+            <p:cNvSpPr/>
+            <p:nvPr/>
+          </p:nvSpPr>
+          <p:spPr>
+            <a:xfrm>
+              <a:off x="4060675" y="2856235"/>
+              <a:ext cx="994383" cy="412615"/>
+            </a:xfrm>
+            <a:prstGeom prst="roundRect">
+              <a:avLst/>
+            </a:prstGeom>
+            <a:gradFill flip="none" rotWithShape="1">
+              <a:gsLst>
+                <a:gs pos="84000">
+                  <a:srgbClr val="FCE5D6"/>
+                </a:gs>
+                <a:gs pos="68000">
+                  <a:schemeClr val="accent2">
+                    <a:lumMod val="40000"/>
+                    <a:lumOff val="60000"/>
+                  </a:schemeClr>
+                </a:gs>
+                <a:gs pos="100000">
+                  <a:schemeClr val="bg1">
+                    <a:lumMod val="95000"/>
+                  </a:schemeClr>
+                </a:gs>
+              </a:gsLst>
+              <a:lin ang="18900000" scaled="1"/>
+              <a:tileRect/>
+            </a:gradFill>
+            <a:ln>
+              <a:noFill/>
+            </a:ln>
+            <a:effectLst>
+              <a:outerShdw blurRad="50800" dist="38100" dir="8100000" algn="tr" rotWithShape="0">
+                <a:prstClr val="black">
+                  <a:alpha val="40000"/>
+                </a:prstClr>
+              </a:outerShdw>
+            </a:effectLst>
+          </p:spPr>
+          <p:style>
+            <a:lnRef idx="2">
+              <a:schemeClr val="accent1">
+                <a:shade val="50000"/>
+              </a:schemeClr>
+            </a:lnRef>
+            <a:fillRef idx="1">
+              <a:schemeClr val="accent1"/>
+            </a:fillRef>
+            <a:effectRef idx="0">
+              <a:schemeClr val="accent1"/>
+            </a:effectRef>
+            <a:fontRef idx="minor">
+              <a:schemeClr val="lt1"/>
+            </a:fontRef>
+          </p:style>
+          <p:txBody>
+            <a:bodyPr rtlCol="0" anchor="ctr"/>
+            <a:lstStyle/>
+            <a:p>
+              <a:pPr algn="ctr"/>
+              <a:r>
+                <a:rPr lang="en-US" sz="1408" dirty="0">
+                  <a:solidFill>
+                    <a:schemeClr val="tx1"/>
+                  </a:solidFill>
+                  <a:latin typeface="Arial" panose="020B0604020202020204" pitchFamily="34" charset="0"/>
+                  <a:cs typeface="Arial" panose="020B0604020202020204" pitchFamily="34" charset="0"/>
+                </a:rPr>
+                <a:t>1,583</a:t>
+              </a:r>
+              <a:endParaRPr lang="de-DE" sz="1408" dirty="0">
+                <a:solidFill>
+                  <a:schemeClr val="tx1"/>
+                </a:solidFill>
+                <a:latin typeface="Arial" panose="020B0604020202020204" pitchFamily="34" charset="0"/>
+                <a:cs typeface="Arial" panose="020B0604020202020204" pitchFamily="34" charset="0"/>
+              </a:endParaRPr>
+            </a:p>
+          </p:txBody>
+        </p:sp>
+        <p:sp>
+          <p:nvSpPr>
+            <p:cNvPr id="91" name="Rectangle 90">
+              <a:extLst>
+                <a:ext uri="{FF2B5EF4-FFF2-40B4-BE49-F238E27FC236}">
+                  <a16:creationId xmlns:a16="http://schemas.microsoft.com/office/drawing/2014/main" id="{05DFAD21-E790-4E44-A833-74531D5D852B}"/>
+                </a:ext>
+              </a:extLst>
+            </p:cNvPr>
+            <p:cNvSpPr/>
+            <p:nvPr/>
+          </p:nvSpPr>
+          <p:spPr>
+            <a:xfrm>
+              <a:off x="5055058" y="2836118"/>
+              <a:ext cx="1954792" cy="489621"/>
+            </a:xfrm>
+            <a:prstGeom prst="rect">
+              <a:avLst/>
+            </a:prstGeom>
+          </p:spPr>
+          <p:txBody>
+            <a:bodyPr wrap="square">
+              <a:spAutoFit/>
+            </a:bodyPr>
+            <a:lstStyle/>
+            <a:p>
+              <a:r>
+                <a:rPr lang="en-US" sz="1291" dirty="0">
+                  <a:latin typeface="Arial" panose="020B0604020202020204" pitchFamily="34" charset="0"/>
+                  <a:cs typeface="Arial" panose="020B0604020202020204" pitchFamily="34" charset="0"/>
+                </a:rPr>
+                <a:t>Charité Papers with Shared Datasets</a:t>
+              </a:r>
+              <a:endParaRPr lang="de-DE" sz="1291" dirty="0">
+                <a:latin typeface="Arial" panose="020B0604020202020204" pitchFamily="34" charset="0"/>
+                <a:cs typeface="Arial" panose="020B0604020202020204" pitchFamily="34" charset="0"/>
+              </a:endParaRPr>
+            </a:p>
+          </p:txBody>
+        </p:sp>
+        <p:sp>
+          <p:nvSpPr>
+            <p:cNvPr id="31" name="Rectangle: Rounded Corners 30">
+              <a:extLst>
+                <a:ext uri="{FF2B5EF4-FFF2-40B4-BE49-F238E27FC236}">
+                  <a16:creationId xmlns:a16="http://schemas.microsoft.com/office/drawing/2014/main" id="{9F56F1E4-3546-4BA0-88CD-F399B7C26180}"/>
+                </a:ext>
+              </a:extLst>
+            </p:cNvPr>
+            <p:cNvSpPr/>
+            <p:nvPr/>
+          </p:nvSpPr>
+          <p:spPr>
+            <a:xfrm>
+              <a:off x="1726516" y="835071"/>
+              <a:ext cx="3384956" cy="412615"/>
+            </a:xfrm>
+            <a:prstGeom prst="roundRect">
+              <a:avLst/>
+            </a:prstGeom>
+            <a:gradFill flip="none" rotWithShape="1">
+              <a:gsLst>
+                <a:gs pos="69000">
+                  <a:schemeClr val="accent2">
+                    <a:lumMod val="60000"/>
+                    <a:lumOff val="40000"/>
+                  </a:schemeClr>
+                </a:gs>
+                <a:gs pos="0">
+                  <a:schemeClr val="accent2"/>
+                </a:gs>
+                <a:gs pos="100000">
+                  <a:schemeClr val="bg1">
+                    <a:lumMod val="95000"/>
+                  </a:schemeClr>
+                </a:gs>
+              </a:gsLst>
+              <a:lin ang="18900000" scaled="1"/>
+              <a:tileRect/>
+            </a:gradFill>
+            <a:ln>
+              <a:noFill/>
+            </a:ln>
+            <a:effectLst>
+              <a:outerShdw blurRad="50800" dist="38100" dir="8100000" algn="tr" rotWithShape="0">
+                <a:prstClr val="black">
+                  <a:alpha val="40000"/>
+                </a:prstClr>
+              </a:outerShdw>
+            </a:effectLst>
+          </p:spPr>
+          <p:style>
+            <a:lnRef idx="2">
+              <a:schemeClr val="accent1">
+                <a:shade val="50000"/>
+              </a:schemeClr>
+            </a:lnRef>
+            <a:fillRef idx="1">
+              <a:schemeClr val="accent1"/>
+            </a:fillRef>
+            <a:effectRef idx="0">
+              <a:schemeClr val="accent1"/>
+            </a:effectRef>
+            <a:fontRef idx="minor">
+              <a:schemeClr val="lt1"/>
+            </a:fontRef>
+          </p:style>
+          <p:txBody>
+            <a:bodyPr rtlCol="0" anchor="ctr"/>
+            <a:lstStyle/>
+            <a:p>
+              <a:pPr algn="ctr"/>
+              <a:r>
+                <a:rPr lang="en-US" sz="1408" dirty="0">
+                  <a:solidFill>
+                    <a:schemeClr val="tx1"/>
+                  </a:solidFill>
+                  <a:latin typeface="Arial" panose="020B0604020202020204" pitchFamily="34" charset="0"/>
+                  <a:cs typeface="Arial" panose="020B0604020202020204" pitchFamily="34" charset="0"/>
+                </a:rPr>
+                <a:t>15,748 Charité Papers (2020-2023)</a:t>
+              </a:r>
+              <a:endParaRPr lang="de-DE" sz="1408" dirty="0">
+                <a:solidFill>
+                  <a:schemeClr val="tx1"/>
+                </a:solidFill>
+                <a:latin typeface="Arial" panose="020B0604020202020204" pitchFamily="34" charset="0"/>
+                <a:cs typeface="Arial" panose="020B0604020202020204" pitchFamily="34" charset="0"/>
+              </a:endParaRPr>
+            </a:p>
+          </p:txBody>
+        </p:sp>
+        <p:cxnSp>
+          <p:nvCxnSpPr>
+            <p:cNvPr id="4" name="Straight Arrow Connector 3">
+              <a:extLst>
+                <a:ext uri="{FF2B5EF4-FFF2-40B4-BE49-F238E27FC236}">
+                  <a16:creationId xmlns:a16="http://schemas.microsoft.com/office/drawing/2014/main" id="{AC44CFEE-44A3-463A-B397-18E4801C7FA1}"/>
+                </a:ext>
+              </a:extLst>
+            </p:cNvPr>
+            <p:cNvCxnSpPr>
+              <a:stCxn id="37" idx="3"/>
+              <a:endCxn id="11" idx="1"/>
+            </p:cNvCxnSpPr>
+            <p:nvPr/>
+          </p:nvCxnSpPr>
+          <p:spPr>
+            <a:xfrm>
+              <a:off x="2750217" y="5295253"/>
+              <a:ext cx="1314937" cy="0"/>
+            </a:xfrm>
+            <a:prstGeom prst="straightConnector1">
+              <a:avLst/>
+            </a:prstGeom>
+            <a:ln>
+              <a:solidFill>
+                <a:schemeClr val="bg1">
+                  <a:lumMod val="65000"/>
+                </a:schemeClr>
+              </a:solidFill>
+              <a:headEnd type="triangle"/>
+              <a:tailEnd type="triangle"/>
+            </a:ln>
+          </p:spPr>
+          <p:style>
+            <a:lnRef idx="1">
+              <a:schemeClr val="accent1"/>
+            </a:lnRef>
+            <a:fillRef idx="0">
+              <a:schemeClr val="accent1"/>
+            </a:fillRef>
+            <a:effectRef idx="0">
+              <a:schemeClr val="accent1"/>
+            </a:effectRef>
+            <a:fontRef idx="minor">
+              <a:schemeClr val="tx1"/>
+            </a:fontRef>
+          </p:style>
+        </p:cxnSp>
+        <p:cxnSp>
+          <p:nvCxnSpPr>
+            <p:cNvPr id="40" name="Straight Arrow Connector 39">
+              <a:extLst>
+                <a:ext uri="{FF2B5EF4-FFF2-40B4-BE49-F238E27FC236}">
+                  <a16:creationId xmlns:a16="http://schemas.microsoft.com/office/drawing/2014/main" id="{0C5BEB27-C360-4D58-8AE3-C08092988058}"/>
+                </a:ext>
+              </a:extLst>
+            </p:cNvPr>
+            <p:cNvCxnSpPr>
+              <a:cxnSpLocks/>
+              <a:stCxn id="38" idx="3"/>
+              <a:endCxn id="13" idx="1"/>
+            </p:cNvCxnSpPr>
+            <p:nvPr/>
+          </p:nvCxnSpPr>
+          <p:spPr>
+            <a:xfrm>
+              <a:off x="2757715" y="7310305"/>
+              <a:ext cx="1307458" cy="0"/>
+            </a:xfrm>
+            <a:prstGeom prst="straightConnector1">
+              <a:avLst/>
+            </a:prstGeom>
+            <a:ln>
+              <a:solidFill>
+                <a:schemeClr val="bg1">
+                  <a:lumMod val="65000"/>
+                </a:schemeClr>
+              </a:solidFill>
+              <a:headEnd type="triangle"/>
+              <a:tailEnd type="triangle"/>
+            </a:ln>
+          </p:spPr>
+          <p:style>
+            <a:lnRef idx="1">
+              <a:schemeClr val="accent1"/>
+            </a:lnRef>
+            <a:fillRef idx="0">
+              <a:schemeClr val="accent1"/>
+            </a:fillRef>
+            <a:effectRef idx="0">
+              <a:schemeClr val="accent1"/>
+            </a:effectRef>
+            <a:fontRef idx="minor">
+              <a:schemeClr val="tx1"/>
+            </a:fontRef>
+          </p:style>
+        </p:cxnSp>
+        <p:sp>
+          <p:nvSpPr>
+            <p:cNvPr id="43" name="Rectangle 42">
+              <a:extLst>
+                <a:ext uri="{FF2B5EF4-FFF2-40B4-BE49-F238E27FC236}">
+                  <a16:creationId xmlns:a16="http://schemas.microsoft.com/office/drawing/2014/main" id="{EED85551-9A16-4CFB-B3E1-92401FDE4558}"/>
+                </a:ext>
+              </a:extLst>
+            </p:cNvPr>
+            <p:cNvSpPr/>
+            <p:nvPr/>
+          </p:nvSpPr>
+          <p:spPr>
+            <a:xfrm>
+              <a:off x="2913820" y="5063018"/>
+              <a:ext cx="1041839" cy="461088"/>
+            </a:xfrm>
+            <a:prstGeom prst="rect">
+              <a:avLst/>
+            </a:prstGeom>
+            <a:ln>
+              <a:noFill/>
+              <a:headEnd type="triangle"/>
+              <a:tailEnd type="triangle"/>
+            </a:ln>
+          </p:spPr>
+          <p:style>
+            <a:lnRef idx="1">
+              <a:schemeClr val="accent1"/>
+            </a:lnRef>
+            <a:fillRef idx="0">
+              <a:schemeClr val="accent1"/>
+            </a:fillRef>
+            <a:effectRef idx="0">
+              <a:schemeClr val="accent1"/>
+            </a:effectRef>
+            <a:fontRef idx="minor">
+              <a:schemeClr val="tx1"/>
+            </a:fontRef>
+          </p:style>
+          <p:txBody>
+            <a:bodyPr wrap="square">
+              <a:spAutoFit/>
+            </a:bodyPr>
+            <a:lstStyle/>
+            <a:p>
+              <a:pPr algn="ctr">
+                <a:lnSpc>
+                  <a:spcPts val="1500"/>
+                </a:lnSpc>
+              </a:pPr>
+              <a:r>
+                <a:rPr lang="en-US" sz="1100" dirty="0">
+                  <a:solidFill>
+                    <a:schemeClr val="bg1">
+                      <a:lumMod val="50000"/>
+                    </a:schemeClr>
+                  </a:solidFill>
+                  <a:latin typeface="Arial" panose="020B0604020202020204" pitchFamily="34" charset="0"/>
+                  <a:cs typeface="Arial" panose="020B0604020202020204" pitchFamily="34" charset="0"/>
+                </a:rPr>
+                <a:t>62</a:t>
+              </a:r>
+            </a:p>
+            <a:p>
+              <a:pPr algn="ctr">
+                <a:lnSpc>
+                  <a:spcPts val="1500"/>
+                </a:lnSpc>
+              </a:pPr>
+              <a:r>
+                <a:rPr lang="en-US" sz="1100" dirty="0">
+                  <a:solidFill>
+                    <a:schemeClr val="bg1">
+                      <a:lumMod val="50000"/>
+                    </a:schemeClr>
+                  </a:solidFill>
+                  <a:latin typeface="Arial" panose="020B0604020202020204" pitchFamily="34" charset="0"/>
+                  <a:cs typeface="Arial" panose="020B0604020202020204" pitchFamily="34" charset="0"/>
+                </a:rPr>
+                <a:t>Overlapping</a:t>
+              </a:r>
+              <a:endParaRPr lang="de-DE" sz="1100" dirty="0">
                 <a:solidFill>
                   <a:schemeClr val="bg1">
                     <a:lumMod val="50000"/>
@@ -4100,658 +4809,74 @@
                 </a:solidFill>
                 <a:latin typeface="Arial" panose="020B0604020202020204" pitchFamily="34" charset="0"/>
                 <a:cs typeface="Arial" panose="020B0604020202020204" pitchFamily="34" charset="0"/>
-              </a:rPr>
-              <a:t>Reused by 1,390 Papers</a:t>
-            </a:r>
-          </a:p>
-        </p:txBody>
-      </p:sp>
-      <p:cxnSp>
-        <p:nvCxnSpPr>
-          <p:cNvPr id="67" name="Straight Arrow Connector 66">
-            <a:extLst>
-              <a:ext uri="{FF2B5EF4-FFF2-40B4-BE49-F238E27FC236}">
-                <a16:creationId xmlns:a16="http://schemas.microsoft.com/office/drawing/2014/main" id="{546E5E13-378B-484F-A381-094CCFBA2949}"/>
-              </a:ext>
-            </a:extLst>
-          </p:cNvPr>
-          <p:cNvCxnSpPr>
-            <a:cxnSpLocks/>
-            <a:stCxn id="89" idx="2"/>
-            <a:endCxn id="9" idx="0"/>
-          </p:cNvCxnSpPr>
-          <p:nvPr/>
-        </p:nvCxnSpPr>
-        <p:spPr>
-          <a:xfrm>
-            <a:off x="4557867" y="3268850"/>
-            <a:ext cx="4478" cy="740315"/>
-          </a:xfrm>
-          <a:prstGeom prst="straightConnector1">
-            <a:avLst/>
-          </a:prstGeom>
-          <a:ln>
-            <a:solidFill>
-              <a:schemeClr val="bg1">
-                <a:lumMod val="65000"/>
-              </a:schemeClr>
-            </a:solidFill>
-            <a:tailEnd type="triangle"/>
-          </a:ln>
-        </p:spPr>
-        <p:style>
-          <a:lnRef idx="1">
-            <a:schemeClr val="accent1"/>
-          </a:lnRef>
-          <a:fillRef idx="0">
-            <a:schemeClr val="accent1"/>
-          </a:fillRef>
-          <a:effectRef idx="0">
-            <a:schemeClr val="accent1"/>
-          </a:effectRef>
-          <a:fontRef idx="minor">
-            <a:schemeClr val="tx1"/>
-          </a:fontRef>
-        </p:style>
-      </p:cxnSp>
-      <p:sp>
-        <p:nvSpPr>
-          <p:cNvPr id="80" name="Rectangle: Rounded Corners 79">
-            <a:extLst>
-              <a:ext uri="{FF2B5EF4-FFF2-40B4-BE49-F238E27FC236}">
-                <a16:creationId xmlns:a16="http://schemas.microsoft.com/office/drawing/2014/main" id="{D114DA72-2DDC-49FF-88D2-5DA57C7BF46C}"/>
-              </a:ext>
-            </a:extLst>
-          </p:cNvPr>
-          <p:cNvSpPr/>
-          <p:nvPr/>
-        </p:nvSpPr>
-        <p:spPr>
-          <a:xfrm>
-            <a:off x="2963761" y="6027801"/>
-            <a:ext cx="956613" cy="412615"/>
-          </a:xfrm>
-          <a:prstGeom prst="roundRect">
-            <a:avLst/>
-          </a:prstGeom>
-          <a:gradFill flip="none" rotWithShape="1">
-            <a:gsLst>
-              <a:gs pos="84000">
-                <a:srgbClr val="D8F6E3"/>
-              </a:gs>
-              <a:gs pos="65000">
-                <a:srgbClr val="93FF81"/>
-              </a:gs>
-              <a:gs pos="100000">
-                <a:srgbClr val="D9FFDD"/>
-              </a:gs>
-            </a:gsLst>
-            <a:lin ang="18900000" scaled="1"/>
-            <a:tileRect/>
-          </a:gradFill>
-          <a:ln>
-            <a:noFill/>
-          </a:ln>
-          <a:effectLst>
-            <a:outerShdw blurRad="50800" dist="38100" dir="8100000" algn="tr" rotWithShape="0">
-              <a:prstClr val="black">
-                <a:alpha val="40000"/>
-              </a:prstClr>
-            </a:outerShdw>
-          </a:effectLst>
-        </p:spPr>
-        <p:style>
-          <a:lnRef idx="2">
-            <a:schemeClr val="accent1">
-              <a:shade val="50000"/>
-            </a:schemeClr>
-          </a:lnRef>
-          <a:fillRef idx="1">
-            <a:schemeClr val="accent1"/>
-          </a:fillRef>
-          <a:effectRef idx="0">
-            <a:schemeClr val="accent1"/>
-          </a:effectRef>
-          <a:fontRef idx="minor">
-            <a:schemeClr val="lt1"/>
-          </a:fontRef>
-        </p:style>
-        <p:txBody>
-          <a:bodyPr rtlCol="0" anchor="ctr"/>
-          <a:lstStyle/>
-          <a:p>
-            <a:pPr algn="ctr"/>
-            <a:r>
-              <a:rPr lang="en-US" sz="1408" dirty="0">
-                <a:solidFill>
-                  <a:schemeClr val="tx1"/>
-                </a:solidFill>
-                <a:latin typeface="Arial" panose="020B0604020202020204" pitchFamily="34" charset="0"/>
-                <a:cs typeface="Arial" panose="020B0604020202020204" pitchFamily="34" charset="0"/>
-              </a:rPr>
-              <a:t>175</a:t>
-            </a:r>
-            <a:endParaRPr lang="de-DE" sz="1408" dirty="0">
-              <a:solidFill>
-                <a:schemeClr val="tx1"/>
-              </a:solidFill>
-              <a:latin typeface="Arial" panose="020B0604020202020204" pitchFamily="34" charset="0"/>
-              <a:cs typeface="Arial" panose="020B0604020202020204" pitchFamily="34" charset="0"/>
-            </a:endParaRPr>
-          </a:p>
-        </p:txBody>
-      </p:sp>
-      <p:cxnSp>
-        <p:nvCxnSpPr>
-          <p:cNvPr id="81" name="Straight Arrow Connector 80">
-            <a:extLst>
-              <a:ext uri="{FF2B5EF4-FFF2-40B4-BE49-F238E27FC236}">
-                <a16:creationId xmlns:a16="http://schemas.microsoft.com/office/drawing/2014/main" id="{DEBAAEA7-28FC-4C4C-85C6-F295E82C619C}"/>
-              </a:ext>
-            </a:extLst>
-          </p:cNvPr>
-          <p:cNvCxnSpPr>
-            <a:cxnSpLocks/>
-            <a:endCxn id="80" idx="0"/>
-          </p:cNvCxnSpPr>
-          <p:nvPr/>
-        </p:nvCxnSpPr>
-        <p:spPr>
-          <a:xfrm>
-            <a:off x="2424329" y="5515238"/>
-            <a:ext cx="1017738" cy="512563"/>
-          </a:xfrm>
-          <a:prstGeom prst="straightConnector1">
-            <a:avLst/>
-          </a:prstGeom>
-          <a:ln>
-            <a:solidFill>
-              <a:schemeClr val="bg1">
-                <a:lumMod val="65000"/>
-              </a:schemeClr>
-            </a:solidFill>
-            <a:tailEnd type="triangle"/>
-          </a:ln>
-        </p:spPr>
-        <p:style>
-          <a:lnRef idx="1">
-            <a:schemeClr val="accent1"/>
-          </a:lnRef>
-          <a:fillRef idx="0">
-            <a:schemeClr val="accent1"/>
-          </a:fillRef>
-          <a:effectRef idx="0">
-            <a:schemeClr val="accent1"/>
-          </a:effectRef>
-          <a:fontRef idx="minor">
-            <a:schemeClr val="tx1"/>
-          </a:fontRef>
-        </p:style>
-      </p:cxnSp>
-      <p:cxnSp>
-        <p:nvCxnSpPr>
-          <p:cNvPr id="82" name="Straight Arrow Connector 81">
-            <a:extLst>
-              <a:ext uri="{FF2B5EF4-FFF2-40B4-BE49-F238E27FC236}">
-                <a16:creationId xmlns:a16="http://schemas.microsoft.com/office/drawing/2014/main" id="{BFAE4691-A331-4DBF-B116-0C1888F2171E}"/>
-              </a:ext>
-            </a:extLst>
-          </p:cNvPr>
-          <p:cNvCxnSpPr>
-            <a:cxnSpLocks/>
-            <a:endCxn id="80" idx="0"/>
-          </p:cNvCxnSpPr>
-          <p:nvPr/>
-        </p:nvCxnSpPr>
-        <p:spPr>
-          <a:xfrm flipH="1">
-            <a:off x="3442068" y="5515238"/>
-            <a:ext cx="975517" cy="512563"/>
-          </a:xfrm>
-          <a:prstGeom prst="straightConnector1">
-            <a:avLst/>
-          </a:prstGeom>
-          <a:ln>
-            <a:solidFill>
-              <a:schemeClr val="bg1">
-                <a:lumMod val="65000"/>
-              </a:schemeClr>
-            </a:solidFill>
-            <a:tailEnd type="triangle"/>
-          </a:ln>
-        </p:spPr>
-        <p:style>
-          <a:lnRef idx="1">
-            <a:schemeClr val="accent1"/>
-          </a:lnRef>
-          <a:fillRef idx="0">
-            <a:schemeClr val="accent1"/>
-          </a:fillRef>
-          <a:effectRef idx="0">
-            <a:schemeClr val="accent1"/>
-          </a:effectRef>
-          <a:fontRef idx="minor">
-            <a:schemeClr val="tx1"/>
-          </a:fontRef>
-        </p:style>
-      </p:cxnSp>
-      <p:sp>
-        <p:nvSpPr>
-          <p:cNvPr id="83" name="Rectangle 82">
-            <a:extLst>
-              <a:ext uri="{FF2B5EF4-FFF2-40B4-BE49-F238E27FC236}">
-                <a16:creationId xmlns:a16="http://schemas.microsoft.com/office/drawing/2014/main" id="{B2BD9BD0-063F-41F0-AF7A-83DA5949A806}"/>
-              </a:ext>
-            </a:extLst>
-          </p:cNvPr>
-          <p:cNvSpPr/>
-          <p:nvPr/>
-        </p:nvSpPr>
-        <p:spPr>
-          <a:xfrm>
-            <a:off x="2436223" y="6474051"/>
-            <a:ext cx="1965542" cy="290977"/>
-          </a:xfrm>
-          <a:prstGeom prst="rect">
-            <a:avLst/>
-          </a:prstGeom>
-        </p:spPr>
-        <p:txBody>
-          <a:bodyPr wrap="square">
-            <a:spAutoFit/>
-          </a:bodyPr>
-          <a:lstStyle/>
-          <a:p>
-            <a:pPr algn="ctr"/>
-            <a:r>
-              <a:rPr lang="en-US" sz="1291" dirty="0">
-                <a:latin typeface="Arial" panose="020B0604020202020204" pitchFamily="34" charset="0"/>
-                <a:cs typeface="Arial" panose="020B0604020202020204" pitchFamily="34" charset="0"/>
-              </a:rPr>
-              <a:t>Mentioned Datasets</a:t>
-            </a:r>
-            <a:endParaRPr lang="de-DE" sz="1291" dirty="0">
-              <a:latin typeface="Arial" panose="020B0604020202020204" pitchFamily="34" charset="0"/>
-              <a:cs typeface="Arial" panose="020B0604020202020204" pitchFamily="34" charset="0"/>
-            </a:endParaRPr>
-          </a:p>
-        </p:txBody>
-      </p:sp>
-      <p:sp>
-        <p:nvSpPr>
-          <p:cNvPr id="89" name="Rectangle: Rounded Corners 88">
-            <a:extLst>
-              <a:ext uri="{FF2B5EF4-FFF2-40B4-BE49-F238E27FC236}">
-                <a16:creationId xmlns:a16="http://schemas.microsoft.com/office/drawing/2014/main" id="{E036A8D5-381A-49F8-A9E1-4091609F5EF9}"/>
-              </a:ext>
-            </a:extLst>
-          </p:cNvPr>
-          <p:cNvSpPr/>
-          <p:nvPr/>
-        </p:nvSpPr>
-        <p:spPr>
-          <a:xfrm>
-            <a:off x="4060675" y="2856235"/>
-            <a:ext cx="994383" cy="412615"/>
-          </a:xfrm>
-          <a:prstGeom prst="roundRect">
-            <a:avLst/>
-          </a:prstGeom>
-          <a:gradFill flip="none" rotWithShape="1">
-            <a:gsLst>
-              <a:gs pos="84000">
-                <a:srgbClr val="FCE5D6"/>
-              </a:gs>
-              <a:gs pos="68000">
-                <a:schemeClr val="accent2">
-                  <a:lumMod val="40000"/>
-                  <a:lumOff val="60000"/>
-                </a:schemeClr>
-              </a:gs>
-              <a:gs pos="100000">
-                <a:schemeClr val="bg1">
-                  <a:lumMod val="95000"/>
-                </a:schemeClr>
-              </a:gs>
-            </a:gsLst>
-            <a:lin ang="18900000" scaled="1"/>
-            <a:tileRect/>
-          </a:gradFill>
-          <a:ln>
-            <a:noFill/>
-          </a:ln>
-          <a:effectLst>
-            <a:outerShdw blurRad="50800" dist="38100" dir="8100000" algn="tr" rotWithShape="0">
-              <a:prstClr val="black">
-                <a:alpha val="40000"/>
-              </a:prstClr>
-            </a:outerShdw>
-          </a:effectLst>
-        </p:spPr>
-        <p:style>
-          <a:lnRef idx="2">
-            <a:schemeClr val="accent1">
-              <a:shade val="50000"/>
-            </a:schemeClr>
-          </a:lnRef>
-          <a:fillRef idx="1">
-            <a:schemeClr val="accent1"/>
-          </a:fillRef>
-          <a:effectRef idx="0">
-            <a:schemeClr val="accent1"/>
-          </a:effectRef>
-          <a:fontRef idx="minor">
-            <a:schemeClr val="lt1"/>
-          </a:fontRef>
-        </p:style>
-        <p:txBody>
-          <a:bodyPr rtlCol="0" anchor="ctr"/>
-          <a:lstStyle/>
-          <a:p>
-            <a:pPr algn="ctr"/>
-            <a:r>
-              <a:rPr lang="en-US" sz="1408" dirty="0">
-                <a:solidFill>
-                  <a:schemeClr val="tx1"/>
-                </a:solidFill>
-                <a:latin typeface="Arial" panose="020B0604020202020204" pitchFamily="34" charset="0"/>
-                <a:cs typeface="Arial" panose="020B0604020202020204" pitchFamily="34" charset="0"/>
-              </a:rPr>
-              <a:t>1,583</a:t>
-            </a:r>
-            <a:endParaRPr lang="de-DE" sz="1408" dirty="0">
-              <a:solidFill>
-                <a:schemeClr val="tx1"/>
-              </a:solidFill>
-              <a:latin typeface="Arial" panose="020B0604020202020204" pitchFamily="34" charset="0"/>
-              <a:cs typeface="Arial" panose="020B0604020202020204" pitchFamily="34" charset="0"/>
-            </a:endParaRPr>
-          </a:p>
-        </p:txBody>
-      </p:sp>
-      <p:sp>
-        <p:nvSpPr>
-          <p:cNvPr id="91" name="Rectangle 90">
-            <a:extLst>
-              <a:ext uri="{FF2B5EF4-FFF2-40B4-BE49-F238E27FC236}">
-                <a16:creationId xmlns:a16="http://schemas.microsoft.com/office/drawing/2014/main" id="{05DFAD21-E790-4E44-A833-74531D5D852B}"/>
-              </a:ext>
-            </a:extLst>
-          </p:cNvPr>
-          <p:cNvSpPr/>
-          <p:nvPr/>
-        </p:nvSpPr>
-        <p:spPr>
-          <a:xfrm>
-            <a:off x="5055058" y="2836118"/>
-            <a:ext cx="1954792" cy="489621"/>
-          </a:xfrm>
-          <a:prstGeom prst="rect">
-            <a:avLst/>
-          </a:prstGeom>
-        </p:spPr>
-        <p:txBody>
-          <a:bodyPr wrap="square">
-            <a:spAutoFit/>
-          </a:bodyPr>
-          <a:lstStyle/>
-          <a:p>
-            <a:r>
-              <a:rPr lang="en-US" sz="1291" dirty="0">
-                <a:latin typeface="Arial" panose="020B0604020202020204" pitchFamily="34" charset="0"/>
-                <a:cs typeface="Arial" panose="020B0604020202020204" pitchFamily="34" charset="0"/>
-              </a:rPr>
-              <a:t>Charité Papers with Shared Datasets</a:t>
-            </a:r>
-            <a:endParaRPr lang="de-DE" sz="1291" dirty="0">
-              <a:latin typeface="Arial" panose="020B0604020202020204" pitchFamily="34" charset="0"/>
-              <a:cs typeface="Arial" panose="020B0604020202020204" pitchFamily="34" charset="0"/>
-            </a:endParaRPr>
-          </a:p>
-        </p:txBody>
-      </p:sp>
-      <p:sp>
-        <p:nvSpPr>
-          <p:cNvPr id="31" name="Rectangle: Rounded Corners 30">
-            <a:extLst>
-              <a:ext uri="{FF2B5EF4-FFF2-40B4-BE49-F238E27FC236}">
-                <a16:creationId xmlns:a16="http://schemas.microsoft.com/office/drawing/2014/main" id="{9F56F1E4-3546-4BA0-88CD-F399B7C26180}"/>
-              </a:ext>
-            </a:extLst>
-          </p:cNvPr>
-          <p:cNvSpPr/>
-          <p:nvPr/>
-        </p:nvSpPr>
-        <p:spPr>
-          <a:xfrm>
-            <a:off x="1726516" y="835071"/>
-            <a:ext cx="3384956" cy="412615"/>
-          </a:xfrm>
-          <a:prstGeom prst="roundRect">
-            <a:avLst/>
-          </a:prstGeom>
-          <a:gradFill flip="none" rotWithShape="1">
-            <a:gsLst>
-              <a:gs pos="69000">
-                <a:schemeClr val="accent2">
-                  <a:lumMod val="60000"/>
-                  <a:lumOff val="40000"/>
-                </a:schemeClr>
-              </a:gs>
-              <a:gs pos="0">
-                <a:schemeClr val="accent2"/>
-              </a:gs>
-              <a:gs pos="100000">
-                <a:schemeClr val="bg1">
-                  <a:lumMod val="95000"/>
-                </a:schemeClr>
-              </a:gs>
-            </a:gsLst>
-            <a:lin ang="18900000" scaled="1"/>
-            <a:tileRect/>
-          </a:gradFill>
-          <a:ln>
-            <a:noFill/>
-          </a:ln>
-          <a:effectLst>
-            <a:outerShdw blurRad="50800" dist="38100" dir="8100000" algn="tr" rotWithShape="0">
-              <a:prstClr val="black">
-                <a:alpha val="40000"/>
-              </a:prstClr>
-            </a:outerShdw>
-          </a:effectLst>
-        </p:spPr>
-        <p:style>
-          <a:lnRef idx="2">
-            <a:schemeClr val="accent1">
-              <a:shade val="50000"/>
-            </a:schemeClr>
-          </a:lnRef>
-          <a:fillRef idx="1">
-            <a:schemeClr val="accent1"/>
-          </a:fillRef>
-          <a:effectRef idx="0">
-            <a:schemeClr val="accent1"/>
-          </a:effectRef>
-          <a:fontRef idx="minor">
-            <a:schemeClr val="lt1"/>
-          </a:fontRef>
-        </p:style>
-        <p:txBody>
-          <a:bodyPr rtlCol="0" anchor="ctr"/>
-          <a:lstStyle/>
-          <a:p>
-            <a:pPr algn="ctr"/>
-            <a:r>
-              <a:rPr lang="en-US" sz="1408" dirty="0">
-                <a:solidFill>
-                  <a:schemeClr val="tx1"/>
-                </a:solidFill>
-                <a:latin typeface="Arial" panose="020B0604020202020204" pitchFamily="34" charset="0"/>
-                <a:cs typeface="Arial" panose="020B0604020202020204" pitchFamily="34" charset="0"/>
-              </a:rPr>
-              <a:t>15,748 Charité Papers (2020-2023)</a:t>
-            </a:r>
-            <a:endParaRPr lang="de-DE" sz="1408" dirty="0">
-              <a:solidFill>
-                <a:schemeClr val="tx1"/>
-              </a:solidFill>
-              <a:latin typeface="Arial" panose="020B0604020202020204" pitchFamily="34" charset="0"/>
-              <a:cs typeface="Arial" panose="020B0604020202020204" pitchFamily="34" charset="0"/>
-            </a:endParaRPr>
-          </a:p>
-        </p:txBody>
-      </p:sp>
-      <p:cxnSp>
-        <p:nvCxnSpPr>
-          <p:cNvPr id="4" name="Straight Arrow Connector 3">
-            <a:extLst>
-              <a:ext uri="{FF2B5EF4-FFF2-40B4-BE49-F238E27FC236}">
-                <a16:creationId xmlns:a16="http://schemas.microsoft.com/office/drawing/2014/main" id="{AC44CFEE-44A3-463A-B397-18E4801C7FA1}"/>
-              </a:ext>
-            </a:extLst>
-          </p:cNvPr>
-          <p:cNvCxnSpPr>
-            <a:stCxn id="37" idx="3"/>
-            <a:endCxn id="11" idx="1"/>
-          </p:cNvCxnSpPr>
-          <p:nvPr/>
-        </p:nvCxnSpPr>
-        <p:spPr>
-          <a:xfrm>
-            <a:off x="2750217" y="5295253"/>
-            <a:ext cx="1314937" cy="0"/>
-          </a:xfrm>
-          <a:prstGeom prst="straightConnector1">
-            <a:avLst/>
-          </a:prstGeom>
-          <a:ln>
-            <a:solidFill>
-              <a:schemeClr val="bg1">
-                <a:lumMod val="65000"/>
-              </a:schemeClr>
-            </a:solidFill>
-            <a:headEnd type="triangle"/>
-            <a:tailEnd type="triangle"/>
-          </a:ln>
-        </p:spPr>
-        <p:style>
-          <a:lnRef idx="1">
-            <a:schemeClr val="accent1"/>
-          </a:lnRef>
-          <a:fillRef idx="0">
-            <a:schemeClr val="accent1"/>
-          </a:fillRef>
-          <a:effectRef idx="0">
-            <a:schemeClr val="accent1"/>
-          </a:effectRef>
-          <a:fontRef idx="minor">
-            <a:schemeClr val="tx1"/>
-          </a:fontRef>
-        </p:style>
-      </p:cxnSp>
-      <p:cxnSp>
-        <p:nvCxnSpPr>
-          <p:cNvPr id="40" name="Straight Arrow Connector 39">
-            <a:extLst>
-              <a:ext uri="{FF2B5EF4-FFF2-40B4-BE49-F238E27FC236}">
-                <a16:creationId xmlns:a16="http://schemas.microsoft.com/office/drawing/2014/main" id="{0C5BEB27-C360-4D58-8AE3-C08092988058}"/>
-              </a:ext>
-            </a:extLst>
-          </p:cNvPr>
-          <p:cNvCxnSpPr>
-            <a:cxnSpLocks/>
-            <a:stCxn id="38" idx="3"/>
-            <a:endCxn id="13" idx="1"/>
-          </p:cNvCxnSpPr>
-          <p:nvPr/>
-        </p:nvCxnSpPr>
-        <p:spPr>
-          <a:xfrm>
-            <a:off x="2757715" y="7310305"/>
-            <a:ext cx="1307458" cy="0"/>
-          </a:xfrm>
-          <a:prstGeom prst="straightConnector1">
-            <a:avLst/>
-          </a:prstGeom>
-          <a:ln>
-            <a:solidFill>
-              <a:schemeClr val="bg1">
-                <a:lumMod val="65000"/>
-              </a:schemeClr>
-            </a:solidFill>
-            <a:headEnd type="triangle"/>
-            <a:tailEnd type="triangle"/>
-          </a:ln>
-        </p:spPr>
-        <p:style>
-          <a:lnRef idx="1">
-            <a:schemeClr val="accent1"/>
-          </a:lnRef>
-          <a:fillRef idx="0">
-            <a:schemeClr val="accent1"/>
-          </a:fillRef>
-          <a:effectRef idx="0">
-            <a:schemeClr val="accent1"/>
-          </a:effectRef>
-          <a:fontRef idx="minor">
-            <a:schemeClr val="tx1"/>
-          </a:fontRef>
-        </p:style>
-      </p:cxnSp>
-      <p:sp>
-        <p:nvSpPr>
-          <p:cNvPr id="43" name="Rectangle 42">
-            <a:extLst>
-              <a:ext uri="{FF2B5EF4-FFF2-40B4-BE49-F238E27FC236}">
-                <a16:creationId xmlns:a16="http://schemas.microsoft.com/office/drawing/2014/main" id="{EED85551-9A16-4CFB-B3E1-92401FDE4558}"/>
-              </a:ext>
-            </a:extLst>
-          </p:cNvPr>
-          <p:cNvSpPr/>
-          <p:nvPr/>
-        </p:nvSpPr>
-        <p:spPr>
-          <a:xfrm>
-            <a:off x="2913819" y="5063018"/>
-            <a:ext cx="1041839" cy="461088"/>
-          </a:xfrm>
-          <a:prstGeom prst="rect">
-            <a:avLst/>
-          </a:prstGeom>
-          <a:ln>
-            <a:noFill/>
-            <a:headEnd type="triangle"/>
-            <a:tailEnd type="triangle"/>
-          </a:ln>
-        </p:spPr>
-        <p:style>
-          <a:lnRef idx="1">
-            <a:schemeClr val="accent1"/>
-          </a:lnRef>
-          <a:fillRef idx="0">
-            <a:schemeClr val="accent1"/>
-          </a:fillRef>
-          <a:effectRef idx="0">
-            <a:schemeClr val="accent1"/>
-          </a:effectRef>
-          <a:fontRef idx="minor">
-            <a:schemeClr val="tx1"/>
-          </a:fontRef>
-        </p:style>
-        <p:txBody>
-          <a:bodyPr wrap="square">
-            <a:spAutoFit/>
-          </a:bodyPr>
-          <a:lstStyle/>
-          <a:p>
-            <a:pPr algn="ctr">
-              <a:lnSpc>
-                <a:spcPts val="1500"/>
-              </a:lnSpc>
-            </a:pPr>
-            <a:r>
-              <a:rPr lang="en-US" sz="1100" dirty="0">
+              </a:endParaRPr>
+            </a:p>
+          </p:txBody>
+        </p:sp>
+        <p:sp>
+          <p:nvSpPr>
+            <p:cNvPr id="44" name="Rectangle 43">
+              <a:extLst>
+                <a:ext uri="{FF2B5EF4-FFF2-40B4-BE49-F238E27FC236}">
+                  <a16:creationId xmlns:a16="http://schemas.microsoft.com/office/drawing/2014/main" id="{53CC2D1C-CC06-4BB5-A6EA-12AC3E06A1F1}"/>
+                </a:ext>
+              </a:extLst>
+            </p:cNvPr>
+            <p:cNvSpPr/>
+            <p:nvPr/>
+          </p:nvSpPr>
+          <p:spPr>
+            <a:xfrm>
+              <a:off x="2906456" y="7084130"/>
+              <a:ext cx="1033011" cy="461088"/>
+            </a:xfrm>
+            <a:prstGeom prst="rect">
+              <a:avLst/>
+            </a:prstGeom>
+          </p:spPr>
+          <p:txBody>
+            <a:bodyPr wrap="square">
+              <a:spAutoFit/>
+            </a:bodyPr>
+            <a:lstStyle/>
+            <a:p>
+              <a:pPr algn="ctr">
+                <a:lnSpc>
+                  <a:spcPts val="1500"/>
+                </a:lnSpc>
+              </a:pPr>
+              <a:r>
+                <a:rPr lang="en-US" sz="1100" dirty="0">
+                  <a:solidFill>
+                    <a:schemeClr val="bg1">
+                      <a:lumMod val="50000"/>
+                    </a:schemeClr>
+                  </a:solidFill>
+                  <a:latin typeface="Arial" panose="020B0604020202020204" pitchFamily="34" charset="0"/>
+                  <a:cs typeface="Arial" panose="020B0604020202020204" pitchFamily="34" charset="0"/>
+                </a:rPr>
+                <a:t>325</a:t>
+              </a:r>
+            </a:p>
+            <a:p>
+              <a:pPr algn="ctr">
+                <a:lnSpc>
+                  <a:spcPts val="1500"/>
+                </a:lnSpc>
+              </a:pPr>
+              <a:r>
+                <a:rPr lang="en-US" sz="1100" dirty="0">
+                  <a:solidFill>
+                    <a:schemeClr val="bg1">
+                      <a:lumMod val="50000"/>
+                    </a:schemeClr>
+                  </a:solidFill>
+                  <a:latin typeface="Arial" panose="020B0604020202020204" pitchFamily="34" charset="0"/>
+                  <a:cs typeface="Arial" panose="020B0604020202020204" pitchFamily="34" charset="0"/>
+                </a:rPr>
+                <a:t>Overlapping</a:t>
+              </a:r>
+              <a:endParaRPr lang="de-DE" sz="1100" dirty="0">
                 <a:solidFill>
                   <a:schemeClr val="bg1">
                     <a:lumMod val="50000"/>
@@ -4759,426 +4884,322 @@
                 </a:solidFill>
                 <a:latin typeface="Arial" panose="020B0604020202020204" pitchFamily="34" charset="0"/>
                 <a:cs typeface="Arial" panose="020B0604020202020204" pitchFamily="34" charset="0"/>
-              </a:rPr>
-              <a:t>62</a:t>
-            </a:r>
-          </a:p>
-          <a:p>
-            <a:pPr algn="ctr">
-              <a:lnSpc>
-                <a:spcPts val="1500"/>
-              </a:lnSpc>
-            </a:pPr>
-            <a:r>
-              <a:rPr lang="en-US" sz="1100" dirty="0">
-                <a:solidFill>
-                  <a:schemeClr val="bg1">
-                    <a:lumMod val="50000"/>
-                  </a:schemeClr>
-                </a:solidFill>
-                <a:latin typeface="Arial" panose="020B0604020202020204" pitchFamily="34" charset="0"/>
-                <a:cs typeface="Arial" panose="020B0604020202020204" pitchFamily="34" charset="0"/>
-              </a:rPr>
-              <a:t>Overlapping</a:t>
-            </a:r>
-            <a:endParaRPr lang="de-DE" sz="1100" dirty="0">
+              </a:endParaRPr>
+            </a:p>
+          </p:txBody>
+        </p:sp>
+        <p:cxnSp>
+          <p:nvCxnSpPr>
+            <p:cNvPr id="32" name="Straight Arrow Connector 31">
+              <a:extLst>
+                <a:ext uri="{FF2B5EF4-FFF2-40B4-BE49-F238E27FC236}">
+                  <a16:creationId xmlns:a16="http://schemas.microsoft.com/office/drawing/2014/main" id="{210F5922-3CDA-4585-8326-9CB45756D445}"/>
+                </a:ext>
+              </a:extLst>
+            </p:cNvPr>
+            <p:cNvCxnSpPr>
+              <a:cxnSpLocks/>
+              <a:stCxn id="2" idx="2"/>
+              <a:endCxn id="89" idx="0"/>
+            </p:cNvCxnSpPr>
+            <p:nvPr/>
+          </p:nvCxnSpPr>
+          <p:spPr>
+            <a:xfrm flipH="1">
+              <a:off x="4557867" y="2531261"/>
+              <a:ext cx="3" cy="324974"/>
+            </a:xfrm>
+            <a:prstGeom prst="straightConnector1">
+              <a:avLst/>
+            </a:prstGeom>
+            <a:ln>
               <a:solidFill>
                 <a:schemeClr val="bg1">
-                  <a:lumMod val="50000"/>
+                  <a:lumMod val="65000"/>
                 </a:schemeClr>
               </a:solidFill>
-              <a:latin typeface="Arial" panose="020B0604020202020204" pitchFamily="34" charset="0"/>
-              <a:cs typeface="Arial" panose="020B0604020202020204" pitchFamily="34" charset="0"/>
-            </a:endParaRPr>
-          </a:p>
-        </p:txBody>
-      </p:sp>
-      <p:sp>
-        <p:nvSpPr>
-          <p:cNvPr id="44" name="Rectangle 43">
-            <a:extLst>
-              <a:ext uri="{FF2B5EF4-FFF2-40B4-BE49-F238E27FC236}">
-                <a16:creationId xmlns:a16="http://schemas.microsoft.com/office/drawing/2014/main" id="{53CC2D1C-CC06-4BB5-A6EA-12AC3E06A1F1}"/>
-              </a:ext>
-            </a:extLst>
-          </p:cNvPr>
-          <p:cNvSpPr/>
-          <p:nvPr/>
-        </p:nvSpPr>
-        <p:spPr>
-          <a:xfrm>
-            <a:off x="2906455" y="7084130"/>
-            <a:ext cx="1033011" cy="461088"/>
-          </a:xfrm>
-          <a:prstGeom prst="rect">
-            <a:avLst/>
-          </a:prstGeom>
-        </p:spPr>
-        <p:txBody>
-          <a:bodyPr wrap="square">
-            <a:spAutoFit/>
-          </a:bodyPr>
-          <a:lstStyle/>
-          <a:p>
-            <a:pPr algn="ctr">
-              <a:lnSpc>
-                <a:spcPts val="1500"/>
-              </a:lnSpc>
-            </a:pPr>
-            <a:r>
-              <a:rPr lang="en-US" sz="1100" dirty="0">
-                <a:solidFill>
-                  <a:schemeClr val="bg1">
-                    <a:lumMod val="50000"/>
-                  </a:schemeClr>
-                </a:solidFill>
-                <a:latin typeface="Arial" panose="020B0604020202020204" pitchFamily="34" charset="0"/>
-                <a:cs typeface="Arial" panose="020B0604020202020204" pitchFamily="34" charset="0"/>
-              </a:rPr>
-              <a:t>325</a:t>
-            </a:r>
-          </a:p>
-          <a:p>
-            <a:pPr algn="ctr">
-              <a:lnSpc>
-                <a:spcPts val="1500"/>
-              </a:lnSpc>
-            </a:pPr>
-            <a:r>
-              <a:rPr lang="en-US" sz="1100" dirty="0">
-                <a:solidFill>
-                  <a:schemeClr val="bg1">
-                    <a:lumMod val="50000"/>
-                  </a:schemeClr>
-                </a:solidFill>
-                <a:latin typeface="Arial" panose="020B0604020202020204" pitchFamily="34" charset="0"/>
-                <a:cs typeface="Arial" panose="020B0604020202020204" pitchFamily="34" charset="0"/>
-              </a:rPr>
-              <a:t>Overlapping</a:t>
-            </a:r>
-            <a:endParaRPr lang="de-DE" sz="1100" dirty="0">
-              <a:solidFill>
-                <a:schemeClr val="bg1">
-                  <a:lumMod val="50000"/>
-                </a:schemeClr>
-              </a:solidFill>
-              <a:latin typeface="Arial" panose="020B0604020202020204" pitchFamily="34" charset="0"/>
-              <a:cs typeface="Arial" panose="020B0604020202020204" pitchFamily="34" charset="0"/>
-            </a:endParaRPr>
-          </a:p>
-        </p:txBody>
-      </p:sp>
-      <p:cxnSp>
-        <p:nvCxnSpPr>
-          <p:cNvPr id="32" name="Straight Arrow Connector 31">
-            <a:extLst>
-              <a:ext uri="{FF2B5EF4-FFF2-40B4-BE49-F238E27FC236}">
-                <a16:creationId xmlns:a16="http://schemas.microsoft.com/office/drawing/2014/main" id="{210F5922-3CDA-4585-8326-9CB45756D445}"/>
-              </a:ext>
-            </a:extLst>
-          </p:cNvPr>
-          <p:cNvCxnSpPr>
-            <a:cxnSpLocks/>
-            <a:stCxn id="2" idx="2"/>
-            <a:endCxn id="89" idx="0"/>
-          </p:cNvCxnSpPr>
-          <p:nvPr/>
-        </p:nvCxnSpPr>
-        <p:spPr>
-          <a:xfrm>
-            <a:off x="4557867" y="2531004"/>
-            <a:ext cx="0" cy="325231"/>
-          </a:xfrm>
-          <a:prstGeom prst="straightConnector1">
-            <a:avLst/>
-          </a:prstGeom>
-          <a:ln>
-            <a:solidFill>
-              <a:schemeClr val="bg1">
-                <a:lumMod val="65000"/>
-              </a:schemeClr>
-            </a:solidFill>
-            <a:tailEnd type="triangle"/>
-          </a:ln>
-        </p:spPr>
-        <p:style>
-          <a:lnRef idx="1">
-            <a:schemeClr val="accent1"/>
-          </a:lnRef>
-          <a:fillRef idx="0">
-            <a:schemeClr val="accent1"/>
-          </a:fillRef>
-          <a:effectRef idx="0">
-            <a:schemeClr val="accent1"/>
-          </a:effectRef>
-          <a:fontRef idx="minor">
-            <a:schemeClr val="tx1"/>
-          </a:fontRef>
-        </p:style>
-      </p:cxnSp>
-      <p:sp>
-        <p:nvSpPr>
-          <p:cNvPr id="2" name="Rectangle 1">
-            <a:extLst>
-              <a:ext uri="{FF2B5EF4-FFF2-40B4-BE49-F238E27FC236}">
-                <a16:creationId xmlns:a16="http://schemas.microsoft.com/office/drawing/2014/main" id="{86A5693A-EED4-4551-9CD6-0153B32A6EF7}"/>
-              </a:ext>
-            </a:extLst>
-          </p:cNvPr>
-          <p:cNvSpPr/>
-          <p:nvPr/>
-        </p:nvSpPr>
-        <p:spPr>
-          <a:xfrm>
-            <a:off x="3709045" y="2007784"/>
-            <a:ext cx="1697644" cy="523220"/>
-          </a:xfrm>
-          <a:prstGeom prst="rect">
-            <a:avLst/>
-          </a:prstGeom>
-        </p:spPr>
-        <p:txBody>
-          <a:bodyPr wrap="none">
-            <a:spAutoFit/>
-          </a:bodyPr>
-          <a:lstStyle/>
-          <a:p>
-            <a:pPr algn="ctr"/>
-            <a:r>
-              <a:rPr lang="de-DE" sz="1400" dirty="0">
+              <a:tailEnd type="triangle"/>
+            </a:ln>
+          </p:spPr>
+          <p:style>
+            <a:lnRef idx="1">
+              <a:schemeClr val="accent1"/>
+            </a:lnRef>
+            <a:fillRef idx="0">
+              <a:schemeClr val="accent1"/>
+            </a:fillRef>
+            <a:effectRef idx="0">
+              <a:schemeClr val="accent1"/>
+            </a:effectRef>
+            <a:fontRef idx="minor">
+              <a:schemeClr val="tx1"/>
+            </a:fontRef>
+          </p:style>
+        </p:cxnSp>
+        <p:sp>
+          <p:nvSpPr>
+            <p:cNvPr id="2" name="Rectangle 1">
+              <a:extLst>
+                <a:ext uri="{FF2B5EF4-FFF2-40B4-BE49-F238E27FC236}">
+                  <a16:creationId xmlns:a16="http://schemas.microsoft.com/office/drawing/2014/main" id="{86A5693A-EED4-4551-9CD6-0153B32A6EF7}"/>
+                </a:ext>
+              </a:extLst>
+            </p:cNvPr>
+            <p:cNvSpPr/>
+            <p:nvPr/>
+          </p:nvSpPr>
+          <p:spPr>
+            <a:xfrm>
+              <a:off x="3709079" y="2007784"/>
+              <a:ext cx="1697581" cy="523477"/>
+            </a:xfrm>
+            <a:prstGeom prst="rect">
+              <a:avLst/>
+            </a:prstGeom>
+          </p:spPr>
+          <p:txBody>
+            <a:bodyPr wrap="none">
+              <a:spAutoFit/>
+            </a:bodyPr>
+            <a:lstStyle/>
+            <a:p>
+              <a:pPr algn="ctr"/>
+              <a:r>
+                <a:rPr lang="de-DE" sz="1401" dirty="0">
+                  <a:solidFill>
+                    <a:schemeClr val="accent5">
+                      <a:lumMod val="50000"/>
+                    </a:schemeClr>
+                  </a:solidFill>
+                  <a:latin typeface="Arial" panose="020B0604020202020204" pitchFamily="34" charset="0"/>
+                  <a:cs typeface="Arial" panose="020B0604020202020204" pitchFamily="34" charset="0"/>
+                </a:rPr>
+                <a:t>ODDPub</a:t>
+              </a:r>
+              <a:r>
+                <a:rPr lang="de-DE" sz="1401" dirty="0">
+                  <a:solidFill>
+                    <a:schemeClr val="accent5">
+                      <a:lumMod val="50000"/>
+                    </a:schemeClr>
+                  </a:solidFill>
+                  <a:latin typeface="Arial" panose="020B0604020202020204" pitchFamily="34" charset="0"/>
+                </a:rPr>
+                <a:t> and</a:t>
+              </a:r>
+            </a:p>
+            <a:p>
+              <a:pPr algn="ctr"/>
+              <a:r>
+                <a:rPr lang="de-DE" sz="1401" dirty="0">
+                  <a:solidFill>
+                    <a:schemeClr val="accent5">
+                      <a:lumMod val="50000"/>
+                    </a:schemeClr>
+                  </a:solidFill>
+                  <a:latin typeface="Arial" panose="020B0604020202020204" pitchFamily="34" charset="0"/>
+                </a:rPr>
+                <a:t>Manual Verification</a:t>
+              </a:r>
+              <a:endParaRPr lang="de-DE" sz="1401" dirty="0">
                 <a:solidFill>
                   <a:schemeClr val="accent5">
                     <a:lumMod val="50000"/>
                   </a:schemeClr>
                 </a:solidFill>
-                <a:latin typeface="Arial" panose="020B0604020202020204" pitchFamily="34" charset="0"/>
-                <a:cs typeface="Arial" panose="020B0604020202020204" pitchFamily="34" charset="0"/>
-              </a:rPr>
-              <a:t>ODDPub</a:t>
-            </a:r>
-            <a:r>
-              <a:rPr lang="de-DE" sz="1400" dirty="0">
+              </a:endParaRPr>
+            </a:p>
+          </p:txBody>
+        </p:sp>
+        <p:cxnSp>
+          <p:nvCxnSpPr>
+            <p:cNvPr id="10" name="Straight Connector 9">
+              <a:extLst>
+                <a:ext uri="{FF2B5EF4-FFF2-40B4-BE49-F238E27FC236}">
+                  <a16:creationId xmlns:a16="http://schemas.microsoft.com/office/drawing/2014/main" id="{B38E50F4-3EB6-4472-AB36-428E5FC342AB}"/>
+                </a:ext>
+              </a:extLst>
+            </p:cNvPr>
+            <p:cNvCxnSpPr>
+              <a:cxnSpLocks/>
+            </p:cNvCxnSpPr>
+            <p:nvPr/>
+          </p:nvCxnSpPr>
+          <p:spPr>
+            <a:xfrm flipH="1" flipV="1">
+              <a:off x="4557866" y="1405801"/>
+              <a:ext cx="2239" cy="646868"/>
+            </a:xfrm>
+            <a:prstGeom prst="line">
+              <a:avLst/>
+            </a:prstGeom>
+            <a:ln>
+              <a:solidFill>
+                <a:schemeClr val="bg1">
+                  <a:lumMod val="65000"/>
+                </a:schemeClr>
+              </a:solidFill>
+            </a:ln>
+          </p:spPr>
+          <p:style>
+            <a:lnRef idx="1">
+              <a:schemeClr val="accent1"/>
+            </a:lnRef>
+            <a:fillRef idx="0">
+              <a:schemeClr val="accent1"/>
+            </a:fillRef>
+            <a:effectRef idx="0">
+              <a:schemeClr val="accent1"/>
+            </a:effectRef>
+            <a:fontRef idx="minor">
+              <a:schemeClr val="tx1"/>
+            </a:fontRef>
+          </p:style>
+        </p:cxnSp>
+        <p:cxnSp>
+          <p:nvCxnSpPr>
+            <p:cNvPr id="45" name="Straight Arrow Connector 44">
+              <a:extLst>
+                <a:ext uri="{FF2B5EF4-FFF2-40B4-BE49-F238E27FC236}">
+                  <a16:creationId xmlns:a16="http://schemas.microsoft.com/office/drawing/2014/main" id="{BF7B5AA1-6411-4DB4-BA6B-6917164AE427}"/>
+                </a:ext>
+              </a:extLst>
+            </p:cNvPr>
+            <p:cNvCxnSpPr>
+              <a:cxnSpLocks/>
+              <a:stCxn id="46" idx="2"/>
+              <a:endCxn id="37" idx="0"/>
+            </p:cNvCxnSpPr>
+            <p:nvPr/>
+          </p:nvCxnSpPr>
+          <p:spPr>
+            <a:xfrm>
+              <a:off x="2271911" y="2405360"/>
+              <a:ext cx="0" cy="2683585"/>
+            </a:xfrm>
+            <a:prstGeom prst="straightConnector1">
+              <a:avLst/>
+            </a:prstGeom>
+            <a:ln>
+              <a:solidFill>
+                <a:schemeClr val="bg1">
+                  <a:lumMod val="65000"/>
+                </a:schemeClr>
+              </a:solidFill>
+              <a:tailEnd type="triangle"/>
+            </a:ln>
+          </p:spPr>
+          <p:style>
+            <a:lnRef idx="1">
+              <a:schemeClr val="accent1"/>
+            </a:lnRef>
+            <a:fillRef idx="0">
+              <a:schemeClr val="accent1"/>
+            </a:fillRef>
+            <a:effectRef idx="0">
+              <a:schemeClr val="accent1"/>
+            </a:effectRef>
+            <a:fontRef idx="minor">
+              <a:schemeClr val="tx1"/>
+            </a:fontRef>
+          </p:style>
+        </p:cxnSp>
+        <p:sp>
+          <p:nvSpPr>
+            <p:cNvPr id="46" name="Rectangle 45">
+              <a:extLst>
+                <a:ext uri="{FF2B5EF4-FFF2-40B4-BE49-F238E27FC236}">
+                  <a16:creationId xmlns:a16="http://schemas.microsoft.com/office/drawing/2014/main" id="{E436A577-EB67-4219-929E-242465663E95}"/>
+                </a:ext>
+              </a:extLst>
+            </p:cNvPr>
+            <p:cNvSpPr/>
+            <p:nvPr/>
+          </p:nvSpPr>
+          <p:spPr>
+            <a:xfrm>
+              <a:off x="1830925" y="2097455"/>
+              <a:ext cx="881972" cy="307905"/>
+            </a:xfrm>
+            <a:prstGeom prst="rect">
+              <a:avLst/>
+            </a:prstGeom>
+          </p:spPr>
+          <p:txBody>
+            <a:bodyPr wrap="none">
+              <a:spAutoFit/>
+            </a:bodyPr>
+            <a:lstStyle/>
+            <a:p>
+              <a:pPr algn="ctr"/>
+              <a:r>
+                <a:rPr lang="de-DE" sz="1401" dirty="0">
+                  <a:solidFill>
+                    <a:schemeClr val="accent5">
+                      <a:lumMod val="50000"/>
+                    </a:schemeClr>
+                  </a:solidFill>
+                  <a:latin typeface="Arial" panose="020B0604020202020204" pitchFamily="34" charset="0"/>
+                  <a:cs typeface="Arial" panose="020B0604020202020204" pitchFamily="34" charset="0"/>
+                </a:rPr>
+                <a:t>DataStet</a:t>
+              </a:r>
+              <a:endParaRPr lang="de-DE" sz="1401" dirty="0">
                 <a:solidFill>
                   <a:schemeClr val="accent5">
                     <a:lumMod val="50000"/>
                   </a:schemeClr>
                 </a:solidFill>
-                <a:latin typeface="Arial" panose="020B0604020202020204" pitchFamily="34" charset="0"/>
-              </a:rPr>
-              <a:t> and</a:t>
-            </a:r>
-          </a:p>
-          <a:p>
-            <a:pPr algn="ctr"/>
-            <a:r>
-              <a:rPr lang="de-DE" sz="1400" dirty="0">
-                <a:solidFill>
-                  <a:schemeClr val="accent5">
-                    <a:lumMod val="50000"/>
-                  </a:schemeClr>
-                </a:solidFill>
-                <a:latin typeface="Arial" panose="020B0604020202020204" pitchFamily="34" charset="0"/>
-              </a:rPr>
-              <a:t>Manual Verification</a:t>
-            </a:r>
-            <a:endParaRPr lang="de-DE" sz="1400" dirty="0">
+              </a:endParaRPr>
+            </a:p>
+          </p:txBody>
+        </p:sp>
+        <p:cxnSp>
+          <p:nvCxnSpPr>
+            <p:cNvPr id="47" name="Straight Connector 46">
+              <a:extLst>
+                <a:ext uri="{FF2B5EF4-FFF2-40B4-BE49-F238E27FC236}">
+                  <a16:creationId xmlns:a16="http://schemas.microsoft.com/office/drawing/2014/main" id="{86F92F92-9331-477A-8B37-F8DE7AC5719E}"/>
+                </a:ext>
+              </a:extLst>
+            </p:cNvPr>
+            <p:cNvCxnSpPr>
+              <a:cxnSpLocks/>
+            </p:cNvCxnSpPr>
+            <p:nvPr/>
+          </p:nvCxnSpPr>
+          <p:spPr>
+            <a:xfrm flipH="1" flipV="1">
+              <a:off x="2273693" y="1405802"/>
+              <a:ext cx="1" cy="691653"/>
+            </a:xfrm>
+            <a:prstGeom prst="line">
+              <a:avLst/>
+            </a:prstGeom>
+            <a:ln>
               <a:solidFill>
-                <a:schemeClr val="accent5">
-                  <a:lumMod val="50000"/>
+                <a:schemeClr val="bg1">
+                  <a:lumMod val="65000"/>
                 </a:schemeClr>
               </a:solidFill>
-            </a:endParaRPr>
-          </a:p>
-        </p:txBody>
-      </p:sp>
-      <p:cxnSp>
-        <p:nvCxnSpPr>
-          <p:cNvPr id="10" name="Straight Connector 9">
-            <a:extLst>
-              <a:ext uri="{FF2B5EF4-FFF2-40B4-BE49-F238E27FC236}">
-                <a16:creationId xmlns:a16="http://schemas.microsoft.com/office/drawing/2014/main" id="{B38E50F4-3EB6-4472-AB36-428E5FC342AB}"/>
-              </a:ext>
-            </a:extLst>
-          </p:cNvPr>
-          <p:cNvCxnSpPr>
-            <a:cxnSpLocks/>
-          </p:cNvCxnSpPr>
-          <p:nvPr/>
-        </p:nvCxnSpPr>
-        <p:spPr>
-          <a:xfrm flipH="1" flipV="1">
-            <a:off x="4557866" y="1405801"/>
-            <a:ext cx="2239" cy="646868"/>
-          </a:xfrm>
-          <a:prstGeom prst="line">
-            <a:avLst/>
-          </a:prstGeom>
-          <a:ln>
-            <a:solidFill>
-              <a:schemeClr val="bg1">
-                <a:lumMod val="65000"/>
-              </a:schemeClr>
-            </a:solidFill>
-          </a:ln>
-        </p:spPr>
-        <p:style>
-          <a:lnRef idx="1">
-            <a:schemeClr val="accent1"/>
-          </a:lnRef>
-          <a:fillRef idx="0">
-            <a:schemeClr val="accent1"/>
-          </a:fillRef>
-          <a:effectRef idx="0">
-            <a:schemeClr val="accent1"/>
-          </a:effectRef>
-          <a:fontRef idx="minor">
-            <a:schemeClr val="tx1"/>
-          </a:fontRef>
-        </p:style>
-      </p:cxnSp>
-      <p:cxnSp>
-        <p:nvCxnSpPr>
-          <p:cNvPr id="45" name="Straight Arrow Connector 44">
-            <a:extLst>
-              <a:ext uri="{FF2B5EF4-FFF2-40B4-BE49-F238E27FC236}">
-                <a16:creationId xmlns:a16="http://schemas.microsoft.com/office/drawing/2014/main" id="{BF7B5AA1-6411-4DB4-BA6B-6917164AE427}"/>
-              </a:ext>
-            </a:extLst>
-          </p:cNvPr>
-          <p:cNvCxnSpPr>
-            <a:cxnSpLocks/>
-            <a:stCxn id="46" idx="2"/>
-            <a:endCxn id="37" idx="0"/>
-          </p:cNvCxnSpPr>
-          <p:nvPr/>
-        </p:nvCxnSpPr>
-        <p:spPr>
-          <a:xfrm>
-            <a:off x="2271910" y="2405232"/>
-            <a:ext cx="1" cy="2683713"/>
-          </a:xfrm>
-          <a:prstGeom prst="straightConnector1">
-            <a:avLst/>
-          </a:prstGeom>
-          <a:ln>
-            <a:solidFill>
-              <a:schemeClr val="bg1">
-                <a:lumMod val="65000"/>
-              </a:schemeClr>
-            </a:solidFill>
-            <a:tailEnd type="triangle"/>
-          </a:ln>
-        </p:spPr>
-        <p:style>
-          <a:lnRef idx="1">
-            <a:schemeClr val="accent1"/>
-          </a:lnRef>
-          <a:fillRef idx="0">
-            <a:schemeClr val="accent1"/>
-          </a:fillRef>
-          <a:effectRef idx="0">
-            <a:schemeClr val="accent1"/>
-          </a:effectRef>
-          <a:fontRef idx="minor">
-            <a:schemeClr val="tx1"/>
-          </a:fontRef>
-        </p:style>
-      </p:cxnSp>
-      <p:sp>
-        <p:nvSpPr>
-          <p:cNvPr id="46" name="Rectangle 45">
-            <a:extLst>
-              <a:ext uri="{FF2B5EF4-FFF2-40B4-BE49-F238E27FC236}">
-                <a16:creationId xmlns:a16="http://schemas.microsoft.com/office/drawing/2014/main" id="{E436A577-EB67-4219-929E-242465663E95}"/>
-              </a:ext>
-            </a:extLst>
-          </p:cNvPr>
-          <p:cNvSpPr/>
-          <p:nvPr/>
-        </p:nvSpPr>
-        <p:spPr>
-          <a:xfrm>
-            <a:off x="1830923" y="2097455"/>
-            <a:ext cx="881973" cy="307777"/>
-          </a:xfrm>
-          <a:prstGeom prst="rect">
-            <a:avLst/>
-          </a:prstGeom>
-        </p:spPr>
-        <p:txBody>
-          <a:bodyPr wrap="none">
-            <a:spAutoFit/>
-          </a:bodyPr>
-          <a:lstStyle/>
-          <a:p>
-            <a:pPr algn="ctr"/>
-            <a:r>
-              <a:rPr lang="de-DE" sz="1400" dirty="0">
-                <a:solidFill>
-                  <a:schemeClr val="accent5">
-                    <a:lumMod val="50000"/>
-                  </a:schemeClr>
-                </a:solidFill>
-                <a:latin typeface="Arial" panose="020B0604020202020204" pitchFamily="34" charset="0"/>
-                <a:cs typeface="Arial" panose="020B0604020202020204" pitchFamily="34" charset="0"/>
-              </a:rPr>
-              <a:t>DataStet</a:t>
-            </a:r>
-            <a:endParaRPr lang="de-DE" sz="1400" dirty="0">
-              <a:solidFill>
-                <a:schemeClr val="accent5">
-                  <a:lumMod val="50000"/>
-                </a:schemeClr>
-              </a:solidFill>
-            </a:endParaRPr>
-          </a:p>
-        </p:txBody>
-      </p:sp>
-      <p:cxnSp>
-        <p:nvCxnSpPr>
-          <p:cNvPr id="47" name="Straight Connector 46">
-            <a:extLst>
-              <a:ext uri="{FF2B5EF4-FFF2-40B4-BE49-F238E27FC236}">
-                <a16:creationId xmlns:a16="http://schemas.microsoft.com/office/drawing/2014/main" id="{86F92F92-9331-477A-8B37-F8DE7AC5719E}"/>
-              </a:ext>
-            </a:extLst>
-          </p:cNvPr>
-          <p:cNvCxnSpPr>
-            <a:cxnSpLocks/>
-          </p:cNvCxnSpPr>
-          <p:nvPr/>
-        </p:nvCxnSpPr>
-        <p:spPr>
-          <a:xfrm flipH="1" flipV="1">
-            <a:off x="2273693" y="1405802"/>
-            <a:ext cx="1" cy="691653"/>
-          </a:xfrm>
-          <a:prstGeom prst="line">
-            <a:avLst/>
-          </a:prstGeom>
-          <a:ln>
-            <a:solidFill>
-              <a:schemeClr val="bg1">
-                <a:lumMod val="65000"/>
-              </a:schemeClr>
-            </a:solidFill>
-          </a:ln>
-        </p:spPr>
-        <p:style>
-          <a:lnRef idx="1">
-            <a:schemeClr val="accent1"/>
-          </a:lnRef>
-          <a:fillRef idx="0">
-            <a:schemeClr val="accent1"/>
-          </a:fillRef>
-          <a:effectRef idx="0">
-            <a:schemeClr val="accent1"/>
-          </a:effectRef>
-          <a:fontRef idx="minor">
-            <a:schemeClr val="tx1"/>
-          </a:fontRef>
-        </p:style>
-      </p:cxnSp>
+            </a:ln>
+          </p:spPr>
+          <p:style>
+            <a:lnRef idx="1">
+              <a:schemeClr val="accent1"/>
+            </a:lnRef>
+            <a:fillRef idx="0">
+              <a:schemeClr val="accent1"/>
+            </a:fillRef>
+            <a:effectRef idx="0">
+              <a:schemeClr val="accent1"/>
+            </a:effectRef>
+            <a:fontRef idx="minor">
+              <a:schemeClr val="tx1"/>
+            </a:fontRef>
+          </p:style>
+        </p:cxnSp>
+      </p:grpSp>
     </p:spTree>
     <p:extLst>
       <p:ext uri="{BB962C8B-B14F-4D97-AF65-F5344CB8AC3E}">
@@ -5223,8 +5244,8 @@
         </p:nvSpPr>
         <p:spPr>
           <a:xfrm>
-            <a:off x="5059536" y="3299728"/>
-            <a:ext cx="2655711" cy="480581"/>
+            <a:off x="4236419" y="1775732"/>
+            <a:ext cx="2655710" cy="480581"/>
           </a:xfrm>
           <a:prstGeom prst="rect">
             <a:avLst/>
@@ -5274,7 +5295,7 @@
         </p:nvSpPr>
         <p:spPr>
           <a:xfrm>
-            <a:off x="4065153" y="3330985"/>
+            <a:off x="3242037" y="1806988"/>
             <a:ext cx="994383" cy="412615"/>
           </a:xfrm>
           <a:prstGeom prst="roundRect">
@@ -5363,7 +5384,7 @@
         </p:nvSpPr>
         <p:spPr>
           <a:xfrm>
-            <a:off x="4065153" y="4410766"/>
+            <a:off x="3242037" y="2886769"/>
             <a:ext cx="994383" cy="412615"/>
           </a:xfrm>
           <a:prstGeom prst="roundRect">
@@ -5456,8 +5477,8 @@
         </p:nvCxnSpPr>
         <p:spPr>
           <a:xfrm>
-            <a:off x="4562344" y="3743600"/>
-            <a:ext cx="0" cy="667166"/>
+            <a:off x="3739225" y="2219602"/>
+            <a:ext cx="0" cy="667167"/>
           </a:xfrm>
           <a:prstGeom prst="straightConnector1">
             <a:avLst/>
@@ -5500,7 +5521,7 @@
         </p:nvSpPr>
         <p:spPr>
           <a:xfrm>
-            <a:off x="5050582" y="4463588"/>
+            <a:off x="4227466" y="2939591"/>
             <a:ext cx="1828125" cy="290977"/>
           </a:xfrm>
           <a:prstGeom prst="rect">
@@ -5541,7 +5562,7 @@
         </p:nvSpPr>
         <p:spPr>
           <a:xfrm>
-            <a:off x="4065153" y="2234670"/>
+            <a:off x="3242037" y="710674"/>
             <a:ext cx="994383" cy="412615"/>
           </a:xfrm>
           <a:prstGeom prst="roundRect">
@@ -5634,8 +5655,8 @@
         </p:nvCxnSpPr>
         <p:spPr>
           <a:xfrm>
-            <a:off x="4562344" y="2647285"/>
-            <a:ext cx="0" cy="683699"/>
+            <a:off x="3739225" y="1123285"/>
+            <a:ext cx="0" cy="683700"/>
           </a:xfrm>
           <a:prstGeom prst="straightConnector1">
             <a:avLst/>
@@ -5678,7 +5699,7 @@
         </p:nvSpPr>
         <p:spPr>
           <a:xfrm>
-            <a:off x="5055059" y="2278464"/>
+            <a:off x="4231944" y="754467"/>
             <a:ext cx="1610547" cy="290977"/>
           </a:xfrm>
           <a:prstGeom prst="rect">
@@ -5719,7 +5740,7 @@
         </p:nvSpPr>
         <p:spPr>
           <a:xfrm>
-            <a:off x="4060675" y="1135562"/>
+            <a:off x="3237560" y="-388436"/>
             <a:ext cx="994383" cy="412615"/>
           </a:xfrm>
           <a:prstGeom prst="roundRect">
@@ -5812,8 +5833,8 @@
         </p:nvCxnSpPr>
         <p:spPr>
           <a:xfrm>
-            <a:off x="4557867" y="1548176"/>
-            <a:ext cx="4478" cy="686493"/>
+            <a:off x="3734752" y="24178"/>
+            <a:ext cx="4479" cy="686493"/>
           </a:xfrm>
           <a:prstGeom prst="straightConnector1">
             <a:avLst/>
@@ -5856,7 +5877,7 @@
         </p:nvSpPr>
         <p:spPr>
           <a:xfrm>
-            <a:off x="5050581" y="1179356"/>
+            <a:off x="4227464" y="-344642"/>
             <a:ext cx="1828125" cy="290977"/>
           </a:xfrm>
           <a:prstGeom prst="rect">
@@ -5897,9 +5918,9 @@
 </file>
 
 <file path=ppt/theme/theme1.xml><?xml version="1.0" encoding="utf-8"?>
-<a:theme xmlns:a="http://schemas.openxmlformats.org/drawingml/2006/main" name="Office Theme">
+<a:theme xmlns:a="http://schemas.openxmlformats.org/drawingml/2006/main" name="Office 2013 - 2022 Theme">
   <a:themeElements>
-    <a:clrScheme name="Office Theme">
+    <a:clrScheme name="Office 2013 - 2022 Theme">
       <a:dk1>
         <a:sysClr val="windowText" lastClr="000000"/>
       </a:dk1>
@@ -5937,7 +5958,7 @@
         <a:srgbClr val="954F72"/>
       </a:folHlink>
     </a:clrScheme>
-    <a:fontScheme name="Office Theme">
+    <a:fontScheme name="Office 2013 - 2022 Theme">
       <a:majorFont>
         <a:latin typeface="Calibri Light" panose="020F0302020204030204"/>
         <a:ea typeface=""/>
@@ -6009,7 +6030,7 @@
         <a:font script="Geor" typeface="Sylfaen"/>
       </a:minorFont>
     </a:fontScheme>
-    <a:fmtScheme name="Office Theme">
+    <a:fmtScheme name="Office 2013 - 2022 Theme">
       <a:fillStyleLst>
         <a:solidFill>
           <a:schemeClr val="phClr"/>
@@ -6151,7 +6172,7 @@
   <a:extraClrSchemeLst/>
   <a:extLst>
     <a:ext uri="{05A4C25C-085E-4340-85A3-A5531E510DB2}">
-      <thm15:themeFamily xmlns:thm15="http://schemas.microsoft.com/office/thememl/2012/main" name="Office Theme" id="{62F939B6-93AF-4DB8-9C6B-D6C7DFDC589F}" vid="{4A3C46E8-61CC-4603-A589-7422A47A8E4A}"/>
+      <thm15:themeFamily xmlns:thm15="http://schemas.microsoft.com/office/thememl/2012/main" name="Office 2013 - 2022 Theme" id="{62F939B6-93AF-4DB8-9C6B-D6C7DFDC589F}" vid="{4A3C46E8-61CC-4603-A589-7422A47A8E4A}"/>
     </a:ext>
   </a:extLst>
 </a:theme>

--- a/plots_files/plots_png/pptx/plots_png.pptx
+++ b/plots_files/plots_png/pptx/plots_png.pptx
@@ -6,7 +6,6 @@
   </p:sldMasterIdLst>
   <p:sldIdLst>
     <p:sldId id="260" r:id="rId2"/>
-    <p:sldId id="256" r:id="rId3"/>
   </p:sldIdLst>
   <p:sldSz cx="6400800" cy="9144000"/>
   <p:notesSz cx="6858000" cy="9144000"/>
@@ -3440,7 +3439,7 @@
           <p:spPr>
             <a:xfrm>
               <a:off x="5063715" y="5042445"/>
-              <a:ext cx="994363" cy="489621"/>
+              <a:ext cx="1178620" cy="489621"/>
             </a:xfrm>
             <a:prstGeom prst="rect">
               <a:avLst/>
@@ -3457,7 +3456,7 @@
                   <a:latin typeface="Arial" panose="020B0604020202020204" pitchFamily="34" charset="0"/>
                   <a:cs typeface="Arial" panose="020B0604020202020204" pitchFamily="34" charset="0"/>
                 </a:rPr>
-                <a:t>Mentioned</a:t>
+                <a:t>Referenced</a:t>
               </a:r>
             </a:p>
             <a:p>
@@ -3503,7 +3502,7 @@
                   <a:latin typeface="Arial" panose="020B0604020202020204" pitchFamily="34" charset="0"/>
                   <a:cs typeface="Arial" panose="020B0604020202020204" pitchFamily="34" charset="0"/>
                 </a:rPr>
-                <a:t>Mentions</a:t>
+                <a:t>References</a:t>
               </a:r>
             </a:p>
             <a:p>
@@ -3922,7 +3921,7 @@
                   <a:latin typeface="Arial" panose="020B0604020202020204" pitchFamily="34" charset="0"/>
                   <a:cs typeface="Arial" panose="020B0604020202020204" pitchFamily="34" charset="0"/>
                 </a:rPr>
-                <a:t>Mentioned</a:t>
+                <a:t>Referenced</a:t>
               </a:r>
             </a:p>
             <a:p>
@@ -3970,7 +3969,7 @@
                   <a:latin typeface="Arial" panose="020B0604020202020204" pitchFamily="34" charset="0"/>
                   <a:cs typeface="Arial" panose="020B0604020202020204" pitchFamily="34" charset="0"/>
                 </a:rPr>
-                <a:t>Mentions</a:t>
+                <a:t>References</a:t>
               </a:r>
             </a:p>
             <a:p>
@@ -4074,7 +4073,7 @@
                   <a:latin typeface="Arial" panose="020B0604020202020204" pitchFamily="34" charset="0"/>
                   <a:cs typeface="Arial" panose="020B0604020202020204" pitchFamily="34" charset="0"/>
                 </a:rPr>
-                <a:t>Mentions of Datasets</a:t>
+                <a:t>References of Datasets</a:t>
               </a:r>
             </a:p>
             <a:p>
@@ -4388,7 +4387,7 @@
                   <a:latin typeface="Arial" panose="020B0604020202020204" pitchFamily="34" charset="0"/>
                   <a:cs typeface="Arial" panose="020B0604020202020204" pitchFamily="34" charset="0"/>
                 </a:rPr>
-                <a:t>Mentioned Datasets</a:t>
+                <a:t>Referenced Datasets</a:t>
               </a:r>
               <a:endParaRPr lang="de-DE" sz="1291" dirty="0">
                 <a:latin typeface="Arial" panose="020B0604020202020204" pitchFamily="34" charset="0"/>
@@ -5204,710 +5203,6 @@
     <p:extLst>
       <p:ext uri="{BB962C8B-B14F-4D97-AF65-F5344CB8AC3E}">
         <p14:creationId xmlns:p14="http://schemas.microsoft.com/office/powerpoint/2010/main" val="3660736135"/>
-      </p:ext>
-    </p:extLst>
-  </p:cSld>
-  <p:clrMapOvr>
-    <a:masterClrMapping/>
-  </p:clrMapOvr>
-</p:sld>
-</file>
-
-<file path=ppt/slides/slide2.xml><?xml version="1.0" encoding="utf-8"?>
-<p:sld xmlns:a="http://schemas.openxmlformats.org/drawingml/2006/main" xmlns:r="http://schemas.openxmlformats.org/officeDocument/2006/relationships" xmlns:p="http://schemas.openxmlformats.org/presentationml/2006/main">
-  <p:cSld>
-    <p:spTree>
-      <p:nvGrpSpPr>
-        <p:cNvPr id="1" name=""/>
-        <p:cNvGrpSpPr/>
-        <p:nvPr/>
-      </p:nvGrpSpPr>
-      <p:grpSpPr>
-        <a:xfrm>
-          <a:off x="0" y="0"/>
-          <a:ext cx="0" cy="0"/>
-          <a:chOff x="0" y="0"/>
-          <a:chExt cx="0" cy="0"/>
-        </a:xfrm>
-      </p:grpSpPr>
-      <p:sp>
-        <p:nvSpPr>
-          <p:cNvPr id="3" name="Rectangle 2">
-            <a:extLst>
-              <a:ext uri="{FF2B5EF4-FFF2-40B4-BE49-F238E27FC236}">
-                <a16:creationId xmlns:a16="http://schemas.microsoft.com/office/drawing/2014/main" id="{FE9FF791-EB9E-4172-8E36-126A1971CBBF}"/>
-              </a:ext>
-            </a:extLst>
-          </p:cNvPr>
-          <p:cNvSpPr/>
-          <p:nvPr/>
-        </p:nvSpPr>
-        <p:spPr>
-          <a:xfrm>
-            <a:off x="4236419" y="1775732"/>
-            <a:ext cx="2655710" cy="480581"/>
-          </a:xfrm>
-          <a:prstGeom prst="rect">
-            <a:avLst/>
-          </a:prstGeom>
-        </p:spPr>
-        <p:txBody>
-          <a:bodyPr wrap="square">
-            <a:spAutoFit/>
-          </a:bodyPr>
-          <a:lstStyle/>
-          <a:p>
-            <a:r>
-              <a:rPr lang="en-US" sz="1291" dirty="0">
-                <a:latin typeface="Arial" panose="020B0604020202020204" pitchFamily="34" charset="0"/>
-                <a:cs typeface="Arial" panose="020B0604020202020204" pitchFamily="34" charset="0"/>
-              </a:rPr>
-              <a:t>Confirmed Indirect Data Citations</a:t>
-            </a:r>
-          </a:p>
-          <a:p>
-            <a:r>
-              <a:rPr lang="de-DE" sz="1232" dirty="0">
-                <a:solidFill>
-                  <a:schemeClr val="bg1">
-                    <a:lumMod val="50000"/>
-                  </a:schemeClr>
-                </a:solidFill>
-                <a:latin typeface="Arial" panose="020B0604020202020204" pitchFamily="34" charset="0"/>
-                <a:cs typeface="Arial" panose="020B0604020202020204" pitchFamily="34" charset="0"/>
-              </a:rPr>
-              <a:t>(1,728 Citations Overall)</a:t>
-            </a:r>
-          </a:p>
-        </p:txBody>
-      </p:sp>
-      <p:sp>
-        <p:nvSpPr>
-          <p:cNvPr id="32" name="Rectangle: Rounded Corners 31">
-            <a:extLst>
-              <a:ext uri="{FF2B5EF4-FFF2-40B4-BE49-F238E27FC236}">
-                <a16:creationId xmlns:a16="http://schemas.microsoft.com/office/drawing/2014/main" id="{759DB630-BAD7-4C3C-8ABD-E809EE7D6421}"/>
-              </a:ext>
-            </a:extLst>
-          </p:cNvPr>
-          <p:cNvSpPr/>
-          <p:nvPr/>
-        </p:nvSpPr>
-        <p:spPr>
-          <a:xfrm>
-            <a:off x="3242037" y="1806988"/>
-            <a:ext cx="994383" cy="412615"/>
-          </a:xfrm>
-          <a:prstGeom prst="roundRect">
-            <a:avLst/>
-          </a:prstGeom>
-          <a:gradFill flip="none" rotWithShape="1">
-            <a:gsLst>
-              <a:gs pos="84000">
-                <a:srgbClr val="75D4FF"/>
-              </a:gs>
-              <a:gs pos="68000">
-                <a:srgbClr val="00B0F0"/>
-              </a:gs>
-              <a:gs pos="100000">
-                <a:schemeClr val="bg1">
-                  <a:lumMod val="95000"/>
-                </a:schemeClr>
-              </a:gs>
-            </a:gsLst>
-            <a:lin ang="18900000" scaled="1"/>
-            <a:tileRect/>
-          </a:gradFill>
-          <a:ln>
-            <a:noFill/>
-          </a:ln>
-          <a:effectLst>
-            <a:outerShdw blurRad="50800" dist="38100" dir="8100000" algn="tr" rotWithShape="0">
-              <a:prstClr val="black">
-                <a:alpha val="40000"/>
-              </a:prstClr>
-            </a:outerShdw>
-          </a:effectLst>
-        </p:spPr>
-        <p:style>
-          <a:lnRef idx="2">
-            <a:schemeClr val="accent1">
-              <a:shade val="50000"/>
-            </a:schemeClr>
-          </a:lnRef>
-          <a:fillRef idx="1">
-            <a:schemeClr val="accent1"/>
-          </a:fillRef>
-          <a:effectRef idx="0">
-            <a:schemeClr val="accent1"/>
-          </a:effectRef>
-          <a:fontRef idx="minor">
-            <a:schemeClr val="lt1"/>
-          </a:fontRef>
-        </p:style>
-        <p:txBody>
-          <a:bodyPr rtlCol="0" anchor="ctr"/>
-          <a:lstStyle/>
-          <a:p>
-            <a:pPr algn="ctr"/>
-            <a:r>
-              <a:rPr lang="en-US" sz="1408" dirty="0">
-                <a:solidFill>
-                  <a:schemeClr val="tx1"/>
-                </a:solidFill>
-                <a:latin typeface="Arial" panose="020B0604020202020204" pitchFamily="34" charset="0"/>
-                <a:cs typeface="Arial" panose="020B0604020202020204" pitchFamily="34" charset="0"/>
-              </a:rPr>
-              <a:t>113</a:t>
-            </a:r>
-            <a:endParaRPr lang="de-DE" sz="1408" dirty="0">
-              <a:solidFill>
-                <a:schemeClr val="tx1"/>
-              </a:solidFill>
-              <a:latin typeface="Arial" panose="020B0604020202020204" pitchFamily="34" charset="0"/>
-              <a:cs typeface="Arial" panose="020B0604020202020204" pitchFamily="34" charset="0"/>
-            </a:endParaRPr>
-          </a:p>
-        </p:txBody>
-      </p:sp>
-      <p:sp>
-        <p:nvSpPr>
-          <p:cNvPr id="33" name="Rectangle: Rounded Corners 32">
-            <a:extLst>
-              <a:ext uri="{FF2B5EF4-FFF2-40B4-BE49-F238E27FC236}">
-                <a16:creationId xmlns:a16="http://schemas.microsoft.com/office/drawing/2014/main" id="{F782143D-917A-4630-A7FB-072612AFAFCB}"/>
-              </a:ext>
-            </a:extLst>
-          </p:cNvPr>
-          <p:cNvSpPr/>
-          <p:nvPr/>
-        </p:nvSpPr>
-        <p:spPr>
-          <a:xfrm>
-            <a:off x="3242037" y="2886769"/>
-            <a:ext cx="994383" cy="412615"/>
-          </a:xfrm>
-          <a:prstGeom prst="roundRect">
-            <a:avLst/>
-          </a:prstGeom>
-          <a:gradFill flip="none" rotWithShape="1">
-            <a:gsLst>
-              <a:gs pos="84000">
-                <a:srgbClr val="75D4FF"/>
-              </a:gs>
-              <a:gs pos="68000">
-                <a:srgbClr val="00B0F0"/>
-              </a:gs>
-              <a:gs pos="100000">
-                <a:schemeClr val="bg1">
-                  <a:lumMod val="95000"/>
-                </a:schemeClr>
-              </a:gs>
-            </a:gsLst>
-            <a:lin ang="18900000" scaled="1"/>
-            <a:tileRect/>
-          </a:gradFill>
-          <a:ln>
-            <a:noFill/>
-          </a:ln>
-          <a:effectLst>
-            <a:outerShdw blurRad="50800" dist="38100" dir="8100000" algn="tr" rotWithShape="0">
-              <a:prstClr val="black">
-                <a:alpha val="40000"/>
-              </a:prstClr>
-            </a:outerShdw>
-          </a:effectLst>
-        </p:spPr>
-        <p:style>
-          <a:lnRef idx="2">
-            <a:schemeClr val="accent1">
-              <a:shade val="50000"/>
-            </a:schemeClr>
-          </a:lnRef>
-          <a:fillRef idx="1">
-            <a:schemeClr val="accent1"/>
-          </a:fillRef>
-          <a:effectRef idx="0">
-            <a:schemeClr val="accent1"/>
-          </a:effectRef>
-          <a:fontRef idx="minor">
-            <a:schemeClr val="lt1"/>
-          </a:fontRef>
-        </p:style>
-        <p:txBody>
-          <a:bodyPr rtlCol="0" anchor="ctr"/>
-          <a:lstStyle/>
-          <a:p>
-            <a:pPr algn="ctr"/>
-            <a:r>
-              <a:rPr lang="en-US" sz="1408" dirty="0">
-                <a:solidFill>
-                  <a:schemeClr val="tx1"/>
-                </a:solidFill>
-                <a:latin typeface="Arial" panose="020B0604020202020204" pitchFamily="34" charset="0"/>
-                <a:cs typeface="Arial" panose="020B0604020202020204" pitchFamily="34" charset="0"/>
-              </a:rPr>
-              <a:t>846</a:t>
-            </a:r>
-            <a:endParaRPr lang="de-DE" sz="1408" dirty="0">
-              <a:solidFill>
-                <a:schemeClr val="tx1"/>
-              </a:solidFill>
-              <a:latin typeface="Arial" panose="020B0604020202020204" pitchFamily="34" charset="0"/>
-              <a:cs typeface="Arial" panose="020B0604020202020204" pitchFamily="34" charset="0"/>
-            </a:endParaRPr>
-          </a:p>
-        </p:txBody>
-      </p:sp>
-      <p:cxnSp>
-        <p:nvCxnSpPr>
-          <p:cNvPr id="34" name="Straight Arrow Connector 33">
-            <a:extLst>
-              <a:ext uri="{FF2B5EF4-FFF2-40B4-BE49-F238E27FC236}">
-                <a16:creationId xmlns:a16="http://schemas.microsoft.com/office/drawing/2014/main" id="{588FEEB8-535C-4F9D-BE06-D60DEC78B11A}"/>
-              </a:ext>
-            </a:extLst>
-          </p:cNvPr>
-          <p:cNvCxnSpPr>
-            <a:cxnSpLocks/>
-            <a:stCxn id="32" idx="2"/>
-            <a:endCxn id="33" idx="0"/>
-          </p:cNvCxnSpPr>
-          <p:nvPr/>
-        </p:nvCxnSpPr>
-        <p:spPr>
-          <a:xfrm>
-            <a:off x="3739225" y="2219602"/>
-            <a:ext cx="0" cy="667167"/>
-          </a:xfrm>
-          <a:prstGeom prst="straightConnector1">
-            <a:avLst/>
-          </a:prstGeom>
-          <a:ln>
-            <a:solidFill>
-              <a:schemeClr val="bg1">
-                <a:lumMod val="65000"/>
-              </a:schemeClr>
-            </a:solidFill>
-            <a:tailEnd type="triangle"/>
-          </a:ln>
-        </p:spPr>
-        <p:style>
-          <a:lnRef idx="1">
-            <a:schemeClr val="accent1"/>
-          </a:lnRef>
-          <a:fillRef idx="0">
-            <a:schemeClr val="accent1"/>
-          </a:fillRef>
-          <a:effectRef idx="0">
-            <a:schemeClr val="accent1"/>
-          </a:effectRef>
-          <a:fontRef idx="minor">
-            <a:schemeClr val="tx1"/>
-          </a:fontRef>
-        </p:style>
-      </p:cxnSp>
-      <p:sp>
-        <p:nvSpPr>
-          <p:cNvPr id="35" name="Rectangle 34">
-            <a:extLst>
-              <a:ext uri="{FF2B5EF4-FFF2-40B4-BE49-F238E27FC236}">
-                <a16:creationId xmlns:a16="http://schemas.microsoft.com/office/drawing/2014/main" id="{F8014AD8-AB9C-478D-A1B4-21E726B7E060}"/>
-              </a:ext>
-            </a:extLst>
-          </p:cNvPr>
-          <p:cNvSpPr/>
-          <p:nvPr/>
-        </p:nvSpPr>
-        <p:spPr>
-          <a:xfrm>
-            <a:off x="4227466" y="2939591"/>
-            <a:ext cx="1828125" cy="290977"/>
-          </a:xfrm>
-          <a:prstGeom prst="rect">
-            <a:avLst/>
-          </a:prstGeom>
-        </p:spPr>
-        <p:txBody>
-          <a:bodyPr wrap="square">
-            <a:spAutoFit/>
-          </a:bodyPr>
-          <a:lstStyle/>
-          <a:p>
-            <a:r>
-              <a:rPr lang="en-US" sz="1291" dirty="0">
-                <a:latin typeface="Arial" panose="020B0604020202020204" pitchFamily="34" charset="0"/>
-                <a:cs typeface="Arial" panose="020B0604020202020204" pitchFamily="34" charset="0"/>
-              </a:rPr>
-              <a:t>Estimated Citations</a:t>
-            </a:r>
-            <a:endParaRPr lang="de-DE" sz="1291" dirty="0">
-              <a:latin typeface="Arial" panose="020B0604020202020204" pitchFamily="34" charset="0"/>
-              <a:cs typeface="Arial" panose="020B0604020202020204" pitchFamily="34" charset="0"/>
-            </a:endParaRPr>
-          </a:p>
-        </p:txBody>
-      </p:sp>
-      <p:sp>
-        <p:nvSpPr>
-          <p:cNvPr id="36" name="Rectangle: Rounded Corners 35">
-            <a:extLst>
-              <a:ext uri="{FF2B5EF4-FFF2-40B4-BE49-F238E27FC236}">
-                <a16:creationId xmlns:a16="http://schemas.microsoft.com/office/drawing/2014/main" id="{A66615DB-D6CA-4E80-B064-CD8973E779A9}"/>
-              </a:ext>
-            </a:extLst>
-          </p:cNvPr>
-          <p:cNvSpPr/>
-          <p:nvPr/>
-        </p:nvSpPr>
-        <p:spPr>
-          <a:xfrm>
-            <a:off x="3242037" y="710674"/>
-            <a:ext cx="994383" cy="412615"/>
-          </a:xfrm>
-          <a:prstGeom prst="roundRect">
-            <a:avLst/>
-          </a:prstGeom>
-          <a:gradFill flip="none" rotWithShape="1">
-            <a:gsLst>
-              <a:gs pos="84000">
-                <a:srgbClr val="75D4FF"/>
-              </a:gs>
-              <a:gs pos="68000">
-                <a:srgbClr val="00B0F0"/>
-              </a:gs>
-              <a:gs pos="100000">
-                <a:schemeClr val="bg1">
-                  <a:lumMod val="95000"/>
-                </a:schemeClr>
-              </a:gs>
-            </a:gsLst>
-            <a:lin ang="18900000" scaled="1"/>
-            <a:tileRect/>
-          </a:gradFill>
-          <a:ln>
-            <a:noFill/>
-          </a:ln>
-          <a:effectLst>
-            <a:outerShdw blurRad="50800" dist="38100" dir="8100000" algn="tr" rotWithShape="0">
-              <a:prstClr val="black">
-                <a:alpha val="40000"/>
-              </a:prstClr>
-            </a:outerShdw>
-          </a:effectLst>
-        </p:spPr>
-        <p:style>
-          <a:lnRef idx="2">
-            <a:schemeClr val="accent1">
-              <a:shade val="50000"/>
-            </a:schemeClr>
-          </a:lnRef>
-          <a:fillRef idx="1">
-            <a:schemeClr val="accent1"/>
-          </a:fillRef>
-          <a:effectRef idx="0">
-            <a:schemeClr val="accent1"/>
-          </a:effectRef>
-          <a:fontRef idx="minor">
-            <a:schemeClr val="lt1"/>
-          </a:fontRef>
-        </p:style>
-        <p:txBody>
-          <a:bodyPr rtlCol="0" anchor="ctr"/>
-          <a:lstStyle/>
-          <a:p>
-            <a:pPr algn="ctr"/>
-            <a:r>
-              <a:rPr lang="en-US" sz="1408" dirty="0">
-                <a:solidFill>
-                  <a:schemeClr val="tx1"/>
-                </a:solidFill>
-                <a:latin typeface="Arial" panose="020B0604020202020204" pitchFamily="34" charset="0"/>
-                <a:cs typeface="Arial" panose="020B0604020202020204" pitchFamily="34" charset="0"/>
-              </a:rPr>
-              <a:t>35</a:t>
-            </a:r>
-            <a:endParaRPr lang="de-DE" sz="1408" dirty="0">
-              <a:solidFill>
-                <a:schemeClr val="tx1"/>
-              </a:solidFill>
-              <a:latin typeface="Arial" panose="020B0604020202020204" pitchFamily="34" charset="0"/>
-              <a:cs typeface="Arial" panose="020B0604020202020204" pitchFamily="34" charset="0"/>
-            </a:endParaRPr>
-          </a:p>
-        </p:txBody>
-      </p:sp>
-      <p:cxnSp>
-        <p:nvCxnSpPr>
-          <p:cNvPr id="37" name="Straight Arrow Connector 36">
-            <a:extLst>
-              <a:ext uri="{FF2B5EF4-FFF2-40B4-BE49-F238E27FC236}">
-                <a16:creationId xmlns:a16="http://schemas.microsoft.com/office/drawing/2014/main" id="{9CB45425-9B7D-49B1-B7E6-6CE84CD5DD4F}"/>
-              </a:ext>
-            </a:extLst>
-          </p:cNvPr>
-          <p:cNvCxnSpPr>
-            <a:cxnSpLocks/>
-            <a:stCxn id="36" idx="2"/>
-            <a:endCxn id="32" idx="0"/>
-          </p:cNvCxnSpPr>
-          <p:nvPr/>
-        </p:nvCxnSpPr>
-        <p:spPr>
-          <a:xfrm>
-            <a:off x="3739225" y="1123285"/>
-            <a:ext cx="0" cy="683700"/>
-          </a:xfrm>
-          <a:prstGeom prst="straightConnector1">
-            <a:avLst/>
-          </a:prstGeom>
-          <a:ln>
-            <a:solidFill>
-              <a:schemeClr val="bg1">
-                <a:lumMod val="65000"/>
-              </a:schemeClr>
-            </a:solidFill>
-            <a:tailEnd type="triangle"/>
-          </a:ln>
-        </p:spPr>
-        <p:style>
-          <a:lnRef idx="1">
-            <a:schemeClr val="accent1"/>
-          </a:lnRef>
-          <a:fillRef idx="0">
-            <a:schemeClr val="accent1"/>
-          </a:fillRef>
-          <a:effectRef idx="0">
-            <a:schemeClr val="accent1"/>
-          </a:effectRef>
-          <a:fontRef idx="minor">
-            <a:schemeClr val="tx1"/>
-          </a:fontRef>
-        </p:style>
-      </p:cxnSp>
-      <p:sp>
-        <p:nvSpPr>
-          <p:cNvPr id="38" name="Rectangle 37">
-            <a:extLst>
-              <a:ext uri="{FF2B5EF4-FFF2-40B4-BE49-F238E27FC236}">
-                <a16:creationId xmlns:a16="http://schemas.microsoft.com/office/drawing/2014/main" id="{793B5009-2567-4219-828C-A2FC4468E2F5}"/>
-              </a:ext>
-            </a:extLst>
-          </p:cNvPr>
-          <p:cNvSpPr/>
-          <p:nvPr/>
-        </p:nvSpPr>
-        <p:spPr>
-          <a:xfrm>
-            <a:off x="4231944" y="754467"/>
-            <a:ext cx="1610547" cy="290977"/>
-          </a:xfrm>
-          <a:prstGeom prst="rect">
-            <a:avLst/>
-          </a:prstGeom>
-        </p:spPr>
-        <p:txBody>
-          <a:bodyPr wrap="square">
-            <a:spAutoFit/>
-          </a:bodyPr>
-          <a:lstStyle/>
-          <a:p>
-            <a:r>
-              <a:rPr lang="en-US" sz="1291" dirty="0">
-                <a:latin typeface="Arial" panose="020B0604020202020204" pitchFamily="34" charset="0"/>
-                <a:cs typeface="Arial" panose="020B0604020202020204" pitchFamily="34" charset="0"/>
-              </a:rPr>
-              <a:t>Charité Datasets</a:t>
-            </a:r>
-            <a:endParaRPr lang="de-DE" sz="1291" dirty="0">
-              <a:latin typeface="Arial" panose="020B0604020202020204" pitchFamily="34" charset="0"/>
-              <a:cs typeface="Arial" panose="020B0604020202020204" pitchFamily="34" charset="0"/>
-            </a:endParaRPr>
-          </a:p>
-        </p:txBody>
-      </p:sp>
-      <p:sp>
-        <p:nvSpPr>
-          <p:cNvPr id="39" name="Rectangle: Rounded Corners 38">
-            <a:extLst>
-              <a:ext uri="{FF2B5EF4-FFF2-40B4-BE49-F238E27FC236}">
-                <a16:creationId xmlns:a16="http://schemas.microsoft.com/office/drawing/2014/main" id="{D4DE513D-2FB1-49B7-A2CE-E030FD9CE2A4}"/>
-              </a:ext>
-            </a:extLst>
-          </p:cNvPr>
-          <p:cNvSpPr/>
-          <p:nvPr/>
-        </p:nvSpPr>
-        <p:spPr>
-          <a:xfrm>
-            <a:off x="3237560" y="-388436"/>
-            <a:ext cx="994383" cy="412615"/>
-          </a:xfrm>
-          <a:prstGeom prst="roundRect">
-            <a:avLst/>
-          </a:prstGeom>
-          <a:gradFill flip="none" rotWithShape="1">
-            <a:gsLst>
-              <a:gs pos="84000">
-                <a:srgbClr val="75D4FF"/>
-              </a:gs>
-              <a:gs pos="68000">
-                <a:srgbClr val="00B0F0"/>
-              </a:gs>
-              <a:gs pos="100000">
-                <a:schemeClr val="bg1">
-                  <a:lumMod val="95000"/>
-                </a:schemeClr>
-              </a:gs>
-            </a:gsLst>
-            <a:lin ang="18900000" scaled="1"/>
-            <a:tileRect/>
-          </a:gradFill>
-          <a:ln>
-            <a:noFill/>
-          </a:ln>
-          <a:effectLst>
-            <a:outerShdw blurRad="50800" dist="38100" dir="8100000" algn="tr" rotWithShape="0">
-              <a:prstClr val="black">
-                <a:alpha val="40000"/>
-              </a:prstClr>
-            </a:outerShdw>
-          </a:effectLst>
-        </p:spPr>
-        <p:style>
-          <a:lnRef idx="2">
-            <a:schemeClr val="accent1">
-              <a:shade val="50000"/>
-            </a:schemeClr>
-          </a:lnRef>
-          <a:fillRef idx="1">
-            <a:schemeClr val="accent1"/>
-          </a:fillRef>
-          <a:effectRef idx="0">
-            <a:schemeClr val="accent1"/>
-          </a:effectRef>
-          <a:fontRef idx="minor">
-            <a:schemeClr val="lt1"/>
-          </a:fontRef>
-        </p:style>
-        <p:txBody>
-          <a:bodyPr rtlCol="0" anchor="ctr"/>
-          <a:lstStyle/>
-          <a:p>
-            <a:pPr algn="ctr"/>
-            <a:r>
-              <a:rPr lang="en-US" sz="1408" dirty="0">
-                <a:solidFill>
-                  <a:schemeClr val="tx1"/>
-                </a:solidFill>
-                <a:latin typeface="Arial" panose="020B0604020202020204" pitchFamily="34" charset="0"/>
-                <a:cs typeface="Arial" panose="020B0604020202020204" pitchFamily="34" charset="0"/>
-              </a:rPr>
-              <a:t>21</a:t>
-            </a:r>
-            <a:endParaRPr lang="de-DE" sz="1408" dirty="0">
-              <a:solidFill>
-                <a:schemeClr val="tx1"/>
-              </a:solidFill>
-              <a:latin typeface="Arial" panose="020B0604020202020204" pitchFamily="34" charset="0"/>
-              <a:cs typeface="Arial" panose="020B0604020202020204" pitchFamily="34" charset="0"/>
-            </a:endParaRPr>
-          </a:p>
-        </p:txBody>
-      </p:sp>
-      <p:cxnSp>
-        <p:nvCxnSpPr>
-          <p:cNvPr id="40" name="Straight Arrow Connector 39">
-            <a:extLst>
-              <a:ext uri="{FF2B5EF4-FFF2-40B4-BE49-F238E27FC236}">
-                <a16:creationId xmlns:a16="http://schemas.microsoft.com/office/drawing/2014/main" id="{02B4690F-D349-475B-81BF-F2E80E19C269}"/>
-              </a:ext>
-            </a:extLst>
-          </p:cNvPr>
-          <p:cNvCxnSpPr>
-            <a:cxnSpLocks/>
-            <a:stCxn id="39" idx="2"/>
-            <a:endCxn id="36" idx="0"/>
-          </p:cNvCxnSpPr>
-          <p:nvPr/>
-        </p:nvCxnSpPr>
-        <p:spPr>
-          <a:xfrm>
-            <a:off x="3734752" y="24178"/>
-            <a:ext cx="4479" cy="686493"/>
-          </a:xfrm>
-          <a:prstGeom prst="straightConnector1">
-            <a:avLst/>
-          </a:prstGeom>
-          <a:ln>
-            <a:solidFill>
-              <a:schemeClr val="bg1">
-                <a:lumMod val="65000"/>
-              </a:schemeClr>
-            </a:solidFill>
-            <a:tailEnd type="triangle"/>
-          </a:ln>
-        </p:spPr>
-        <p:style>
-          <a:lnRef idx="1">
-            <a:schemeClr val="accent1"/>
-          </a:lnRef>
-          <a:fillRef idx="0">
-            <a:schemeClr val="accent1"/>
-          </a:fillRef>
-          <a:effectRef idx="0">
-            <a:schemeClr val="accent1"/>
-          </a:effectRef>
-          <a:fontRef idx="minor">
-            <a:schemeClr val="tx1"/>
-          </a:fontRef>
-        </p:style>
-      </p:cxnSp>
-      <p:sp>
-        <p:nvSpPr>
-          <p:cNvPr id="41" name="Rectangle 40">
-            <a:extLst>
-              <a:ext uri="{FF2B5EF4-FFF2-40B4-BE49-F238E27FC236}">
-                <a16:creationId xmlns:a16="http://schemas.microsoft.com/office/drawing/2014/main" id="{DFB321C3-1C3C-4DCB-87EF-3C35A20F30A0}"/>
-              </a:ext>
-            </a:extLst>
-          </p:cNvPr>
-          <p:cNvSpPr/>
-          <p:nvPr/>
-        </p:nvSpPr>
-        <p:spPr>
-          <a:xfrm>
-            <a:off x="4227464" y="-344642"/>
-            <a:ext cx="1828125" cy="290977"/>
-          </a:xfrm>
-          <a:prstGeom prst="rect">
-            <a:avLst/>
-          </a:prstGeom>
-        </p:spPr>
-        <p:txBody>
-          <a:bodyPr wrap="square">
-            <a:spAutoFit/>
-          </a:bodyPr>
-          <a:lstStyle/>
-          <a:p>
-            <a:r>
-              <a:rPr lang="en-US" sz="1291" dirty="0">
-                <a:latin typeface="Arial" panose="020B0604020202020204" pitchFamily="34" charset="0"/>
-                <a:cs typeface="Arial" panose="020B0604020202020204" pitchFamily="34" charset="0"/>
-              </a:rPr>
-              <a:t>Charité Data Articles</a:t>
-            </a:r>
-            <a:endParaRPr lang="de-DE" sz="1291" dirty="0">
-              <a:latin typeface="Arial" panose="020B0604020202020204" pitchFamily="34" charset="0"/>
-              <a:cs typeface="Arial" panose="020B0604020202020204" pitchFamily="34" charset="0"/>
-            </a:endParaRPr>
-          </a:p>
-        </p:txBody>
-      </p:sp>
-    </p:spTree>
-    <p:extLst>
-      <p:ext uri="{BB962C8B-B14F-4D97-AF65-F5344CB8AC3E}">
-        <p14:creationId xmlns:p14="http://schemas.microsoft.com/office/powerpoint/2010/main" val="225445080"/>
       </p:ext>
     </p:extLst>
   </p:cSld>

--- a/plots_files/plots_png/pptx/plots_png.pptx
+++ b/plots_files/plots_png/pptx/plots_png.pptx
@@ -1,6 +1,6 @@
 
 <file path=ppt/presentation.xml><?xml version="1.0" encoding="utf-8"?>
-<p:presentation xmlns:a="http://schemas.openxmlformats.org/drawingml/2006/main" xmlns:r="http://schemas.openxmlformats.org/officeDocument/2006/relationships" xmlns:p="http://schemas.openxmlformats.org/presentationml/2006/main" saveSubsetFonts="1">
+<p:presentation xmlns:a="http://schemas.openxmlformats.org/drawingml/2006/main" xmlns:r="http://schemas.openxmlformats.org/officeDocument/2006/relationships" xmlns:p="http://schemas.openxmlformats.org/presentationml/2006/main" saveSubsetFonts="1" autoCompressPictures="0">
   <p:sldMasterIdLst>
     <p:sldMasterId id="2147483684" r:id="rId1"/>
   </p:sldMasterIdLst>
@@ -254,7 +254,7 @@
           <a:p>
             <a:fld id="{83D14EEA-DE26-4810-8E05-A65F0010FADE}" type="datetimeFigureOut">
               <a:rPr lang="de-DE" smtClean="0"/>
-              <a:t>25.03.2026</a:t>
+              <a:t>02.09.2026</a:t>
             </a:fld>
             <a:endParaRPr lang="de-DE"/>
           </a:p>
@@ -424,7 +424,7 @@
           <a:p>
             <a:fld id="{83D14EEA-DE26-4810-8E05-A65F0010FADE}" type="datetimeFigureOut">
               <a:rPr lang="de-DE" smtClean="0"/>
-              <a:t>25.03.2026</a:t>
+              <a:t>02.09.2026</a:t>
             </a:fld>
             <a:endParaRPr lang="de-DE"/>
           </a:p>
@@ -604,7 +604,7 @@
           <a:p>
             <a:fld id="{83D14EEA-DE26-4810-8E05-A65F0010FADE}" type="datetimeFigureOut">
               <a:rPr lang="de-DE" smtClean="0"/>
-              <a:t>25.03.2026</a:t>
+              <a:t>02.09.2026</a:t>
             </a:fld>
             <a:endParaRPr lang="de-DE"/>
           </a:p>
@@ -774,7 +774,7 @@
           <a:p>
             <a:fld id="{83D14EEA-DE26-4810-8E05-A65F0010FADE}" type="datetimeFigureOut">
               <a:rPr lang="de-DE" smtClean="0"/>
-              <a:t>25.03.2026</a:t>
+              <a:t>02.09.2026</a:t>
             </a:fld>
             <a:endParaRPr lang="de-DE"/>
           </a:p>
@@ -1018,7 +1018,7 @@
           <a:p>
             <a:fld id="{83D14EEA-DE26-4810-8E05-A65F0010FADE}" type="datetimeFigureOut">
               <a:rPr lang="de-DE" smtClean="0"/>
-              <a:t>25.03.2026</a:t>
+              <a:t>02.09.2026</a:t>
             </a:fld>
             <a:endParaRPr lang="de-DE"/>
           </a:p>
@@ -1250,7 +1250,7 @@
           <a:p>
             <a:fld id="{83D14EEA-DE26-4810-8E05-A65F0010FADE}" type="datetimeFigureOut">
               <a:rPr lang="de-DE" smtClean="0"/>
-              <a:t>25.03.2026</a:t>
+              <a:t>02.09.2026</a:t>
             </a:fld>
             <a:endParaRPr lang="de-DE"/>
           </a:p>
@@ -1617,7 +1617,7 @@
           <a:p>
             <a:fld id="{83D14EEA-DE26-4810-8E05-A65F0010FADE}" type="datetimeFigureOut">
               <a:rPr lang="de-DE" smtClean="0"/>
-              <a:t>25.03.2026</a:t>
+              <a:t>02.09.2026</a:t>
             </a:fld>
             <a:endParaRPr lang="de-DE"/>
           </a:p>
@@ -1735,7 +1735,7 @@
           <a:p>
             <a:fld id="{83D14EEA-DE26-4810-8E05-A65F0010FADE}" type="datetimeFigureOut">
               <a:rPr lang="de-DE" smtClean="0"/>
-              <a:t>25.03.2026</a:t>
+              <a:t>02.09.2026</a:t>
             </a:fld>
             <a:endParaRPr lang="de-DE"/>
           </a:p>
@@ -1830,7 +1830,7 @@
           <a:p>
             <a:fld id="{83D14EEA-DE26-4810-8E05-A65F0010FADE}" type="datetimeFigureOut">
               <a:rPr lang="de-DE" smtClean="0"/>
-              <a:t>25.03.2026</a:t>
+              <a:t>02.09.2026</a:t>
             </a:fld>
             <a:endParaRPr lang="de-DE"/>
           </a:p>
@@ -2107,7 +2107,7 @@
           <a:p>
             <a:fld id="{83D14EEA-DE26-4810-8E05-A65F0010FADE}" type="datetimeFigureOut">
               <a:rPr lang="de-DE" smtClean="0"/>
-              <a:t>25.03.2026</a:t>
+              <a:t>02.09.2026</a:t>
             </a:fld>
             <a:endParaRPr lang="de-DE"/>
           </a:p>
@@ -2364,7 +2364,7 @@
           <a:p>
             <a:fld id="{83D14EEA-DE26-4810-8E05-A65F0010FADE}" type="datetimeFigureOut">
               <a:rPr lang="de-DE" smtClean="0"/>
-              <a:t>25.03.2026</a:t>
+              <a:t>02.09.2026</a:t>
             </a:fld>
             <a:endParaRPr lang="de-DE"/>
           </a:p>
@@ -2577,7 +2577,7 @@
           <a:p>
             <a:fld id="{83D14EEA-DE26-4810-8E05-A65F0010FADE}" type="datetimeFigureOut">
               <a:rPr lang="de-DE" smtClean="0"/>
-              <a:t>25.03.2026</a:t>
+              <a:t>02.09.2026</a:t>
             </a:fld>
             <a:endParaRPr lang="de-DE"/>
           </a:p>
@@ -3511,7 +3511,7 @@
                   <a:latin typeface="Arial" panose="020B0604020202020204" pitchFamily="34" charset="0"/>
                   <a:cs typeface="Arial" panose="020B0604020202020204" pitchFamily="34" charset="0"/>
                 </a:rPr>
-                <a:t>of Datasets</a:t>
+                <a:t>to Datasets</a:t>
               </a:r>
             </a:p>
           </p:txBody>
@@ -3979,7 +3979,7 @@
                   <a:latin typeface="Arial" panose="020B0604020202020204" pitchFamily="34" charset="0"/>
                   <a:cs typeface="Arial" panose="020B0604020202020204" pitchFamily="34" charset="0"/>
                 </a:rPr>
-                <a:t>of Datasets</a:t>
+                <a:t>to Datasets</a:t>
               </a:r>
               <a:endParaRPr lang="de-DE" sz="1291" dirty="0">
                 <a:latin typeface="Arial" panose="020B0604020202020204" pitchFamily="34" charset="0"/>
@@ -4073,7 +4073,7 @@
                   <a:latin typeface="Arial" panose="020B0604020202020204" pitchFamily="34" charset="0"/>
                   <a:cs typeface="Arial" panose="020B0604020202020204" pitchFamily="34" charset="0"/>
                 </a:rPr>
-                <a:t>References of Datasets</a:t>
+                <a:t>References to Datasets</a:t>
               </a:r>
             </a:p>
             <a:p>
